--- a/0.report/산탄데르_ppt_template.pptx
+++ b/0.report/산탄데르_ppt_template.pptx
@@ -9,7 +9,12 @@
     <p:sldId id="257" r:id="rId3"/>
     <p:sldId id="259" r:id="rId4"/>
     <p:sldId id="260" r:id="rId5"/>
-    <p:sldId id="258" r:id="rId6"/>
+    <p:sldId id="261" r:id="rId6"/>
+    <p:sldId id="262" r:id="rId7"/>
+    <p:sldId id="263" r:id="rId8"/>
+    <p:sldId id="264" r:id="rId9"/>
+    <p:sldId id="265" r:id="rId10"/>
+    <p:sldId id="258" r:id="rId11"/>
   </p:sldIdLst>
   <p:sldSz cx="12192000" cy="6858000"/>
   <p:notesSz cx="6858000" cy="9144000"/>
@@ -256,7 +261,7 @@
           <a:p>
             <a:fld id="{2566825D-2B69-4989-8861-A6901ABADB6C}" type="datetimeFigureOut">
               <a:rPr lang="ko-KR" altLang="en-US" smtClean="0"/>
-              <a:t>2025-12-09</a:t>
+              <a:t>2025-12-10</a:t>
             </a:fld>
             <a:endParaRPr lang="ko-KR" altLang="en-US"/>
           </a:p>
@@ -424,7 +429,7 @@
           <a:p>
             <a:fld id="{2566825D-2B69-4989-8861-A6901ABADB6C}" type="datetimeFigureOut">
               <a:rPr lang="ko-KR" altLang="en-US" smtClean="0"/>
-              <a:t>2025-12-09</a:t>
+              <a:t>2025-12-10</a:t>
             </a:fld>
             <a:endParaRPr lang="ko-KR" altLang="en-US"/>
           </a:p>
@@ -602,7 +607,7 @@
           <a:p>
             <a:fld id="{2566825D-2B69-4989-8861-A6901ABADB6C}" type="datetimeFigureOut">
               <a:rPr lang="ko-KR" altLang="en-US" smtClean="0"/>
-              <a:t>2025-12-09</a:t>
+              <a:t>2025-12-10</a:t>
             </a:fld>
             <a:endParaRPr lang="ko-KR" altLang="en-US"/>
           </a:p>
@@ -770,7 +775,7 @@
           <a:p>
             <a:fld id="{2566825D-2B69-4989-8861-A6901ABADB6C}" type="datetimeFigureOut">
               <a:rPr lang="ko-KR" altLang="en-US" smtClean="0"/>
-              <a:t>2025-12-09</a:t>
+              <a:t>2025-12-10</a:t>
             </a:fld>
             <a:endParaRPr lang="ko-KR" altLang="en-US"/>
           </a:p>
@@ -1015,7 +1020,7 @@
           <a:p>
             <a:fld id="{2566825D-2B69-4989-8861-A6901ABADB6C}" type="datetimeFigureOut">
               <a:rPr lang="ko-KR" altLang="en-US" smtClean="0"/>
-              <a:t>2025-12-09</a:t>
+              <a:t>2025-12-10</a:t>
             </a:fld>
             <a:endParaRPr lang="ko-KR" altLang="en-US"/>
           </a:p>
@@ -1244,7 +1249,7 @@
           <a:p>
             <a:fld id="{2566825D-2B69-4989-8861-A6901ABADB6C}" type="datetimeFigureOut">
               <a:rPr lang="ko-KR" altLang="en-US" smtClean="0"/>
-              <a:t>2025-12-09</a:t>
+              <a:t>2025-12-10</a:t>
             </a:fld>
             <a:endParaRPr lang="ko-KR" altLang="en-US"/>
           </a:p>
@@ -1608,7 +1613,7 @@
           <a:p>
             <a:fld id="{2566825D-2B69-4989-8861-A6901ABADB6C}" type="datetimeFigureOut">
               <a:rPr lang="ko-KR" altLang="en-US" smtClean="0"/>
-              <a:t>2025-12-09</a:t>
+              <a:t>2025-12-10</a:t>
             </a:fld>
             <a:endParaRPr lang="ko-KR" altLang="en-US"/>
           </a:p>
@@ -1725,7 +1730,7 @@
           <a:p>
             <a:fld id="{2566825D-2B69-4989-8861-A6901ABADB6C}" type="datetimeFigureOut">
               <a:rPr lang="ko-KR" altLang="en-US" smtClean="0"/>
-              <a:t>2025-12-09</a:t>
+              <a:t>2025-12-10</a:t>
             </a:fld>
             <a:endParaRPr lang="ko-KR" altLang="en-US"/>
           </a:p>
@@ -1820,7 +1825,7 @@
           <a:p>
             <a:fld id="{2566825D-2B69-4989-8861-A6901ABADB6C}" type="datetimeFigureOut">
               <a:rPr lang="ko-KR" altLang="en-US" smtClean="0"/>
-              <a:t>2025-12-09</a:t>
+              <a:t>2025-12-10</a:t>
             </a:fld>
             <a:endParaRPr lang="ko-KR" altLang="en-US"/>
           </a:p>
@@ -2095,7 +2100,7 @@
           <a:p>
             <a:fld id="{2566825D-2B69-4989-8861-A6901ABADB6C}" type="datetimeFigureOut">
               <a:rPr lang="ko-KR" altLang="en-US" smtClean="0"/>
-              <a:t>2025-12-09</a:t>
+              <a:t>2025-12-10</a:t>
             </a:fld>
             <a:endParaRPr lang="ko-KR" altLang="en-US"/>
           </a:p>
@@ -2347,7 +2352,7 @@
           <a:p>
             <a:fld id="{2566825D-2B69-4989-8861-A6901ABADB6C}" type="datetimeFigureOut">
               <a:rPr lang="ko-KR" altLang="en-US" smtClean="0"/>
-              <a:t>2025-12-09</a:t>
+              <a:t>2025-12-10</a:t>
             </a:fld>
             <a:endParaRPr lang="ko-KR" altLang="en-US"/>
           </a:p>
@@ -2558,7 +2563,7 @@
           <a:p>
             <a:fld id="{2566825D-2B69-4989-8861-A6901ABADB6C}" type="datetimeFigureOut">
               <a:rPr lang="ko-KR" altLang="en-US" smtClean="0"/>
-              <a:t>2025-12-09</a:t>
+              <a:t>2025-12-10</a:t>
             </a:fld>
             <a:endParaRPr lang="ko-KR" altLang="en-US"/>
           </a:p>
@@ -3249,1065 +3254,7 @@
 </p:sld>
 </file>
 
-<file path=ppt/slides/slide2.xml><?xml version="1.0" encoding="utf-8"?>
-<p:sld xmlns:a="http://schemas.openxmlformats.org/drawingml/2006/main" xmlns:r="http://schemas.openxmlformats.org/officeDocument/2006/relationships" xmlns:p="http://schemas.openxmlformats.org/presentationml/2006/main">
-  <p:cSld>
-    <p:spTree>
-      <p:nvGrpSpPr>
-        <p:cNvPr id="1" name=""/>
-        <p:cNvGrpSpPr/>
-        <p:nvPr/>
-      </p:nvGrpSpPr>
-      <p:grpSpPr>
-        <a:xfrm>
-          <a:off x="0" y="0"/>
-          <a:ext cx="0" cy="0"/>
-          <a:chOff x="0" y="0"/>
-          <a:chExt cx="0" cy="0"/>
-        </a:xfrm>
-      </p:grpSpPr>
-      <p:pic>
-        <p:nvPicPr>
-          <p:cNvPr id="5" name="그림 4" descr="File:Santander Logo.PNG - Wikimedia Commons">
-            <a:extLst>
-              <a:ext uri="{FF2B5EF4-FFF2-40B4-BE49-F238E27FC236}">
-                <a16:creationId xmlns:a16="http://schemas.microsoft.com/office/drawing/2014/main" id="{6462E84C-D5DC-CF91-A1D4-96D735F28BBB}"/>
-              </a:ext>
-            </a:extLst>
-          </p:cNvPr>
-          <p:cNvPicPr>
-            <a:picLocks noChangeAspect="1"/>
-          </p:cNvPicPr>
-          <p:nvPr/>
-        </p:nvPicPr>
-        <p:blipFill>
-          <a:blip r:embed="rId2"/>
-          <a:stretch>
-            <a:fillRect/>
-          </a:stretch>
-        </p:blipFill>
-        <p:spPr>
-          <a:xfrm>
-            <a:off x="2" y="5771641"/>
-            <a:ext cx="2901462" cy="1088332"/>
-          </a:xfrm>
-          <a:prstGeom prst="rect">
-            <a:avLst/>
-          </a:prstGeom>
-        </p:spPr>
-      </p:pic>
-      <p:sp>
-        <p:nvSpPr>
-          <p:cNvPr id="6" name="직사각형 5">
-            <a:extLst>
-              <a:ext uri="{FF2B5EF4-FFF2-40B4-BE49-F238E27FC236}">
-                <a16:creationId xmlns:a16="http://schemas.microsoft.com/office/drawing/2014/main" id="{C1344FED-B355-D522-EB2F-276379F0C44F}"/>
-              </a:ext>
-            </a:extLst>
-          </p:cNvPr>
-          <p:cNvSpPr/>
-          <p:nvPr/>
-        </p:nvSpPr>
-        <p:spPr>
-          <a:xfrm>
-            <a:off x="-169334" y="0"/>
-            <a:ext cx="12848166" cy="656167"/>
-          </a:xfrm>
-          <a:prstGeom prst="rect">
-            <a:avLst/>
-          </a:prstGeom>
-          <a:solidFill>
-            <a:schemeClr val="bg1">
-              <a:lumMod val="95000"/>
-            </a:schemeClr>
-          </a:solidFill>
-          <a:ln>
-            <a:noFill/>
-          </a:ln>
-        </p:spPr>
-        <p:style>
-          <a:lnRef idx="2">
-            <a:schemeClr val="accent1">
-              <a:shade val="15000"/>
-            </a:schemeClr>
-          </a:lnRef>
-          <a:fillRef idx="1">
-            <a:schemeClr val="accent1"/>
-          </a:fillRef>
-          <a:effectRef idx="0">
-            <a:schemeClr val="accent1"/>
-          </a:effectRef>
-          <a:fontRef idx="minor">
-            <a:schemeClr val="lt1"/>
-          </a:fontRef>
-        </p:style>
-        <p:txBody>
-          <a:bodyPr rtlCol="0" anchor="ctr"/>
-          <a:lstStyle/>
-          <a:p>
-            <a:pPr algn="ctr"/>
-            <a:endParaRPr lang="ko-KR" altLang="en-US"/>
-          </a:p>
-        </p:txBody>
-      </p:sp>
-      <p:sp>
-        <p:nvSpPr>
-          <p:cNvPr id="7" name="TextBox 6">
-            <a:extLst>
-              <a:ext uri="{FF2B5EF4-FFF2-40B4-BE49-F238E27FC236}">
-                <a16:creationId xmlns:a16="http://schemas.microsoft.com/office/drawing/2014/main" id="{B8A43901-4860-FDEE-6F85-6B63241BFBDE}"/>
-              </a:ext>
-            </a:extLst>
-          </p:cNvPr>
-          <p:cNvSpPr txBox="1"/>
-          <p:nvPr/>
-        </p:nvSpPr>
-        <p:spPr>
-          <a:xfrm>
-            <a:off x="52914" y="179916"/>
-            <a:ext cx="5704416" cy="477054"/>
-          </a:xfrm>
-          <a:prstGeom prst="rect">
-            <a:avLst/>
-          </a:prstGeom>
-          <a:noFill/>
-          <a:ln>
-            <a:noFill/>
-          </a:ln>
-        </p:spPr>
-        <p:txBody>
-          <a:bodyPr rot="0" spcFirstLastPara="0" vertOverflow="overflow" horzOverflow="overflow" vert="horz" wrap="square" lIns="91440" tIns="45720" rIns="91440" bIns="45720" numCol="1" spcCol="0" rtlCol="0" fromWordArt="0" anchor="t" anchorCtr="0" forceAA="0" compatLnSpc="1">
-            <a:prstTxWarp prst="textNoShape">
-              <a:avLst/>
-            </a:prstTxWarp>
-            <a:spAutoFit/>
-          </a:bodyPr>
-          <a:lstStyle/>
-          <a:p>
-            <a:r>
-              <a:rPr lang="ko-KR" altLang="en-US" sz="2500" dirty="0">
-                <a:solidFill>
-                  <a:srgbClr val="747474"/>
-                </a:solidFill>
-                <a:latin typeface="Microsoft GothicNeo"/>
-                <a:ea typeface="Microsoft GothicNeo"/>
-                <a:cs typeface="Arial"/>
-              </a:rPr>
-              <a:t>02-1 프로젝트 배경 및 목표</a:t>
-            </a:r>
-          </a:p>
-        </p:txBody>
-      </p:sp>
-      <p:sp>
-        <p:nvSpPr>
-          <p:cNvPr id="3" name="TextBox 2">
-            <a:extLst>
-              <a:ext uri="{FF2B5EF4-FFF2-40B4-BE49-F238E27FC236}">
-                <a16:creationId xmlns:a16="http://schemas.microsoft.com/office/drawing/2014/main" id="{54E12DDD-70D9-C415-FD84-073D521F6F7C}"/>
-              </a:ext>
-            </a:extLst>
-          </p:cNvPr>
-          <p:cNvSpPr txBox="1"/>
-          <p:nvPr/>
-        </p:nvSpPr>
-        <p:spPr>
-          <a:xfrm>
-            <a:off x="613833" y="941917"/>
-            <a:ext cx="7725833" cy="1372492"/>
-          </a:xfrm>
-          <a:prstGeom prst="rect">
-            <a:avLst/>
-          </a:prstGeom>
-          <a:noFill/>
-        </p:spPr>
-        <p:txBody>
-          <a:bodyPr rot="0" spcFirstLastPara="0" vertOverflow="overflow" horzOverflow="overflow" vert="horz" wrap="square" lIns="91440" tIns="45720" rIns="91440" bIns="45720" numCol="1" spcCol="0" rtlCol="0" fromWordArt="0" anchor="t" anchorCtr="0" forceAA="0" compatLnSpc="1">
-            <a:prstTxWarp prst="textNoShape">
-              <a:avLst/>
-            </a:prstTxWarp>
-            <a:spAutoFit/>
-          </a:bodyPr>
-          <a:lstStyle/>
-          <a:p>
-            <a:pPr marL="285750" indent="-285750">
-              <a:lnSpc>
-                <a:spcPct val="150000"/>
-              </a:lnSpc>
-              <a:buFont typeface="Wingdings"/>
-              <a:buChar char="q"/>
-            </a:pPr>
-            <a:r>
-              <a:rPr lang="ko-KR" altLang="en-US" dirty="0">
-                <a:latin typeface="Microsoft GothicNeo"/>
-                <a:ea typeface="Microsoft GothicNeo"/>
-                <a:cs typeface="Microsoft GothicNeo"/>
-              </a:rPr>
-              <a:t>불만족 고객 조기 파악 및 맞춤형 서비스 제공</a:t>
-            </a:r>
-          </a:p>
-          <a:p>
-            <a:pPr marL="400050" lvl="2" indent="228600">
-              <a:lnSpc>
-                <a:spcPct val="150000"/>
-              </a:lnSpc>
-              <a:buFont typeface="Wingdings,Sans-Serif"/>
-              <a:buChar char="§"/>
-            </a:pPr>
-            <a:r>
-              <a:rPr lang="ko-KR" sz="1300" dirty="0">
-                <a:latin typeface="Microsoft GothicNeo"/>
-                <a:ea typeface="Microsoft GothicNeo"/>
-                <a:cs typeface="Microsoft GothicNeo"/>
-              </a:rPr>
-              <a:t>고객 만족을 전략적 핵심 지표로 설정</a:t>
-            </a:r>
-          </a:p>
-          <a:p>
-            <a:pPr marL="400050" lvl="2" indent="228600">
-              <a:lnSpc>
-                <a:spcPct val="150000"/>
-              </a:lnSpc>
-              <a:buFont typeface="Wingdings"/>
-              <a:buChar char="§"/>
-            </a:pPr>
-            <a:r>
-              <a:rPr lang="ko-KR" altLang="en-US" sz="1300" dirty="0">
-                <a:latin typeface="Microsoft GothicNeo"/>
-                <a:ea typeface="Microsoft GothicNeo"/>
-                <a:cs typeface="Microsoft GothicNeo"/>
-              </a:rPr>
-              <a:t>NPS 기반 고객 </a:t>
-            </a:r>
-            <a:r>
-              <a:rPr lang="ko-KR" altLang="en-US" sz="1300" dirty="0" err="1">
-                <a:latin typeface="Microsoft GothicNeo"/>
-                <a:ea typeface="Microsoft GothicNeo"/>
-                <a:cs typeface="Microsoft GothicNeo"/>
-              </a:rPr>
-              <a:t>경혐</a:t>
-            </a:r>
-            <a:r>
-              <a:rPr lang="ko-KR" altLang="en-US" sz="1300" dirty="0">
-                <a:latin typeface="Microsoft GothicNeo"/>
-                <a:ea typeface="Microsoft GothicNeo"/>
-                <a:cs typeface="Microsoft GothicNeo"/>
-              </a:rPr>
-              <a:t> 혁신</a:t>
-            </a:r>
-          </a:p>
-          <a:p>
-            <a:pPr marL="800100" lvl="3" indent="-228600">
-              <a:lnSpc>
-                <a:spcPct val="150000"/>
-              </a:lnSpc>
-              <a:buFont typeface="Calibri"/>
-              <a:buChar char="-"/>
-            </a:pPr>
-            <a:r>
-              <a:rPr lang="ko-KR" altLang="en-US" sz="1300">
-                <a:latin typeface="Microsoft GothicNeo"/>
-                <a:ea typeface="Microsoft GothicNeo"/>
-                <a:cs typeface="Microsoft GothicNeo"/>
-              </a:rPr>
-              <a:t>충성 고객 확대, 디지털 전환 가속화, 글로벌 다각화</a:t>
-            </a:r>
-          </a:p>
-        </p:txBody>
-      </p:sp>
-      <p:sp>
-        <p:nvSpPr>
-          <p:cNvPr id="8" name="직사각형 7">
-            <a:extLst>
-              <a:ext uri="{FF2B5EF4-FFF2-40B4-BE49-F238E27FC236}">
-                <a16:creationId xmlns:a16="http://schemas.microsoft.com/office/drawing/2014/main" id="{9020F1AD-A929-533A-4E7A-DACA1C0BA9BE}"/>
-              </a:ext>
-            </a:extLst>
-          </p:cNvPr>
-          <p:cNvSpPr/>
-          <p:nvPr/>
-        </p:nvSpPr>
-        <p:spPr>
-          <a:xfrm>
-            <a:off x="444500" y="1026583"/>
-            <a:ext cx="63499" cy="1291166"/>
-          </a:xfrm>
-          <a:prstGeom prst="rect">
-            <a:avLst/>
-          </a:prstGeom>
-          <a:solidFill>
-            <a:srgbClr val="C00000"/>
-          </a:solidFill>
-          <a:ln>
-            <a:noFill/>
-          </a:ln>
-        </p:spPr>
-        <p:style>
-          <a:lnRef idx="2">
-            <a:schemeClr val="accent1">
-              <a:shade val="15000"/>
-            </a:schemeClr>
-          </a:lnRef>
-          <a:fillRef idx="1">
-            <a:schemeClr val="accent1"/>
-          </a:fillRef>
-          <a:effectRef idx="0">
-            <a:schemeClr val="accent1"/>
-          </a:effectRef>
-          <a:fontRef idx="minor">
-            <a:schemeClr val="lt1"/>
-          </a:fontRef>
-        </p:style>
-        <p:txBody>
-          <a:bodyPr rtlCol="0" anchor="ctr"/>
-          <a:lstStyle/>
-          <a:p>
-            <a:pPr algn="ctr"/>
-            <a:endParaRPr lang="ko-KR" altLang="en-US"/>
-          </a:p>
-        </p:txBody>
-      </p:sp>
-      <p:pic>
-        <p:nvPicPr>
-          <p:cNvPr id="9" name="그래픽 8" descr="Our business strategy - Santander Annual Report 2020">
-            <a:extLst>
-              <a:ext uri="{FF2B5EF4-FFF2-40B4-BE49-F238E27FC236}">
-                <a16:creationId xmlns:a16="http://schemas.microsoft.com/office/drawing/2014/main" id="{63EF137A-760C-267E-42D1-E291D344B750}"/>
-              </a:ext>
-            </a:extLst>
-          </p:cNvPr>
-          <p:cNvPicPr>
-            <a:picLocks noChangeAspect="1"/>
-          </p:cNvPicPr>
-          <p:nvPr/>
-        </p:nvPicPr>
-        <p:blipFill>
-          <a:blip r:embed="rId3">
-            <a:extLst>
-              <a:ext uri="{96DAC541-7B7A-43D3-8B79-37D633B846F1}">
-                <asvg:svgBlip xmlns:asvg="http://schemas.microsoft.com/office/drawing/2016/SVG/main" r:embed="rId4"/>
-              </a:ext>
-            </a:extLst>
-          </a:blip>
-          <a:stretch>
-            <a:fillRect/>
-          </a:stretch>
-        </p:blipFill>
-        <p:spPr>
-          <a:xfrm>
-            <a:off x="3189817" y="2601383"/>
-            <a:ext cx="6817783" cy="3528483"/>
-          </a:xfrm>
-          <a:prstGeom prst="rect">
-            <a:avLst/>
-          </a:prstGeom>
-        </p:spPr>
-      </p:pic>
-    </p:spTree>
-    <p:extLst>
-      <p:ext uri="{BB962C8B-B14F-4D97-AF65-F5344CB8AC3E}">
-        <p14:creationId xmlns:p14="http://schemas.microsoft.com/office/powerpoint/2010/main" val="1572256920"/>
-      </p:ext>
-    </p:extLst>
-  </p:cSld>
-  <p:clrMapOvr>
-    <a:masterClrMapping/>
-  </p:clrMapOvr>
-</p:sld>
-</file>
-
-<file path=ppt/slides/slide3.xml><?xml version="1.0" encoding="utf-8"?>
-<p:sld xmlns:a="http://schemas.openxmlformats.org/drawingml/2006/main" xmlns:r="http://schemas.openxmlformats.org/officeDocument/2006/relationships" xmlns:p="http://schemas.openxmlformats.org/presentationml/2006/main">
-  <p:cSld>
-    <p:spTree>
-      <p:nvGrpSpPr>
-        <p:cNvPr id="1" name=""/>
-        <p:cNvGrpSpPr/>
-        <p:nvPr/>
-      </p:nvGrpSpPr>
-      <p:grpSpPr>
-        <a:xfrm>
-          <a:off x="0" y="0"/>
-          <a:ext cx="0" cy="0"/>
-          <a:chOff x="0" y="0"/>
-          <a:chExt cx="0" cy="0"/>
-        </a:xfrm>
-      </p:grpSpPr>
-      <p:sp>
-        <p:nvSpPr>
-          <p:cNvPr id="11" name="직사각형 10">
-            <a:extLst>
-              <a:ext uri="{FF2B5EF4-FFF2-40B4-BE49-F238E27FC236}">
-                <a16:creationId xmlns:a16="http://schemas.microsoft.com/office/drawing/2014/main" id="{186036B6-C51E-BC8E-8382-B95EBC7B66C3}"/>
-              </a:ext>
-            </a:extLst>
-          </p:cNvPr>
-          <p:cNvSpPr/>
-          <p:nvPr/>
-        </p:nvSpPr>
-        <p:spPr>
-          <a:xfrm>
-            <a:off x="-878417" y="2455334"/>
-            <a:ext cx="13853583" cy="3460750"/>
-          </a:xfrm>
-          <a:prstGeom prst="rect">
-            <a:avLst/>
-          </a:prstGeom>
-          <a:solidFill>
-            <a:schemeClr val="bg1">
-              <a:lumMod val="85000"/>
-            </a:schemeClr>
-          </a:solidFill>
-          <a:ln>
-            <a:noFill/>
-          </a:ln>
-        </p:spPr>
-        <p:style>
-          <a:lnRef idx="2">
-            <a:schemeClr val="accent1">
-              <a:shade val="15000"/>
-            </a:schemeClr>
-          </a:lnRef>
-          <a:fillRef idx="1">
-            <a:schemeClr val="accent1"/>
-          </a:fillRef>
-          <a:effectRef idx="0">
-            <a:schemeClr val="accent1"/>
-          </a:effectRef>
-          <a:fontRef idx="minor">
-            <a:schemeClr val="lt1"/>
-          </a:fontRef>
-        </p:style>
-        <p:txBody>
-          <a:bodyPr rtlCol="0" anchor="ctr"/>
-          <a:lstStyle/>
-          <a:p>
-            <a:pPr algn="ctr"/>
-            <a:endParaRPr lang="ko-KR" altLang="en-US"/>
-          </a:p>
-        </p:txBody>
-      </p:sp>
-      <p:sp>
-        <p:nvSpPr>
-          <p:cNvPr id="5" name="직사각형 4">
-            <a:extLst>
-              <a:ext uri="{FF2B5EF4-FFF2-40B4-BE49-F238E27FC236}">
-                <a16:creationId xmlns:a16="http://schemas.microsoft.com/office/drawing/2014/main" id="{F8755259-13E7-FDFE-ABAB-E7205DC8A699}"/>
-              </a:ext>
-            </a:extLst>
-          </p:cNvPr>
-          <p:cNvSpPr/>
-          <p:nvPr/>
-        </p:nvSpPr>
-        <p:spPr>
-          <a:xfrm>
-            <a:off x="-169334" y="0"/>
-            <a:ext cx="12848166" cy="656167"/>
-          </a:xfrm>
-          <a:prstGeom prst="rect">
-            <a:avLst/>
-          </a:prstGeom>
-          <a:solidFill>
-            <a:schemeClr val="bg1">
-              <a:lumMod val="95000"/>
-            </a:schemeClr>
-          </a:solidFill>
-          <a:ln>
-            <a:noFill/>
-          </a:ln>
-        </p:spPr>
-        <p:style>
-          <a:lnRef idx="2">
-            <a:schemeClr val="accent1">
-              <a:shade val="15000"/>
-            </a:schemeClr>
-          </a:lnRef>
-          <a:fillRef idx="1">
-            <a:schemeClr val="accent1"/>
-          </a:fillRef>
-          <a:effectRef idx="0">
-            <a:schemeClr val="accent1"/>
-          </a:effectRef>
-          <a:fontRef idx="minor">
-            <a:schemeClr val="lt1"/>
-          </a:fontRef>
-        </p:style>
-        <p:txBody>
-          <a:bodyPr rtlCol="0" anchor="ctr"/>
-          <a:lstStyle/>
-          <a:p>
-            <a:pPr algn="ctr"/>
-            <a:endParaRPr lang="ko-KR" altLang="en-US"/>
-          </a:p>
-        </p:txBody>
-      </p:sp>
-      <p:sp>
-        <p:nvSpPr>
-          <p:cNvPr id="7" name="TextBox 6">
-            <a:extLst>
-              <a:ext uri="{FF2B5EF4-FFF2-40B4-BE49-F238E27FC236}">
-                <a16:creationId xmlns:a16="http://schemas.microsoft.com/office/drawing/2014/main" id="{41A4E252-00AD-10FC-4B8B-570B1BF818FE}"/>
-              </a:ext>
-            </a:extLst>
-          </p:cNvPr>
-          <p:cNvSpPr txBox="1"/>
-          <p:nvPr/>
-        </p:nvSpPr>
-        <p:spPr>
-          <a:xfrm>
-            <a:off x="-2" y="179916"/>
-            <a:ext cx="7217832" cy="477054"/>
-          </a:xfrm>
-          <a:prstGeom prst="rect">
-            <a:avLst/>
-          </a:prstGeom>
-          <a:noFill/>
-          <a:ln>
-            <a:noFill/>
-          </a:ln>
-        </p:spPr>
-        <p:txBody>
-          <a:bodyPr rot="0" spcFirstLastPara="0" vertOverflow="overflow" horzOverflow="overflow" vert="horz" wrap="square" lIns="91440" tIns="45720" rIns="91440" bIns="45720" numCol="1" spcCol="0" rtlCol="0" fromWordArt="0" anchor="t" anchorCtr="0" forceAA="0" compatLnSpc="1">
-            <a:prstTxWarp prst="textNoShape">
-              <a:avLst/>
-            </a:prstTxWarp>
-            <a:spAutoFit/>
-          </a:bodyPr>
-          <a:lstStyle/>
-          <a:p>
-            <a:r>
-              <a:rPr lang="ko-KR" altLang="en-US" sz="2500" dirty="0">
-                <a:solidFill>
-                  <a:srgbClr val="747474"/>
-                </a:solidFill>
-                <a:latin typeface="Microsoft GothicNeo"/>
-                <a:ea typeface="Microsoft GothicNeo"/>
-                <a:cs typeface="Arial"/>
-              </a:rPr>
-              <a:t>02-2 NPS 개요</a:t>
-            </a:r>
-          </a:p>
-        </p:txBody>
-      </p:sp>
-      <p:pic>
-        <p:nvPicPr>
-          <p:cNvPr id="3" name="그림 2" descr="File:Santander Logo.PNG - Wikimedia Commons">
-            <a:extLst>
-              <a:ext uri="{FF2B5EF4-FFF2-40B4-BE49-F238E27FC236}">
-                <a16:creationId xmlns:a16="http://schemas.microsoft.com/office/drawing/2014/main" id="{66E04D3B-A8D7-9D80-F5DB-97BE418C1C6C}"/>
-              </a:ext>
-            </a:extLst>
-          </p:cNvPr>
-          <p:cNvPicPr>
-            <a:picLocks noChangeAspect="1"/>
-          </p:cNvPicPr>
-          <p:nvPr/>
-        </p:nvPicPr>
-        <p:blipFill>
-          <a:blip r:embed="rId2"/>
-          <a:stretch>
-            <a:fillRect/>
-          </a:stretch>
-        </p:blipFill>
-        <p:spPr>
-          <a:xfrm>
-            <a:off x="2" y="5771641"/>
-            <a:ext cx="2901462" cy="1088332"/>
-          </a:xfrm>
-          <a:prstGeom prst="rect">
-            <a:avLst/>
-          </a:prstGeom>
-        </p:spPr>
-      </p:pic>
-      <p:pic>
-        <p:nvPicPr>
-          <p:cNvPr id="4" name="그림 3" descr="Santander Bank NPS &amp; Customer Reviews | Comparably">
-            <a:extLst>
-              <a:ext uri="{FF2B5EF4-FFF2-40B4-BE49-F238E27FC236}">
-                <a16:creationId xmlns:a16="http://schemas.microsoft.com/office/drawing/2014/main" id="{A635F761-2B5D-E9B9-8506-5B00D840ECE7}"/>
-              </a:ext>
-            </a:extLst>
-          </p:cNvPr>
-          <p:cNvPicPr>
-            <a:picLocks noChangeAspect="1"/>
-          </p:cNvPicPr>
-          <p:nvPr/>
-        </p:nvPicPr>
-        <p:blipFill>
-          <a:blip r:embed="rId3"/>
-          <a:stretch>
-            <a:fillRect/>
-          </a:stretch>
-        </p:blipFill>
-        <p:spPr>
-          <a:xfrm>
-            <a:off x="1090083" y="3010960"/>
-            <a:ext cx="5037667" cy="2656417"/>
-          </a:xfrm>
-          <a:prstGeom prst="rect">
-            <a:avLst/>
-          </a:prstGeom>
-        </p:spPr>
-      </p:pic>
-      <p:sp>
-        <p:nvSpPr>
-          <p:cNvPr id="9" name="TextBox 8">
-            <a:extLst>
-              <a:ext uri="{FF2B5EF4-FFF2-40B4-BE49-F238E27FC236}">
-                <a16:creationId xmlns:a16="http://schemas.microsoft.com/office/drawing/2014/main" id="{9795F65B-45D6-D04A-7832-36CDA62909DD}"/>
-              </a:ext>
-            </a:extLst>
-          </p:cNvPr>
-          <p:cNvSpPr txBox="1"/>
-          <p:nvPr/>
-        </p:nvSpPr>
-        <p:spPr>
-          <a:xfrm>
-            <a:off x="613833" y="941917"/>
-            <a:ext cx="7725833" cy="1208023"/>
-          </a:xfrm>
-          <a:prstGeom prst="rect">
-            <a:avLst/>
-          </a:prstGeom>
-          <a:noFill/>
-        </p:spPr>
-        <p:txBody>
-          <a:bodyPr rot="0" spcFirstLastPara="0" vertOverflow="overflow" horzOverflow="overflow" vert="horz" wrap="square" lIns="91440" tIns="45720" rIns="91440" bIns="45720" numCol="1" spcCol="0" rtlCol="0" fromWordArt="0" anchor="t" anchorCtr="0" forceAA="0" compatLnSpc="1">
-            <a:prstTxWarp prst="textNoShape">
-              <a:avLst/>
-            </a:prstTxWarp>
-            <a:spAutoFit/>
-          </a:bodyPr>
-          <a:lstStyle/>
-          <a:p>
-            <a:pPr marL="285750" indent="-285750">
-              <a:lnSpc>
-                <a:spcPct val="150000"/>
-              </a:lnSpc>
-              <a:buFont typeface="Wingdings"/>
-              <a:buChar char="q"/>
-            </a:pPr>
-            <a:r>
-              <a:rPr lang="ko-KR" altLang="en-US" dirty="0">
-                <a:latin typeface="Microsoft GothicNeo"/>
-                <a:ea typeface="Microsoft GothicNeo"/>
-                <a:cs typeface="Microsoft GothicNeo"/>
-              </a:rPr>
-              <a:t>NPS(Net </a:t>
-            </a:r>
-            <a:r>
-              <a:rPr lang="ko-KR" altLang="en-US" err="1">
-                <a:latin typeface="Microsoft GothicNeo"/>
-                <a:ea typeface="Microsoft GothicNeo"/>
-                <a:cs typeface="Microsoft GothicNeo"/>
-              </a:rPr>
-              <a:t>Promoter</a:t>
-            </a:r>
-            <a:r>
-              <a:rPr lang="ko-KR" altLang="en-US" dirty="0">
-                <a:latin typeface="Microsoft GothicNeo"/>
-                <a:ea typeface="Microsoft GothicNeo"/>
-                <a:cs typeface="Microsoft GothicNeo"/>
-              </a:rPr>
-              <a:t> </a:t>
-            </a:r>
-            <a:r>
-              <a:rPr lang="ko-KR" altLang="en-US" err="1">
-                <a:latin typeface="Microsoft GothicNeo"/>
-                <a:ea typeface="Microsoft GothicNeo"/>
-                <a:cs typeface="Microsoft GothicNeo"/>
-              </a:rPr>
-              <a:t>Score</a:t>
-            </a:r>
-            <a:r>
-              <a:rPr lang="ko-KR" altLang="en-US" dirty="0">
-                <a:latin typeface="Microsoft GothicNeo"/>
-                <a:ea typeface="Microsoft GothicNeo"/>
-                <a:cs typeface="Microsoft GothicNeo"/>
-              </a:rPr>
-              <a:t>)</a:t>
-            </a:r>
-            <a:endParaRPr lang="ko-KR"/>
-          </a:p>
-          <a:p>
-            <a:pPr marL="400050" lvl="2" indent="228600">
-              <a:lnSpc>
-                <a:spcPct val="150000"/>
-              </a:lnSpc>
-              <a:buFont typeface="Wingdings"/>
-              <a:buChar char="§"/>
-            </a:pPr>
-            <a:r>
-              <a:rPr lang="ko-KR" altLang="en-US" sz="1300" dirty="0">
-                <a:latin typeface="Microsoft GothicNeo"/>
-                <a:ea typeface="Microsoft GothicNeo"/>
-                <a:cs typeface="Microsoft GothicNeo"/>
-              </a:rPr>
-              <a:t>고객 추천 의향 지표</a:t>
-            </a:r>
-          </a:p>
-          <a:p>
-            <a:pPr marL="400050" lvl="2" indent="228600">
-              <a:buFont typeface="Wingdings"/>
-              <a:buChar char="§"/>
-            </a:pPr>
-            <a:r>
-              <a:rPr lang="ko-KR" altLang="en-US" sz="1300" dirty="0">
-                <a:latin typeface="Microsoft GothicNeo"/>
-                <a:ea typeface="Microsoft GothicNeo"/>
-                <a:cs typeface="Microsoft GothicNeo"/>
-              </a:rPr>
-              <a:t>계산 : 추천 고객 비율 - </a:t>
-            </a:r>
-            <a:r>
-              <a:rPr lang="ko-KR" altLang="en-US" sz="1300" err="1">
-                <a:latin typeface="Microsoft GothicNeo"/>
-                <a:ea typeface="Microsoft GothicNeo"/>
-                <a:cs typeface="Microsoft GothicNeo"/>
-              </a:rPr>
-              <a:t>비추천</a:t>
-            </a:r>
-            <a:r>
-              <a:rPr lang="ko-KR" altLang="en-US" sz="1300" dirty="0">
-                <a:latin typeface="Microsoft GothicNeo"/>
-                <a:ea typeface="Microsoft GothicNeo"/>
-                <a:cs typeface="Microsoft GothicNeo"/>
-              </a:rPr>
-              <a:t> 고객 비율</a:t>
-            </a:r>
-          </a:p>
-          <a:p>
-            <a:pPr marL="400050" lvl="2" indent="228600">
-              <a:buFont typeface="Wingdings"/>
-              <a:buChar char="§"/>
-            </a:pPr>
-            <a:r>
-              <a:rPr lang="ko-KR" altLang="en-US" sz="1300" dirty="0">
-                <a:latin typeface="Microsoft GothicNeo"/>
-                <a:ea typeface="Microsoft GothicNeo"/>
-                <a:cs typeface="Microsoft GothicNeo"/>
-              </a:rPr>
-              <a:t>금융업계 활용 : 충성도 및 장기 수익성 예측</a:t>
-            </a:r>
-          </a:p>
-        </p:txBody>
-      </p:sp>
-      <p:pic>
-        <p:nvPicPr>
-          <p:cNvPr id="10" name="그림 9" descr="Santander Bank NPS &amp; Customer Reviews | Comparably">
-            <a:extLst>
-              <a:ext uri="{FF2B5EF4-FFF2-40B4-BE49-F238E27FC236}">
-                <a16:creationId xmlns:a16="http://schemas.microsoft.com/office/drawing/2014/main" id="{0374E877-A9DC-C142-AC11-91614F6A2EB1}"/>
-              </a:ext>
-            </a:extLst>
-          </p:cNvPr>
-          <p:cNvPicPr>
-            <a:picLocks noChangeAspect="1"/>
-          </p:cNvPicPr>
-          <p:nvPr/>
-        </p:nvPicPr>
-        <p:blipFill>
-          <a:blip r:embed="rId4"/>
-          <a:stretch>
-            <a:fillRect/>
-          </a:stretch>
-        </p:blipFill>
-        <p:spPr>
-          <a:xfrm>
-            <a:off x="6350000" y="3010960"/>
-            <a:ext cx="5037667" cy="2656417"/>
-          </a:xfrm>
-          <a:prstGeom prst="rect">
-            <a:avLst/>
-          </a:prstGeom>
-        </p:spPr>
-      </p:pic>
-      <p:sp>
-        <p:nvSpPr>
-          <p:cNvPr id="13" name="TextBox 12">
-            <a:extLst>
-              <a:ext uri="{FF2B5EF4-FFF2-40B4-BE49-F238E27FC236}">
-                <a16:creationId xmlns:a16="http://schemas.microsoft.com/office/drawing/2014/main" id="{AEC1F296-D1E0-4147-2CA8-2833855BCDDD}"/>
-              </a:ext>
-            </a:extLst>
-          </p:cNvPr>
-          <p:cNvSpPr txBox="1"/>
-          <p:nvPr/>
-        </p:nvSpPr>
-        <p:spPr>
-          <a:xfrm>
-            <a:off x="2063749" y="2589660"/>
-            <a:ext cx="8383627" cy="323165"/>
-          </a:xfrm>
-          <a:prstGeom prst="rect">
-            <a:avLst/>
-          </a:prstGeom>
-          <a:noFill/>
-        </p:spPr>
-        <p:txBody>
-          <a:bodyPr rot="0" spcFirstLastPara="0" vertOverflow="overflow" horzOverflow="overflow" vert="horz" wrap="square" lIns="91440" tIns="45720" rIns="91440" bIns="45720" numCol="1" spcCol="0" rtlCol="0" fromWordArt="0" anchor="t" anchorCtr="0" forceAA="0" compatLnSpc="1">
-            <a:prstTxWarp prst="textNoShape">
-              <a:avLst/>
-            </a:prstTxWarp>
-            <a:spAutoFit/>
-          </a:bodyPr>
-          <a:lstStyle/>
-          <a:p>
-            <a:pPr algn="ctr"/>
-            <a:r>
-              <a:rPr lang="ko-KR" altLang="en-US" sz="1500" dirty="0">
-                <a:latin typeface="Microsoft GothicNeo"/>
-                <a:ea typeface="Microsoft GothicNeo"/>
-                <a:cs typeface="Microsoft GothicNeo"/>
-              </a:rPr>
-              <a:t>[ 그림 2.1 </a:t>
-            </a:r>
-            <a:r>
-              <a:rPr lang="ko-KR" altLang="en-US" sz="1500" err="1">
-                <a:latin typeface="Microsoft GothicNeo"/>
-                <a:ea typeface="Microsoft GothicNeo"/>
-                <a:cs typeface="Microsoft GothicNeo"/>
-              </a:rPr>
-              <a:t>산탄데르</a:t>
-            </a:r>
-            <a:r>
-              <a:rPr lang="ko-KR" altLang="en-US" sz="1500" dirty="0">
-                <a:latin typeface="Microsoft GothicNeo"/>
-                <a:ea typeface="Microsoft GothicNeo"/>
-                <a:cs typeface="Microsoft GothicNeo"/>
-              </a:rPr>
-              <a:t> 은행 NPS 성과 지표 (24' - 25') ]</a:t>
-            </a:r>
-            <a:endParaRPr lang="ko-KR" altLang="en-US" sz="1500">
-              <a:latin typeface="Microsoft GothicNeo"/>
-              <a:ea typeface="Microsoft GothicNeo"/>
-              <a:cs typeface="Microsoft GothicNeo"/>
-            </a:endParaRPr>
-          </a:p>
-        </p:txBody>
-      </p:sp>
-      <p:sp>
-        <p:nvSpPr>
-          <p:cNvPr id="14" name="직사각형 13">
-            <a:extLst>
-              <a:ext uri="{FF2B5EF4-FFF2-40B4-BE49-F238E27FC236}">
-                <a16:creationId xmlns:a16="http://schemas.microsoft.com/office/drawing/2014/main" id="{F3CC7E79-6F0A-4DA2-DA86-8461ACD51F9A}"/>
-              </a:ext>
-            </a:extLst>
-          </p:cNvPr>
-          <p:cNvSpPr/>
-          <p:nvPr/>
-        </p:nvSpPr>
-        <p:spPr>
-          <a:xfrm>
-            <a:off x="455083" y="1026583"/>
-            <a:ext cx="52916" cy="1121833"/>
-          </a:xfrm>
-          <a:prstGeom prst="rect">
-            <a:avLst/>
-          </a:prstGeom>
-          <a:solidFill>
-            <a:srgbClr val="C00000"/>
-          </a:solidFill>
-          <a:ln>
-            <a:noFill/>
-          </a:ln>
-        </p:spPr>
-        <p:style>
-          <a:lnRef idx="2">
-            <a:schemeClr val="accent1">
-              <a:shade val="15000"/>
-            </a:schemeClr>
-          </a:lnRef>
-          <a:fillRef idx="1">
-            <a:schemeClr val="accent1"/>
-          </a:fillRef>
-          <a:effectRef idx="0">
-            <a:schemeClr val="accent1"/>
-          </a:effectRef>
-          <a:fontRef idx="minor">
-            <a:schemeClr val="lt1"/>
-          </a:fontRef>
-        </p:style>
-        <p:txBody>
-          <a:bodyPr rtlCol="0" anchor="ctr"/>
-          <a:lstStyle/>
-          <a:p>
-            <a:pPr algn="ctr"/>
-            <a:endParaRPr lang="ko-KR" altLang="en-US"/>
-          </a:p>
-        </p:txBody>
-      </p:sp>
-    </p:spTree>
-    <p:extLst>
-      <p:ext uri="{BB962C8B-B14F-4D97-AF65-F5344CB8AC3E}">
-        <p14:creationId xmlns:p14="http://schemas.microsoft.com/office/powerpoint/2010/main" val="1792040811"/>
-      </p:ext>
-    </p:extLst>
-  </p:cSld>
-  <p:clrMapOvr>
-    <a:masterClrMapping/>
-  </p:clrMapOvr>
-</p:sld>
-</file>
-
-<file path=ppt/slides/slide4.xml><?xml version="1.0" encoding="utf-8"?>
-<p:sld xmlns:a="http://schemas.openxmlformats.org/drawingml/2006/main" xmlns:r="http://schemas.openxmlformats.org/officeDocument/2006/relationships" xmlns:p="http://schemas.openxmlformats.org/presentationml/2006/main">
-  <p:cSld>
-    <p:spTree>
-      <p:nvGrpSpPr>
-        <p:cNvPr id="1" name=""/>
-        <p:cNvGrpSpPr/>
-        <p:nvPr/>
-      </p:nvGrpSpPr>
-      <p:grpSpPr>
-        <a:xfrm>
-          <a:off x="0" y="0"/>
-          <a:ext cx="0" cy="0"/>
-          <a:chOff x="0" y="0"/>
-          <a:chExt cx="0" cy="0"/>
-        </a:xfrm>
-      </p:grpSpPr>
-      <p:sp>
-        <p:nvSpPr>
-          <p:cNvPr id="3" name="내용 개체 틀 2">
-            <a:extLst>
-              <a:ext uri="{FF2B5EF4-FFF2-40B4-BE49-F238E27FC236}">
-                <a16:creationId xmlns:a16="http://schemas.microsoft.com/office/drawing/2014/main" id="{12BB0A9F-6199-E227-2A14-3D8DEC9C4430}"/>
-              </a:ext>
-            </a:extLst>
-          </p:cNvPr>
-          <p:cNvSpPr>
-            <a:spLocks noGrp="1"/>
-          </p:cNvSpPr>
-          <p:nvPr>
-            <p:ph idx="1"/>
-          </p:nvPr>
-        </p:nvSpPr>
-        <p:spPr/>
-        <p:txBody>
-          <a:bodyPr/>
-          <a:lstStyle/>
-          <a:p>
-            <a:endParaRPr lang="ko-KR" altLang="en-US"/>
-          </a:p>
-        </p:txBody>
-      </p:sp>
-      <p:sp>
-        <p:nvSpPr>
-          <p:cNvPr id="5" name="직사각형 4">
-            <a:extLst>
-              <a:ext uri="{FF2B5EF4-FFF2-40B4-BE49-F238E27FC236}">
-                <a16:creationId xmlns:a16="http://schemas.microsoft.com/office/drawing/2014/main" id="{C8AF6847-62D9-5244-72FB-5D0F43D66920}"/>
-              </a:ext>
-            </a:extLst>
-          </p:cNvPr>
-          <p:cNvSpPr/>
-          <p:nvPr/>
-        </p:nvSpPr>
-        <p:spPr>
-          <a:xfrm>
-            <a:off x="-169334" y="0"/>
-            <a:ext cx="12848166" cy="656167"/>
-          </a:xfrm>
-          <a:prstGeom prst="rect">
-            <a:avLst/>
-          </a:prstGeom>
-          <a:solidFill>
-            <a:schemeClr val="bg1">
-              <a:lumMod val="95000"/>
-            </a:schemeClr>
-          </a:solidFill>
-          <a:ln>
-            <a:noFill/>
-          </a:ln>
-        </p:spPr>
-        <p:style>
-          <a:lnRef idx="2">
-            <a:schemeClr val="accent1">
-              <a:shade val="15000"/>
-            </a:schemeClr>
-          </a:lnRef>
-          <a:fillRef idx="1">
-            <a:schemeClr val="accent1"/>
-          </a:fillRef>
-          <a:effectRef idx="0">
-            <a:schemeClr val="accent1"/>
-          </a:effectRef>
-          <a:fontRef idx="minor">
-            <a:schemeClr val="lt1"/>
-          </a:fontRef>
-        </p:style>
-        <p:txBody>
-          <a:bodyPr rtlCol="0" anchor="ctr"/>
-          <a:lstStyle/>
-          <a:p>
-            <a:pPr algn="ctr"/>
-            <a:endParaRPr lang="ko-KR" altLang="en-US"/>
-          </a:p>
-        </p:txBody>
-      </p:sp>
-      <p:sp>
-        <p:nvSpPr>
-          <p:cNvPr id="7" name="TextBox 6">
-            <a:extLst>
-              <a:ext uri="{FF2B5EF4-FFF2-40B4-BE49-F238E27FC236}">
-                <a16:creationId xmlns:a16="http://schemas.microsoft.com/office/drawing/2014/main" id="{7B33C51C-6190-A0A9-2187-5BED896BA52A}"/>
-              </a:ext>
-            </a:extLst>
-          </p:cNvPr>
-          <p:cNvSpPr txBox="1"/>
-          <p:nvPr/>
-        </p:nvSpPr>
-        <p:spPr>
-          <a:xfrm>
-            <a:off x="-2" y="179916"/>
-            <a:ext cx="7217832" cy="477054"/>
-          </a:xfrm>
-          <a:prstGeom prst="rect">
-            <a:avLst/>
-          </a:prstGeom>
-          <a:noFill/>
-          <a:ln>
-            <a:noFill/>
-          </a:ln>
-        </p:spPr>
-        <p:txBody>
-          <a:bodyPr rot="0" spcFirstLastPara="0" vertOverflow="overflow" horzOverflow="overflow" vert="horz" wrap="square" lIns="91440" tIns="45720" rIns="91440" bIns="45720" numCol="1" spcCol="0" rtlCol="0" fromWordArt="0" anchor="t" anchorCtr="0" forceAA="0" compatLnSpc="1">
-            <a:prstTxWarp prst="textNoShape">
-              <a:avLst/>
-            </a:prstTxWarp>
-            <a:spAutoFit/>
-          </a:bodyPr>
-          <a:lstStyle/>
-          <a:p>
-            <a:r>
-              <a:rPr lang="ko-KR" altLang="en-US" sz="2500" dirty="0">
-                <a:solidFill>
-                  <a:srgbClr val="747474"/>
-                </a:solidFill>
-                <a:latin typeface="Microsoft GothicNeo"/>
-                <a:ea typeface="Microsoft GothicNeo"/>
-                <a:cs typeface="Arial"/>
-              </a:rPr>
-              <a:t>02-3 문제정의 및 데이터 설명</a:t>
-            </a:r>
-          </a:p>
-        </p:txBody>
-      </p:sp>
-    </p:spTree>
-    <p:extLst>
-      <p:ext uri="{BB962C8B-B14F-4D97-AF65-F5344CB8AC3E}">
-        <p14:creationId xmlns:p14="http://schemas.microsoft.com/office/powerpoint/2010/main" val="3126530277"/>
-      </p:ext>
-    </p:extLst>
-  </p:cSld>
-  <p:clrMapOvr>
-    <a:masterClrMapping/>
-  </p:clrMapOvr>
-</p:sld>
-</file>
-
-<file path=ppt/slides/slide5.xml><?xml version="1.0" encoding="utf-8"?>
+<file path=ppt/slides/slide10.xml><?xml version="1.0" encoding="utf-8"?>
 <p:sld xmlns:a="http://schemas.openxmlformats.org/drawingml/2006/main" xmlns:r="http://schemas.openxmlformats.org/officeDocument/2006/relationships" xmlns:p="http://schemas.openxmlformats.org/presentationml/2006/main">
   <p:cSld>
     <p:spTree>
@@ -6907,8 +5854,8 @@
         </p:nvSpPr>
         <p:spPr>
           <a:xfrm>
-            <a:off x="1915583" y="2261577"/>
-            <a:ext cx="8383627" cy="353943"/>
+            <a:off x="1915583" y="2293109"/>
+            <a:ext cx="8383627" cy="323165"/>
           </a:xfrm>
           <a:prstGeom prst="rect">
             <a:avLst/>
@@ -6926,7 +5873,7 @@
           <a:p>
             <a:pPr algn="ctr"/>
             <a:r>
-              <a:rPr lang="ko-KR" altLang="en-US" sz="1700" dirty="0">
+              <a:rPr lang="ko-KR" altLang="en-US" sz="1500" dirty="0">
                 <a:latin typeface="Microsoft GothicNeo"/>
                 <a:ea typeface="Microsoft GothicNeo"/>
                 <a:cs typeface="Microsoft GothicNeo"/>
@@ -6934,7 +5881,7 @@
               <a:t>&lt; </a:t>
             </a:r>
             <a:r>
-              <a:rPr lang="ko-KR" altLang="en-US" sz="1700" err="1">
+              <a:rPr lang="ko-KR" altLang="en-US" sz="1500" dirty="0" err="1">
                 <a:latin typeface="Microsoft GothicNeo"/>
                 <a:ea typeface="Microsoft GothicNeo"/>
                 <a:cs typeface="Microsoft GothicNeo"/>
@@ -6942,7 +5889,7 @@
               <a:t>Semi</a:t>
             </a:r>
             <a:r>
-              <a:rPr lang="ko-KR" altLang="en-US" sz="1700" dirty="0">
+              <a:rPr lang="ko-KR" altLang="en-US" sz="1500" dirty="0">
                 <a:latin typeface="Microsoft GothicNeo"/>
                 <a:ea typeface="Microsoft GothicNeo"/>
                 <a:cs typeface="Microsoft GothicNeo"/>
@@ -7051,7 +5998,59 @@
                 <a:ea typeface="Microsoft GothicNeo"/>
                 <a:cs typeface="Microsoft GothicNeo"/>
               </a:rPr>
-              <a:t>02-4 프로젝트 로드맵</a:t>
+              <a:t>0</a:t>
+            </a:r>
+            <a:r>
+              <a:rPr lang="en-US" altLang="ko-KR" sz="2500" dirty="0">
+                <a:solidFill>
+                  <a:schemeClr val="bg2">
+                    <a:lumMod val="49000"/>
+                  </a:schemeClr>
+                </a:solidFill>
+                <a:latin typeface="Microsoft GothicNeo"/>
+                <a:ea typeface="Microsoft GothicNeo"/>
+                <a:cs typeface="Microsoft GothicNeo"/>
+              </a:rPr>
+              <a:t>0</a:t>
+            </a:r>
+            <a:r>
+              <a:rPr lang="ko-KR" sz="2500" dirty="0">
+                <a:solidFill>
+                  <a:schemeClr val="bg2">
+                    <a:lumMod val="49000"/>
+                  </a:schemeClr>
+                </a:solidFill>
+                <a:latin typeface="Microsoft GothicNeo"/>
+                <a:ea typeface="Microsoft GothicNeo"/>
+                <a:cs typeface="Microsoft GothicNeo"/>
+              </a:rPr>
+              <a:t>-</a:t>
+            </a:r>
+            <a:r>
+              <a:rPr lang="en-US" altLang="ko-KR" sz="2500" dirty="0">
+                <a:solidFill>
+                  <a:schemeClr val="bg2">
+                    <a:lumMod val="49000"/>
+                  </a:schemeClr>
+                </a:solidFill>
+                <a:latin typeface="Microsoft GothicNeo"/>
+                <a:ea typeface="Microsoft GothicNeo"/>
+                <a:cs typeface="Microsoft GothicNeo"/>
+              </a:rPr>
+              <a:t>00</a:t>
+            </a:r>
+            <a:r>
+              <a:rPr lang="ko-KR" sz="2500" dirty="0">
+                <a:solidFill>
+                  <a:schemeClr val="bg2">
+                    <a:lumMod val="49000"/>
+                  </a:schemeClr>
+                </a:solidFill>
+                <a:latin typeface="Microsoft GothicNeo"/>
+                <a:ea typeface="Microsoft GothicNeo"/>
+                <a:cs typeface="Microsoft GothicNeo"/>
+              </a:rPr>
+              <a:t> 프로젝트 로드맵</a:t>
             </a:r>
           </a:p>
         </p:txBody>
@@ -7219,6 +6218,5850 @@
     <p:extLst>
       <p:ext uri="{BB962C8B-B14F-4D97-AF65-F5344CB8AC3E}">
         <p14:creationId xmlns:p14="http://schemas.microsoft.com/office/powerpoint/2010/main" val="1732673406"/>
+      </p:ext>
+    </p:extLst>
+  </p:cSld>
+  <p:clrMapOvr>
+    <a:masterClrMapping/>
+  </p:clrMapOvr>
+</p:sld>
+</file>
+
+<file path=ppt/slides/slide2.xml><?xml version="1.0" encoding="utf-8"?>
+<p:sld xmlns:a="http://schemas.openxmlformats.org/drawingml/2006/main" xmlns:r="http://schemas.openxmlformats.org/officeDocument/2006/relationships" xmlns:p="http://schemas.openxmlformats.org/presentationml/2006/main">
+  <p:cSld>
+    <p:spTree>
+      <p:nvGrpSpPr>
+        <p:cNvPr id="1" name=""/>
+        <p:cNvGrpSpPr/>
+        <p:nvPr/>
+      </p:nvGrpSpPr>
+      <p:grpSpPr>
+        <a:xfrm>
+          <a:off x="0" y="0"/>
+          <a:ext cx="0" cy="0"/>
+          <a:chOff x="0" y="0"/>
+          <a:chExt cx="0" cy="0"/>
+        </a:xfrm>
+      </p:grpSpPr>
+      <p:pic>
+        <p:nvPicPr>
+          <p:cNvPr id="5" name="그림 4" descr="File:Santander Logo.PNG - Wikimedia Commons">
+            <a:extLst>
+              <a:ext uri="{FF2B5EF4-FFF2-40B4-BE49-F238E27FC236}">
+                <a16:creationId xmlns:a16="http://schemas.microsoft.com/office/drawing/2014/main" id="{6462E84C-D5DC-CF91-A1D4-96D735F28BBB}"/>
+              </a:ext>
+            </a:extLst>
+          </p:cNvPr>
+          <p:cNvPicPr>
+            <a:picLocks noChangeAspect="1"/>
+          </p:cNvPicPr>
+          <p:nvPr/>
+        </p:nvPicPr>
+        <p:blipFill>
+          <a:blip r:embed="rId2"/>
+          <a:stretch>
+            <a:fillRect/>
+          </a:stretch>
+        </p:blipFill>
+        <p:spPr>
+          <a:xfrm>
+            <a:off x="2" y="5771641"/>
+            <a:ext cx="2901462" cy="1088332"/>
+          </a:xfrm>
+          <a:prstGeom prst="rect">
+            <a:avLst/>
+          </a:prstGeom>
+        </p:spPr>
+      </p:pic>
+      <p:sp>
+        <p:nvSpPr>
+          <p:cNvPr id="6" name="직사각형 5">
+            <a:extLst>
+              <a:ext uri="{FF2B5EF4-FFF2-40B4-BE49-F238E27FC236}">
+                <a16:creationId xmlns:a16="http://schemas.microsoft.com/office/drawing/2014/main" id="{C1344FED-B355-D522-EB2F-276379F0C44F}"/>
+              </a:ext>
+            </a:extLst>
+          </p:cNvPr>
+          <p:cNvSpPr/>
+          <p:nvPr/>
+        </p:nvSpPr>
+        <p:spPr>
+          <a:xfrm>
+            <a:off x="-169334" y="0"/>
+            <a:ext cx="12848166" cy="656167"/>
+          </a:xfrm>
+          <a:prstGeom prst="rect">
+            <a:avLst/>
+          </a:prstGeom>
+          <a:solidFill>
+            <a:schemeClr val="bg1">
+              <a:lumMod val="95000"/>
+            </a:schemeClr>
+          </a:solidFill>
+          <a:ln>
+            <a:noFill/>
+          </a:ln>
+        </p:spPr>
+        <p:style>
+          <a:lnRef idx="2">
+            <a:schemeClr val="accent1">
+              <a:shade val="15000"/>
+            </a:schemeClr>
+          </a:lnRef>
+          <a:fillRef idx="1">
+            <a:schemeClr val="accent1"/>
+          </a:fillRef>
+          <a:effectRef idx="0">
+            <a:schemeClr val="accent1"/>
+          </a:effectRef>
+          <a:fontRef idx="minor">
+            <a:schemeClr val="lt1"/>
+          </a:fontRef>
+        </p:style>
+        <p:txBody>
+          <a:bodyPr rtlCol="0" anchor="ctr"/>
+          <a:lstStyle/>
+          <a:p>
+            <a:pPr algn="ctr"/>
+            <a:endParaRPr lang="ko-KR" altLang="en-US"/>
+          </a:p>
+        </p:txBody>
+      </p:sp>
+      <p:sp>
+        <p:nvSpPr>
+          <p:cNvPr id="7" name="TextBox 6">
+            <a:extLst>
+              <a:ext uri="{FF2B5EF4-FFF2-40B4-BE49-F238E27FC236}">
+                <a16:creationId xmlns:a16="http://schemas.microsoft.com/office/drawing/2014/main" id="{B8A43901-4860-FDEE-6F85-6B63241BFBDE}"/>
+              </a:ext>
+            </a:extLst>
+          </p:cNvPr>
+          <p:cNvSpPr txBox="1"/>
+          <p:nvPr/>
+        </p:nvSpPr>
+        <p:spPr>
+          <a:xfrm>
+            <a:off x="52914" y="179916"/>
+            <a:ext cx="5704416" cy="477054"/>
+          </a:xfrm>
+          <a:prstGeom prst="rect">
+            <a:avLst/>
+          </a:prstGeom>
+          <a:noFill/>
+          <a:ln>
+            <a:noFill/>
+          </a:ln>
+        </p:spPr>
+        <p:txBody>
+          <a:bodyPr rot="0" spcFirstLastPara="0" vertOverflow="overflow" horzOverflow="overflow" vert="horz" wrap="square" lIns="91440" tIns="45720" rIns="91440" bIns="45720" numCol="1" spcCol="0" rtlCol="0" fromWordArt="0" anchor="t" anchorCtr="0" forceAA="0" compatLnSpc="1">
+            <a:prstTxWarp prst="textNoShape">
+              <a:avLst/>
+            </a:prstTxWarp>
+            <a:spAutoFit/>
+          </a:bodyPr>
+          <a:lstStyle/>
+          <a:p>
+            <a:r>
+              <a:rPr lang="ko-KR" altLang="en-US" sz="2500" dirty="0">
+                <a:solidFill>
+                  <a:srgbClr val="747474"/>
+                </a:solidFill>
+                <a:latin typeface="Microsoft GothicNeo"/>
+                <a:ea typeface="Microsoft GothicNeo"/>
+                <a:cs typeface="Arial"/>
+              </a:rPr>
+              <a:t>02-1 프로젝트 배경 및 목표</a:t>
+            </a:r>
+          </a:p>
+        </p:txBody>
+      </p:sp>
+      <p:sp>
+        <p:nvSpPr>
+          <p:cNvPr id="3" name="TextBox 2">
+            <a:extLst>
+              <a:ext uri="{FF2B5EF4-FFF2-40B4-BE49-F238E27FC236}">
+                <a16:creationId xmlns:a16="http://schemas.microsoft.com/office/drawing/2014/main" id="{54E12DDD-70D9-C415-FD84-073D521F6F7C}"/>
+              </a:ext>
+            </a:extLst>
+          </p:cNvPr>
+          <p:cNvSpPr txBox="1"/>
+          <p:nvPr/>
+        </p:nvSpPr>
+        <p:spPr>
+          <a:xfrm>
+            <a:off x="613833" y="941917"/>
+            <a:ext cx="7725833" cy="1372492"/>
+          </a:xfrm>
+          <a:prstGeom prst="rect">
+            <a:avLst/>
+          </a:prstGeom>
+          <a:noFill/>
+        </p:spPr>
+        <p:txBody>
+          <a:bodyPr rot="0" spcFirstLastPara="0" vertOverflow="overflow" horzOverflow="overflow" vert="horz" wrap="square" lIns="91440" tIns="45720" rIns="91440" bIns="45720" numCol="1" spcCol="0" rtlCol="0" fromWordArt="0" anchor="t" anchorCtr="0" forceAA="0" compatLnSpc="1">
+            <a:prstTxWarp prst="textNoShape">
+              <a:avLst/>
+            </a:prstTxWarp>
+            <a:spAutoFit/>
+          </a:bodyPr>
+          <a:lstStyle/>
+          <a:p>
+            <a:pPr marL="285750" indent="-285750">
+              <a:lnSpc>
+                <a:spcPct val="150000"/>
+              </a:lnSpc>
+              <a:buFont typeface="Wingdings"/>
+              <a:buChar char="q"/>
+            </a:pPr>
+            <a:r>
+              <a:rPr lang="ko-KR" altLang="en-US" dirty="0">
+                <a:latin typeface="Microsoft GothicNeo"/>
+                <a:ea typeface="Microsoft GothicNeo"/>
+                <a:cs typeface="Microsoft GothicNeo"/>
+              </a:rPr>
+              <a:t>불만족 고객 조기 파악 및 맞춤형 서비스 제공</a:t>
+            </a:r>
+          </a:p>
+          <a:p>
+            <a:pPr marL="400050" lvl="2" indent="228600">
+              <a:lnSpc>
+                <a:spcPct val="150000"/>
+              </a:lnSpc>
+              <a:buFont typeface="Wingdings,Sans-Serif"/>
+              <a:buChar char="§"/>
+            </a:pPr>
+            <a:r>
+              <a:rPr lang="ko-KR" sz="1300" dirty="0">
+                <a:latin typeface="Microsoft GothicNeo"/>
+                <a:ea typeface="Microsoft GothicNeo"/>
+                <a:cs typeface="Microsoft GothicNeo"/>
+              </a:rPr>
+              <a:t>고객 만족을 전략적 핵심 지표로 설정</a:t>
+            </a:r>
+          </a:p>
+          <a:p>
+            <a:pPr marL="400050" lvl="2" indent="228600">
+              <a:lnSpc>
+                <a:spcPct val="150000"/>
+              </a:lnSpc>
+              <a:buFont typeface="Wingdings"/>
+              <a:buChar char="§"/>
+            </a:pPr>
+            <a:r>
+              <a:rPr lang="ko-KR" altLang="en-US" sz="1300" dirty="0">
+                <a:latin typeface="Microsoft GothicNeo"/>
+                <a:ea typeface="Microsoft GothicNeo"/>
+                <a:cs typeface="Microsoft GothicNeo"/>
+              </a:rPr>
+              <a:t>NPS 기반 고객 </a:t>
+            </a:r>
+            <a:r>
+              <a:rPr lang="ko-KR" altLang="en-US" sz="1300" dirty="0" err="1">
+                <a:latin typeface="Microsoft GothicNeo"/>
+                <a:ea typeface="Microsoft GothicNeo"/>
+                <a:cs typeface="Microsoft GothicNeo"/>
+              </a:rPr>
+              <a:t>경혐</a:t>
+            </a:r>
+            <a:r>
+              <a:rPr lang="ko-KR" altLang="en-US" sz="1300" dirty="0">
+                <a:latin typeface="Microsoft GothicNeo"/>
+                <a:ea typeface="Microsoft GothicNeo"/>
+                <a:cs typeface="Microsoft GothicNeo"/>
+              </a:rPr>
+              <a:t> 혁신</a:t>
+            </a:r>
+          </a:p>
+          <a:p>
+            <a:pPr marL="800100" lvl="3" indent="-228600">
+              <a:lnSpc>
+                <a:spcPct val="150000"/>
+              </a:lnSpc>
+              <a:buFont typeface="Calibri"/>
+              <a:buChar char="-"/>
+            </a:pPr>
+            <a:r>
+              <a:rPr lang="ko-KR" altLang="en-US" sz="1300">
+                <a:latin typeface="Microsoft GothicNeo"/>
+                <a:ea typeface="Microsoft GothicNeo"/>
+                <a:cs typeface="Microsoft GothicNeo"/>
+              </a:rPr>
+              <a:t>충성 고객 확대, 디지털 전환 가속화, 글로벌 다각화</a:t>
+            </a:r>
+          </a:p>
+        </p:txBody>
+      </p:sp>
+      <p:sp>
+        <p:nvSpPr>
+          <p:cNvPr id="8" name="직사각형 7">
+            <a:extLst>
+              <a:ext uri="{FF2B5EF4-FFF2-40B4-BE49-F238E27FC236}">
+                <a16:creationId xmlns:a16="http://schemas.microsoft.com/office/drawing/2014/main" id="{9020F1AD-A929-533A-4E7A-DACA1C0BA9BE}"/>
+              </a:ext>
+            </a:extLst>
+          </p:cNvPr>
+          <p:cNvSpPr/>
+          <p:nvPr/>
+        </p:nvSpPr>
+        <p:spPr>
+          <a:xfrm>
+            <a:off x="444500" y="1026583"/>
+            <a:ext cx="63499" cy="1291166"/>
+          </a:xfrm>
+          <a:prstGeom prst="rect">
+            <a:avLst/>
+          </a:prstGeom>
+          <a:solidFill>
+            <a:srgbClr val="C00000"/>
+          </a:solidFill>
+          <a:ln>
+            <a:noFill/>
+          </a:ln>
+        </p:spPr>
+        <p:style>
+          <a:lnRef idx="2">
+            <a:schemeClr val="accent1">
+              <a:shade val="15000"/>
+            </a:schemeClr>
+          </a:lnRef>
+          <a:fillRef idx="1">
+            <a:schemeClr val="accent1"/>
+          </a:fillRef>
+          <a:effectRef idx="0">
+            <a:schemeClr val="accent1"/>
+          </a:effectRef>
+          <a:fontRef idx="minor">
+            <a:schemeClr val="lt1"/>
+          </a:fontRef>
+        </p:style>
+        <p:txBody>
+          <a:bodyPr rtlCol="0" anchor="ctr"/>
+          <a:lstStyle/>
+          <a:p>
+            <a:pPr algn="ctr"/>
+            <a:endParaRPr lang="ko-KR" altLang="en-US"/>
+          </a:p>
+        </p:txBody>
+      </p:sp>
+      <p:pic>
+        <p:nvPicPr>
+          <p:cNvPr id="9" name="그래픽 8" descr="Our business strategy - Santander Annual Report 2020">
+            <a:extLst>
+              <a:ext uri="{FF2B5EF4-FFF2-40B4-BE49-F238E27FC236}">
+                <a16:creationId xmlns:a16="http://schemas.microsoft.com/office/drawing/2014/main" id="{63EF137A-760C-267E-42D1-E291D344B750}"/>
+              </a:ext>
+            </a:extLst>
+          </p:cNvPr>
+          <p:cNvPicPr>
+            <a:picLocks noChangeAspect="1"/>
+          </p:cNvPicPr>
+          <p:nvPr/>
+        </p:nvPicPr>
+        <p:blipFill>
+          <a:blip r:embed="rId3">
+            <a:extLst>
+              <a:ext uri="{96DAC541-7B7A-43D3-8B79-37D633B846F1}">
+                <asvg:svgBlip xmlns:asvg="http://schemas.microsoft.com/office/drawing/2016/SVG/main" r:embed="rId4"/>
+              </a:ext>
+            </a:extLst>
+          </a:blip>
+          <a:stretch>
+            <a:fillRect/>
+          </a:stretch>
+        </p:blipFill>
+        <p:spPr>
+          <a:xfrm>
+            <a:off x="2747492" y="2763975"/>
+            <a:ext cx="6817783" cy="3528483"/>
+          </a:xfrm>
+          <a:prstGeom prst="rect">
+            <a:avLst/>
+          </a:prstGeom>
+        </p:spPr>
+      </p:pic>
+      <p:sp>
+        <p:nvSpPr>
+          <p:cNvPr id="2" name="TextBox 1">
+            <a:extLst>
+              <a:ext uri="{FF2B5EF4-FFF2-40B4-BE49-F238E27FC236}">
+                <a16:creationId xmlns:a16="http://schemas.microsoft.com/office/drawing/2014/main" id="{0451F10C-8BE0-24C5-C412-693E68B7FA1D}"/>
+              </a:ext>
+            </a:extLst>
+          </p:cNvPr>
+          <p:cNvSpPr txBox="1"/>
+          <p:nvPr/>
+        </p:nvSpPr>
+        <p:spPr>
+          <a:xfrm>
+            <a:off x="1904186" y="2502365"/>
+            <a:ext cx="8383627" cy="261610"/>
+          </a:xfrm>
+          <a:prstGeom prst="rect">
+            <a:avLst/>
+          </a:prstGeom>
+          <a:noFill/>
+        </p:spPr>
+        <p:txBody>
+          <a:bodyPr rot="0" spcFirstLastPara="0" vertOverflow="overflow" horzOverflow="overflow" vert="horz" wrap="square" lIns="91440" tIns="45720" rIns="91440" bIns="45720" numCol="1" spcCol="0" rtlCol="0" fromWordArt="0" anchor="t" anchorCtr="0" forceAA="0" compatLnSpc="1">
+            <a:prstTxWarp prst="textNoShape">
+              <a:avLst/>
+            </a:prstTxWarp>
+            <a:spAutoFit/>
+          </a:bodyPr>
+          <a:lstStyle/>
+          <a:p>
+            <a:pPr algn="ctr"/>
+            <a:r>
+              <a:rPr lang="ko-KR" altLang="en-US" sz="1100" dirty="0">
+                <a:latin typeface="Microsoft GothicNeo"/>
+                <a:ea typeface="Microsoft GothicNeo"/>
+                <a:cs typeface="Microsoft GothicNeo"/>
+              </a:rPr>
+              <a:t>[ 그림 2.</a:t>
+            </a:r>
+            <a:r>
+              <a:rPr lang="en-US" altLang="ko-KR" sz="1100" dirty="0">
+                <a:latin typeface="Microsoft GothicNeo"/>
+                <a:ea typeface="Microsoft GothicNeo"/>
+                <a:cs typeface="Microsoft GothicNeo"/>
+              </a:rPr>
+              <a:t>1</a:t>
+            </a:r>
+            <a:r>
+              <a:rPr lang="ko-KR" altLang="en-US" sz="1100" dirty="0">
+                <a:latin typeface="Microsoft GothicNeo"/>
+                <a:ea typeface="Microsoft GothicNeo"/>
+                <a:cs typeface="Microsoft GothicNeo"/>
+              </a:rPr>
+              <a:t> </a:t>
+            </a:r>
+            <a:r>
+              <a:rPr lang="ko-KR" altLang="en-US" sz="1100" dirty="0" err="1">
+                <a:latin typeface="Microsoft GothicNeo"/>
+                <a:ea typeface="Microsoft GothicNeo"/>
+                <a:cs typeface="Microsoft GothicNeo"/>
+              </a:rPr>
+              <a:t>산탄데르</a:t>
+            </a:r>
+            <a:r>
+              <a:rPr lang="ko-KR" altLang="en-US" sz="1100" dirty="0">
+                <a:latin typeface="Microsoft GothicNeo"/>
+                <a:ea typeface="Microsoft GothicNeo"/>
+                <a:cs typeface="Microsoft GothicNeo"/>
+              </a:rPr>
+              <a:t> 은행 고객 만족 중심 경영 전략 ]</a:t>
+            </a:r>
+          </a:p>
+        </p:txBody>
+      </p:sp>
+    </p:spTree>
+    <p:extLst>
+      <p:ext uri="{BB962C8B-B14F-4D97-AF65-F5344CB8AC3E}">
+        <p14:creationId xmlns:p14="http://schemas.microsoft.com/office/powerpoint/2010/main" val="1572256920"/>
+      </p:ext>
+    </p:extLst>
+  </p:cSld>
+  <p:clrMapOvr>
+    <a:masterClrMapping/>
+  </p:clrMapOvr>
+</p:sld>
+</file>
+
+<file path=ppt/slides/slide3.xml><?xml version="1.0" encoding="utf-8"?>
+<p:sld xmlns:a="http://schemas.openxmlformats.org/drawingml/2006/main" xmlns:r="http://schemas.openxmlformats.org/officeDocument/2006/relationships" xmlns:p="http://schemas.openxmlformats.org/presentationml/2006/main">
+  <p:cSld>
+    <p:spTree>
+      <p:nvGrpSpPr>
+        <p:cNvPr id="1" name=""/>
+        <p:cNvGrpSpPr/>
+        <p:nvPr/>
+      </p:nvGrpSpPr>
+      <p:grpSpPr>
+        <a:xfrm>
+          <a:off x="0" y="0"/>
+          <a:ext cx="0" cy="0"/>
+          <a:chOff x="0" y="0"/>
+          <a:chExt cx="0" cy="0"/>
+        </a:xfrm>
+      </p:grpSpPr>
+      <p:sp>
+        <p:nvSpPr>
+          <p:cNvPr id="11" name="직사각형 10">
+            <a:extLst>
+              <a:ext uri="{FF2B5EF4-FFF2-40B4-BE49-F238E27FC236}">
+                <a16:creationId xmlns:a16="http://schemas.microsoft.com/office/drawing/2014/main" id="{186036B6-C51E-BC8E-8382-B95EBC7B66C3}"/>
+              </a:ext>
+            </a:extLst>
+          </p:cNvPr>
+          <p:cNvSpPr/>
+          <p:nvPr/>
+        </p:nvSpPr>
+        <p:spPr>
+          <a:xfrm>
+            <a:off x="-878417" y="2455334"/>
+            <a:ext cx="13853583" cy="3460750"/>
+          </a:xfrm>
+          <a:prstGeom prst="rect">
+            <a:avLst/>
+          </a:prstGeom>
+          <a:solidFill>
+            <a:schemeClr val="bg1">
+              <a:lumMod val="85000"/>
+            </a:schemeClr>
+          </a:solidFill>
+          <a:ln>
+            <a:noFill/>
+          </a:ln>
+        </p:spPr>
+        <p:style>
+          <a:lnRef idx="2">
+            <a:schemeClr val="accent1">
+              <a:shade val="15000"/>
+            </a:schemeClr>
+          </a:lnRef>
+          <a:fillRef idx="1">
+            <a:schemeClr val="accent1"/>
+          </a:fillRef>
+          <a:effectRef idx="0">
+            <a:schemeClr val="accent1"/>
+          </a:effectRef>
+          <a:fontRef idx="minor">
+            <a:schemeClr val="lt1"/>
+          </a:fontRef>
+        </p:style>
+        <p:txBody>
+          <a:bodyPr rtlCol="0" anchor="ctr"/>
+          <a:lstStyle/>
+          <a:p>
+            <a:pPr algn="ctr"/>
+            <a:endParaRPr lang="ko-KR" altLang="en-US"/>
+          </a:p>
+        </p:txBody>
+      </p:sp>
+      <p:sp>
+        <p:nvSpPr>
+          <p:cNvPr id="5" name="직사각형 4">
+            <a:extLst>
+              <a:ext uri="{FF2B5EF4-FFF2-40B4-BE49-F238E27FC236}">
+                <a16:creationId xmlns:a16="http://schemas.microsoft.com/office/drawing/2014/main" id="{F8755259-13E7-FDFE-ABAB-E7205DC8A699}"/>
+              </a:ext>
+            </a:extLst>
+          </p:cNvPr>
+          <p:cNvSpPr/>
+          <p:nvPr/>
+        </p:nvSpPr>
+        <p:spPr>
+          <a:xfrm>
+            <a:off x="-169334" y="0"/>
+            <a:ext cx="12848166" cy="656167"/>
+          </a:xfrm>
+          <a:prstGeom prst="rect">
+            <a:avLst/>
+          </a:prstGeom>
+          <a:solidFill>
+            <a:schemeClr val="bg1">
+              <a:lumMod val="95000"/>
+            </a:schemeClr>
+          </a:solidFill>
+          <a:ln>
+            <a:noFill/>
+          </a:ln>
+        </p:spPr>
+        <p:style>
+          <a:lnRef idx="2">
+            <a:schemeClr val="accent1">
+              <a:shade val="15000"/>
+            </a:schemeClr>
+          </a:lnRef>
+          <a:fillRef idx="1">
+            <a:schemeClr val="accent1"/>
+          </a:fillRef>
+          <a:effectRef idx="0">
+            <a:schemeClr val="accent1"/>
+          </a:effectRef>
+          <a:fontRef idx="minor">
+            <a:schemeClr val="lt1"/>
+          </a:fontRef>
+        </p:style>
+        <p:txBody>
+          <a:bodyPr rtlCol="0" anchor="ctr"/>
+          <a:lstStyle/>
+          <a:p>
+            <a:pPr algn="ctr"/>
+            <a:endParaRPr lang="ko-KR" altLang="en-US"/>
+          </a:p>
+        </p:txBody>
+      </p:sp>
+      <p:sp>
+        <p:nvSpPr>
+          <p:cNvPr id="7" name="TextBox 6">
+            <a:extLst>
+              <a:ext uri="{FF2B5EF4-FFF2-40B4-BE49-F238E27FC236}">
+                <a16:creationId xmlns:a16="http://schemas.microsoft.com/office/drawing/2014/main" id="{41A4E252-00AD-10FC-4B8B-570B1BF818FE}"/>
+              </a:ext>
+            </a:extLst>
+          </p:cNvPr>
+          <p:cNvSpPr txBox="1"/>
+          <p:nvPr/>
+        </p:nvSpPr>
+        <p:spPr>
+          <a:xfrm>
+            <a:off x="-2" y="179916"/>
+            <a:ext cx="7217832" cy="477054"/>
+          </a:xfrm>
+          <a:prstGeom prst="rect">
+            <a:avLst/>
+          </a:prstGeom>
+          <a:noFill/>
+          <a:ln>
+            <a:noFill/>
+          </a:ln>
+        </p:spPr>
+        <p:txBody>
+          <a:bodyPr rot="0" spcFirstLastPara="0" vertOverflow="overflow" horzOverflow="overflow" vert="horz" wrap="square" lIns="91440" tIns="45720" rIns="91440" bIns="45720" numCol="1" spcCol="0" rtlCol="0" fromWordArt="0" anchor="t" anchorCtr="0" forceAA="0" compatLnSpc="1">
+            <a:prstTxWarp prst="textNoShape">
+              <a:avLst/>
+            </a:prstTxWarp>
+            <a:spAutoFit/>
+          </a:bodyPr>
+          <a:lstStyle/>
+          <a:p>
+            <a:r>
+              <a:rPr lang="ko-KR" altLang="en-US" sz="2500" dirty="0">
+                <a:solidFill>
+                  <a:srgbClr val="747474"/>
+                </a:solidFill>
+                <a:latin typeface="Microsoft GothicNeo"/>
+                <a:ea typeface="Microsoft GothicNeo"/>
+                <a:cs typeface="Arial"/>
+              </a:rPr>
+              <a:t>02-2 NPS 개요</a:t>
+            </a:r>
+          </a:p>
+        </p:txBody>
+      </p:sp>
+      <p:pic>
+        <p:nvPicPr>
+          <p:cNvPr id="3" name="그림 2" descr="File:Santander Logo.PNG - Wikimedia Commons">
+            <a:extLst>
+              <a:ext uri="{FF2B5EF4-FFF2-40B4-BE49-F238E27FC236}">
+                <a16:creationId xmlns:a16="http://schemas.microsoft.com/office/drawing/2014/main" id="{66E04D3B-A8D7-9D80-F5DB-97BE418C1C6C}"/>
+              </a:ext>
+            </a:extLst>
+          </p:cNvPr>
+          <p:cNvPicPr>
+            <a:picLocks noChangeAspect="1"/>
+          </p:cNvPicPr>
+          <p:nvPr/>
+        </p:nvPicPr>
+        <p:blipFill>
+          <a:blip r:embed="rId2"/>
+          <a:stretch>
+            <a:fillRect/>
+          </a:stretch>
+        </p:blipFill>
+        <p:spPr>
+          <a:xfrm>
+            <a:off x="2" y="5771641"/>
+            <a:ext cx="2901462" cy="1088332"/>
+          </a:xfrm>
+          <a:prstGeom prst="rect">
+            <a:avLst/>
+          </a:prstGeom>
+        </p:spPr>
+      </p:pic>
+      <p:pic>
+        <p:nvPicPr>
+          <p:cNvPr id="4" name="그림 3" descr="Santander Bank NPS &amp; Customer Reviews | Comparably">
+            <a:extLst>
+              <a:ext uri="{FF2B5EF4-FFF2-40B4-BE49-F238E27FC236}">
+                <a16:creationId xmlns:a16="http://schemas.microsoft.com/office/drawing/2014/main" id="{A635F761-2B5D-E9B9-8506-5B00D840ECE7}"/>
+              </a:ext>
+            </a:extLst>
+          </p:cNvPr>
+          <p:cNvPicPr>
+            <a:picLocks noChangeAspect="1"/>
+          </p:cNvPicPr>
+          <p:nvPr/>
+        </p:nvPicPr>
+        <p:blipFill>
+          <a:blip r:embed="rId3"/>
+          <a:stretch>
+            <a:fillRect/>
+          </a:stretch>
+        </p:blipFill>
+        <p:spPr>
+          <a:xfrm>
+            <a:off x="1090083" y="3010960"/>
+            <a:ext cx="5037667" cy="2656417"/>
+          </a:xfrm>
+          <a:prstGeom prst="rect">
+            <a:avLst/>
+          </a:prstGeom>
+        </p:spPr>
+      </p:pic>
+      <p:sp>
+        <p:nvSpPr>
+          <p:cNvPr id="9" name="TextBox 8">
+            <a:extLst>
+              <a:ext uri="{FF2B5EF4-FFF2-40B4-BE49-F238E27FC236}">
+                <a16:creationId xmlns:a16="http://schemas.microsoft.com/office/drawing/2014/main" id="{9795F65B-45D6-D04A-7832-36CDA62909DD}"/>
+              </a:ext>
+            </a:extLst>
+          </p:cNvPr>
+          <p:cNvSpPr txBox="1"/>
+          <p:nvPr/>
+        </p:nvSpPr>
+        <p:spPr>
+          <a:xfrm>
+            <a:off x="613833" y="941917"/>
+            <a:ext cx="7725833" cy="1208023"/>
+          </a:xfrm>
+          <a:prstGeom prst="rect">
+            <a:avLst/>
+          </a:prstGeom>
+          <a:noFill/>
+        </p:spPr>
+        <p:txBody>
+          <a:bodyPr rot="0" spcFirstLastPara="0" vertOverflow="overflow" horzOverflow="overflow" vert="horz" wrap="square" lIns="91440" tIns="45720" rIns="91440" bIns="45720" numCol="1" spcCol="0" rtlCol="0" fromWordArt="0" anchor="t" anchorCtr="0" forceAA="0" compatLnSpc="1">
+            <a:prstTxWarp prst="textNoShape">
+              <a:avLst/>
+            </a:prstTxWarp>
+            <a:spAutoFit/>
+          </a:bodyPr>
+          <a:lstStyle/>
+          <a:p>
+            <a:pPr marL="285750" indent="-285750">
+              <a:lnSpc>
+                <a:spcPct val="150000"/>
+              </a:lnSpc>
+              <a:buFont typeface="Wingdings"/>
+              <a:buChar char="q"/>
+            </a:pPr>
+            <a:r>
+              <a:rPr lang="ko-KR" altLang="en-US" dirty="0">
+                <a:latin typeface="Microsoft GothicNeo"/>
+                <a:ea typeface="Microsoft GothicNeo"/>
+                <a:cs typeface="Microsoft GothicNeo"/>
+              </a:rPr>
+              <a:t>NPS(Net </a:t>
+            </a:r>
+            <a:r>
+              <a:rPr lang="ko-KR" altLang="en-US" err="1">
+                <a:latin typeface="Microsoft GothicNeo"/>
+                <a:ea typeface="Microsoft GothicNeo"/>
+                <a:cs typeface="Microsoft GothicNeo"/>
+              </a:rPr>
+              <a:t>Promoter</a:t>
+            </a:r>
+            <a:r>
+              <a:rPr lang="ko-KR" altLang="en-US" dirty="0">
+                <a:latin typeface="Microsoft GothicNeo"/>
+                <a:ea typeface="Microsoft GothicNeo"/>
+                <a:cs typeface="Microsoft GothicNeo"/>
+              </a:rPr>
+              <a:t> </a:t>
+            </a:r>
+            <a:r>
+              <a:rPr lang="ko-KR" altLang="en-US" err="1">
+                <a:latin typeface="Microsoft GothicNeo"/>
+                <a:ea typeface="Microsoft GothicNeo"/>
+                <a:cs typeface="Microsoft GothicNeo"/>
+              </a:rPr>
+              <a:t>Score</a:t>
+            </a:r>
+            <a:r>
+              <a:rPr lang="ko-KR" altLang="en-US" dirty="0">
+                <a:latin typeface="Microsoft GothicNeo"/>
+                <a:ea typeface="Microsoft GothicNeo"/>
+                <a:cs typeface="Microsoft GothicNeo"/>
+              </a:rPr>
+              <a:t>)</a:t>
+            </a:r>
+            <a:endParaRPr lang="ko-KR"/>
+          </a:p>
+          <a:p>
+            <a:pPr marL="400050" lvl="2" indent="228600">
+              <a:lnSpc>
+                <a:spcPct val="150000"/>
+              </a:lnSpc>
+              <a:buFont typeface="Wingdings"/>
+              <a:buChar char="§"/>
+            </a:pPr>
+            <a:r>
+              <a:rPr lang="ko-KR" altLang="en-US" sz="1300" dirty="0">
+                <a:latin typeface="Microsoft GothicNeo"/>
+                <a:ea typeface="Microsoft GothicNeo"/>
+                <a:cs typeface="Microsoft GothicNeo"/>
+              </a:rPr>
+              <a:t>고객 추천 의향 지표</a:t>
+            </a:r>
+          </a:p>
+          <a:p>
+            <a:pPr marL="400050" lvl="2" indent="228600">
+              <a:buFont typeface="Wingdings"/>
+              <a:buChar char="§"/>
+            </a:pPr>
+            <a:r>
+              <a:rPr lang="ko-KR" altLang="en-US" sz="1300" dirty="0">
+                <a:latin typeface="Microsoft GothicNeo"/>
+                <a:ea typeface="Microsoft GothicNeo"/>
+                <a:cs typeface="Microsoft GothicNeo"/>
+              </a:rPr>
+              <a:t>계산 : 추천 고객 비율 - </a:t>
+            </a:r>
+            <a:r>
+              <a:rPr lang="ko-KR" altLang="en-US" sz="1300" err="1">
+                <a:latin typeface="Microsoft GothicNeo"/>
+                <a:ea typeface="Microsoft GothicNeo"/>
+                <a:cs typeface="Microsoft GothicNeo"/>
+              </a:rPr>
+              <a:t>비추천</a:t>
+            </a:r>
+            <a:r>
+              <a:rPr lang="ko-KR" altLang="en-US" sz="1300" dirty="0">
+                <a:latin typeface="Microsoft GothicNeo"/>
+                <a:ea typeface="Microsoft GothicNeo"/>
+                <a:cs typeface="Microsoft GothicNeo"/>
+              </a:rPr>
+              <a:t> 고객 비율</a:t>
+            </a:r>
+          </a:p>
+          <a:p>
+            <a:pPr marL="400050" lvl="2" indent="228600">
+              <a:buFont typeface="Wingdings"/>
+              <a:buChar char="§"/>
+            </a:pPr>
+            <a:r>
+              <a:rPr lang="ko-KR" altLang="en-US" sz="1300" dirty="0">
+                <a:latin typeface="Microsoft GothicNeo"/>
+                <a:ea typeface="Microsoft GothicNeo"/>
+                <a:cs typeface="Microsoft GothicNeo"/>
+              </a:rPr>
+              <a:t>금융업계 활용 : 충성도 및 장기 수익성 예측</a:t>
+            </a:r>
+          </a:p>
+        </p:txBody>
+      </p:sp>
+      <p:pic>
+        <p:nvPicPr>
+          <p:cNvPr id="10" name="그림 9" descr="Santander Bank NPS &amp; Customer Reviews | Comparably">
+            <a:extLst>
+              <a:ext uri="{FF2B5EF4-FFF2-40B4-BE49-F238E27FC236}">
+                <a16:creationId xmlns:a16="http://schemas.microsoft.com/office/drawing/2014/main" id="{0374E877-A9DC-C142-AC11-91614F6A2EB1}"/>
+              </a:ext>
+            </a:extLst>
+          </p:cNvPr>
+          <p:cNvPicPr>
+            <a:picLocks noChangeAspect="1"/>
+          </p:cNvPicPr>
+          <p:nvPr/>
+        </p:nvPicPr>
+        <p:blipFill>
+          <a:blip r:embed="rId4"/>
+          <a:stretch>
+            <a:fillRect/>
+          </a:stretch>
+        </p:blipFill>
+        <p:spPr>
+          <a:xfrm>
+            <a:off x="6350000" y="3010960"/>
+            <a:ext cx="5037667" cy="2656417"/>
+          </a:xfrm>
+          <a:prstGeom prst="rect">
+            <a:avLst/>
+          </a:prstGeom>
+        </p:spPr>
+      </p:pic>
+      <p:sp>
+        <p:nvSpPr>
+          <p:cNvPr id="13" name="TextBox 12">
+            <a:extLst>
+              <a:ext uri="{FF2B5EF4-FFF2-40B4-BE49-F238E27FC236}">
+                <a16:creationId xmlns:a16="http://schemas.microsoft.com/office/drawing/2014/main" id="{AEC1F296-D1E0-4147-2CA8-2833855BCDDD}"/>
+              </a:ext>
+            </a:extLst>
+          </p:cNvPr>
+          <p:cNvSpPr txBox="1"/>
+          <p:nvPr/>
+        </p:nvSpPr>
+        <p:spPr>
+          <a:xfrm>
+            <a:off x="2063749" y="2589660"/>
+            <a:ext cx="8383627" cy="261610"/>
+          </a:xfrm>
+          <a:prstGeom prst="rect">
+            <a:avLst/>
+          </a:prstGeom>
+          <a:noFill/>
+        </p:spPr>
+        <p:txBody>
+          <a:bodyPr rot="0" spcFirstLastPara="0" vertOverflow="overflow" horzOverflow="overflow" vert="horz" wrap="square" lIns="91440" tIns="45720" rIns="91440" bIns="45720" numCol="1" spcCol="0" rtlCol="0" fromWordArt="0" anchor="t" anchorCtr="0" forceAA="0" compatLnSpc="1">
+            <a:prstTxWarp prst="textNoShape">
+              <a:avLst/>
+            </a:prstTxWarp>
+            <a:spAutoFit/>
+          </a:bodyPr>
+          <a:lstStyle/>
+          <a:p>
+            <a:pPr algn="ctr"/>
+            <a:r>
+              <a:rPr lang="ko-KR" altLang="en-US" sz="1100" dirty="0">
+                <a:latin typeface="Microsoft GothicNeo"/>
+                <a:ea typeface="Microsoft GothicNeo"/>
+                <a:cs typeface="Microsoft GothicNeo"/>
+              </a:rPr>
+              <a:t>[ 그림 2.</a:t>
+            </a:r>
+            <a:r>
+              <a:rPr lang="en-US" altLang="ko-KR" sz="1100" dirty="0">
+                <a:latin typeface="Microsoft GothicNeo"/>
+                <a:ea typeface="Microsoft GothicNeo"/>
+                <a:cs typeface="Microsoft GothicNeo"/>
+              </a:rPr>
+              <a:t>2</a:t>
+            </a:r>
+            <a:r>
+              <a:rPr lang="ko-KR" altLang="en-US" sz="1100" dirty="0">
+                <a:latin typeface="Microsoft GothicNeo"/>
+                <a:ea typeface="Microsoft GothicNeo"/>
+                <a:cs typeface="Microsoft GothicNeo"/>
+              </a:rPr>
+              <a:t> </a:t>
+            </a:r>
+            <a:r>
+              <a:rPr lang="ko-KR" altLang="en-US" sz="1100" dirty="0" err="1">
+                <a:latin typeface="Microsoft GothicNeo"/>
+                <a:ea typeface="Microsoft GothicNeo"/>
+                <a:cs typeface="Microsoft GothicNeo"/>
+              </a:rPr>
+              <a:t>산탄데르</a:t>
+            </a:r>
+            <a:r>
+              <a:rPr lang="ko-KR" altLang="en-US" sz="1100" dirty="0">
+                <a:latin typeface="Microsoft GothicNeo"/>
+                <a:ea typeface="Microsoft GothicNeo"/>
+                <a:cs typeface="Microsoft GothicNeo"/>
+              </a:rPr>
+              <a:t> 은행 NPS 성과 지표 (24' - 25') ]</a:t>
+            </a:r>
+          </a:p>
+        </p:txBody>
+      </p:sp>
+      <p:sp>
+        <p:nvSpPr>
+          <p:cNvPr id="14" name="직사각형 13">
+            <a:extLst>
+              <a:ext uri="{FF2B5EF4-FFF2-40B4-BE49-F238E27FC236}">
+                <a16:creationId xmlns:a16="http://schemas.microsoft.com/office/drawing/2014/main" id="{F3CC7E79-6F0A-4DA2-DA86-8461ACD51F9A}"/>
+              </a:ext>
+            </a:extLst>
+          </p:cNvPr>
+          <p:cNvSpPr/>
+          <p:nvPr/>
+        </p:nvSpPr>
+        <p:spPr>
+          <a:xfrm>
+            <a:off x="455083" y="1026583"/>
+            <a:ext cx="52916" cy="1121833"/>
+          </a:xfrm>
+          <a:prstGeom prst="rect">
+            <a:avLst/>
+          </a:prstGeom>
+          <a:solidFill>
+            <a:srgbClr val="C00000"/>
+          </a:solidFill>
+          <a:ln>
+            <a:noFill/>
+          </a:ln>
+        </p:spPr>
+        <p:style>
+          <a:lnRef idx="2">
+            <a:schemeClr val="accent1">
+              <a:shade val="15000"/>
+            </a:schemeClr>
+          </a:lnRef>
+          <a:fillRef idx="1">
+            <a:schemeClr val="accent1"/>
+          </a:fillRef>
+          <a:effectRef idx="0">
+            <a:schemeClr val="accent1"/>
+          </a:effectRef>
+          <a:fontRef idx="minor">
+            <a:schemeClr val="lt1"/>
+          </a:fontRef>
+        </p:style>
+        <p:txBody>
+          <a:bodyPr rtlCol="0" anchor="ctr"/>
+          <a:lstStyle/>
+          <a:p>
+            <a:pPr algn="ctr"/>
+            <a:endParaRPr lang="ko-KR" altLang="en-US"/>
+          </a:p>
+        </p:txBody>
+      </p:sp>
+    </p:spTree>
+    <p:extLst>
+      <p:ext uri="{BB962C8B-B14F-4D97-AF65-F5344CB8AC3E}">
+        <p14:creationId xmlns:p14="http://schemas.microsoft.com/office/powerpoint/2010/main" val="1792040811"/>
+      </p:ext>
+    </p:extLst>
+  </p:cSld>
+  <p:clrMapOvr>
+    <a:masterClrMapping/>
+  </p:clrMapOvr>
+</p:sld>
+</file>
+
+<file path=ppt/slides/slide4.xml><?xml version="1.0" encoding="utf-8"?>
+<p:sld xmlns:a="http://schemas.openxmlformats.org/drawingml/2006/main" xmlns:r="http://schemas.openxmlformats.org/officeDocument/2006/relationships" xmlns:p="http://schemas.openxmlformats.org/presentationml/2006/main">
+  <p:cSld>
+    <p:spTree>
+      <p:nvGrpSpPr>
+        <p:cNvPr id="1" name=""/>
+        <p:cNvGrpSpPr/>
+        <p:nvPr/>
+      </p:nvGrpSpPr>
+      <p:grpSpPr>
+        <a:xfrm>
+          <a:off x="0" y="0"/>
+          <a:ext cx="0" cy="0"/>
+          <a:chOff x="0" y="0"/>
+          <a:chExt cx="0" cy="0"/>
+        </a:xfrm>
+      </p:grpSpPr>
+      <p:sp>
+        <p:nvSpPr>
+          <p:cNvPr id="5" name="직사각형 4">
+            <a:extLst>
+              <a:ext uri="{FF2B5EF4-FFF2-40B4-BE49-F238E27FC236}">
+                <a16:creationId xmlns:a16="http://schemas.microsoft.com/office/drawing/2014/main" id="{C8AF6847-62D9-5244-72FB-5D0F43D66920}"/>
+              </a:ext>
+            </a:extLst>
+          </p:cNvPr>
+          <p:cNvSpPr/>
+          <p:nvPr/>
+        </p:nvSpPr>
+        <p:spPr>
+          <a:xfrm>
+            <a:off x="-169334" y="0"/>
+            <a:ext cx="12848166" cy="656167"/>
+          </a:xfrm>
+          <a:prstGeom prst="rect">
+            <a:avLst/>
+          </a:prstGeom>
+          <a:solidFill>
+            <a:schemeClr val="bg1">
+              <a:lumMod val="95000"/>
+            </a:schemeClr>
+          </a:solidFill>
+          <a:ln>
+            <a:noFill/>
+          </a:ln>
+        </p:spPr>
+        <p:style>
+          <a:lnRef idx="2">
+            <a:schemeClr val="accent1">
+              <a:shade val="15000"/>
+            </a:schemeClr>
+          </a:lnRef>
+          <a:fillRef idx="1">
+            <a:schemeClr val="accent1"/>
+          </a:fillRef>
+          <a:effectRef idx="0">
+            <a:schemeClr val="accent1"/>
+          </a:effectRef>
+          <a:fontRef idx="minor">
+            <a:schemeClr val="lt1"/>
+          </a:fontRef>
+        </p:style>
+        <p:txBody>
+          <a:bodyPr rtlCol="0" anchor="ctr"/>
+          <a:lstStyle/>
+          <a:p>
+            <a:pPr algn="ctr"/>
+            <a:endParaRPr lang="ko-KR" altLang="en-US"/>
+          </a:p>
+        </p:txBody>
+      </p:sp>
+      <p:sp>
+        <p:nvSpPr>
+          <p:cNvPr id="7" name="TextBox 6">
+            <a:extLst>
+              <a:ext uri="{FF2B5EF4-FFF2-40B4-BE49-F238E27FC236}">
+                <a16:creationId xmlns:a16="http://schemas.microsoft.com/office/drawing/2014/main" id="{7B33C51C-6190-A0A9-2187-5BED896BA52A}"/>
+              </a:ext>
+            </a:extLst>
+          </p:cNvPr>
+          <p:cNvSpPr txBox="1"/>
+          <p:nvPr/>
+        </p:nvSpPr>
+        <p:spPr>
+          <a:xfrm>
+            <a:off x="-2" y="179916"/>
+            <a:ext cx="7217832" cy="477054"/>
+          </a:xfrm>
+          <a:prstGeom prst="rect">
+            <a:avLst/>
+          </a:prstGeom>
+          <a:noFill/>
+          <a:ln>
+            <a:noFill/>
+          </a:ln>
+        </p:spPr>
+        <p:txBody>
+          <a:bodyPr rot="0" spcFirstLastPara="0" vertOverflow="overflow" horzOverflow="overflow" vert="horz" wrap="square" lIns="91440" tIns="45720" rIns="91440" bIns="45720" numCol="1" spcCol="0" rtlCol="0" fromWordArt="0" anchor="t" anchorCtr="0" forceAA="0" compatLnSpc="1">
+            <a:prstTxWarp prst="textNoShape">
+              <a:avLst/>
+            </a:prstTxWarp>
+            <a:spAutoFit/>
+          </a:bodyPr>
+          <a:lstStyle/>
+          <a:p>
+            <a:r>
+              <a:rPr lang="ko-KR" altLang="en-US" sz="2500" dirty="0">
+                <a:solidFill>
+                  <a:srgbClr val="747474"/>
+                </a:solidFill>
+                <a:latin typeface="Microsoft GothicNeo"/>
+                <a:ea typeface="Microsoft GothicNeo"/>
+                <a:cs typeface="Arial"/>
+              </a:rPr>
+              <a:t>02-3 현황 분석 및 전략 설정 배경</a:t>
+            </a:r>
+          </a:p>
+        </p:txBody>
+      </p:sp>
+      <p:sp>
+        <p:nvSpPr>
+          <p:cNvPr id="2" name="TextBox 1">
+            <a:extLst>
+              <a:ext uri="{FF2B5EF4-FFF2-40B4-BE49-F238E27FC236}">
+                <a16:creationId xmlns:a16="http://schemas.microsoft.com/office/drawing/2014/main" id="{48259493-DD81-0497-C0D6-FED321D7F03B}"/>
+              </a:ext>
+            </a:extLst>
+          </p:cNvPr>
+          <p:cNvSpPr txBox="1"/>
+          <p:nvPr/>
+        </p:nvSpPr>
+        <p:spPr>
+          <a:xfrm>
+            <a:off x="613833" y="941917"/>
+            <a:ext cx="10002506" cy="1372492"/>
+          </a:xfrm>
+          <a:prstGeom prst="rect">
+            <a:avLst/>
+          </a:prstGeom>
+          <a:noFill/>
+        </p:spPr>
+        <p:txBody>
+          <a:bodyPr rot="0" spcFirstLastPara="0" vertOverflow="overflow" horzOverflow="overflow" vert="horz" wrap="square" lIns="91440" tIns="45720" rIns="91440" bIns="45720" numCol="1" spcCol="0" rtlCol="0" fromWordArt="0" anchor="t" anchorCtr="0" forceAA="0" compatLnSpc="1">
+            <a:prstTxWarp prst="textNoShape">
+              <a:avLst/>
+            </a:prstTxWarp>
+            <a:spAutoFit/>
+          </a:bodyPr>
+          <a:lstStyle/>
+          <a:p>
+            <a:pPr marL="285750" indent="-285750">
+              <a:lnSpc>
+                <a:spcPct val="150000"/>
+              </a:lnSpc>
+              <a:buFont typeface="Wingdings"/>
+              <a:buChar char="q"/>
+            </a:pPr>
+            <a:r>
+              <a:rPr lang="en-US" altLang="ko-KR" dirty="0">
+                <a:latin typeface="Microsoft GothicNeo"/>
+                <a:ea typeface="Microsoft GothicNeo"/>
+                <a:cs typeface="Microsoft GothicNeo"/>
+              </a:rPr>
+              <a:t>2016</a:t>
+            </a:r>
+            <a:r>
+              <a:rPr lang="ko-KR" altLang="en-US" dirty="0">
+                <a:latin typeface="Microsoft GothicNeo"/>
+                <a:ea typeface="Microsoft GothicNeo"/>
+                <a:cs typeface="Microsoft GothicNeo"/>
+              </a:rPr>
+              <a:t>년도 업계 현황 및 배경 </a:t>
+            </a:r>
+          </a:p>
+          <a:p>
+            <a:pPr marL="400050" lvl="2" indent="228600">
+              <a:lnSpc>
+                <a:spcPct val="150000"/>
+              </a:lnSpc>
+              <a:buFont typeface="Wingdings,Sans-Serif"/>
+              <a:buChar char="§"/>
+            </a:pPr>
+            <a:r>
+              <a:rPr lang="en-US" altLang="ko-KR" sz="1300" dirty="0">
+                <a:latin typeface="Microsoft GothicNeo"/>
+                <a:ea typeface="Microsoft GothicNeo"/>
+                <a:cs typeface="Microsoft GothicNeo"/>
+              </a:rPr>
+              <a:t>08’ </a:t>
+            </a:r>
+            <a:r>
+              <a:rPr lang="ko-KR" altLang="en-US" sz="1300" dirty="0">
+                <a:latin typeface="Microsoft GothicNeo"/>
+                <a:ea typeface="Microsoft GothicNeo"/>
+                <a:cs typeface="Microsoft GothicNeo"/>
+              </a:rPr>
+              <a:t>금융위기 이후 은행들은 신뢰회복과 건전성 강화에 집중</a:t>
+            </a:r>
+            <a:endParaRPr lang="ko-KR" sz="1300" dirty="0">
+              <a:latin typeface="Microsoft GothicNeo"/>
+              <a:ea typeface="Microsoft GothicNeo"/>
+              <a:cs typeface="Microsoft GothicNeo"/>
+            </a:endParaRPr>
+          </a:p>
+          <a:p>
+            <a:pPr marL="400050" lvl="2" indent="228600">
+              <a:lnSpc>
+                <a:spcPct val="150000"/>
+              </a:lnSpc>
+              <a:buFont typeface="Wingdings"/>
+              <a:buChar char="§"/>
+            </a:pPr>
+            <a:r>
+              <a:rPr lang="ko-KR" altLang="en-US" sz="1300" dirty="0">
+                <a:latin typeface="Microsoft GothicNeo"/>
+                <a:ea typeface="Microsoft GothicNeo"/>
+                <a:cs typeface="Microsoft GothicNeo"/>
+              </a:rPr>
+              <a:t>디지털 뱅킹 확산</a:t>
+            </a:r>
+            <a:r>
+              <a:rPr lang="en-US" altLang="ko-KR" sz="1300" dirty="0">
+                <a:latin typeface="Microsoft GothicNeo"/>
+                <a:ea typeface="Microsoft GothicNeo"/>
+                <a:cs typeface="Microsoft GothicNeo"/>
+              </a:rPr>
+              <a:t>, </a:t>
+            </a:r>
+            <a:r>
+              <a:rPr lang="ko-KR" altLang="en-US" sz="1300" dirty="0">
+                <a:latin typeface="Microsoft GothicNeo"/>
+                <a:ea typeface="Microsoft GothicNeo"/>
+                <a:cs typeface="Microsoft GothicNeo"/>
+              </a:rPr>
+              <a:t>고객 경험 경쟁 심화</a:t>
+            </a:r>
+            <a:r>
+              <a:rPr lang="en-US" altLang="ko-KR" sz="1300" dirty="0">
+                <a:latin typeface="Microsoft GothicNeo"/>
+                <a:ea typeface="Microsoft GothicNeo"/>
+                <a:cs typeface="Microsoft GothicNeo"/>
+              </a:rPr>
+              <a:t>, </a:t>
+            </a:r>
+            <a:r>
+              <a:rPr lang="ko-KR" altLang="en-US" sz="1300" dirty="0">
+                <a:latin typeface="Microsoft GothicNeo"/>
+                <a:ea typeface="Microsoft GothicNeo"/>
+                <a:cs typeface="Microsoft GothicNeo"/>
+              </a:rPr>
+              <a:t>규제 강화 ▶ </a:t>
+            </a:r>
+            <a:r>
+              <a:rPr lang="ko-KR" altLang="en-US" sz="1300" b="1" dirty="0">
+                <a:solidFill>
+                  <a:srgbClr val="C00000"/>
+                </a:solidFill>
+                <a:latin typeface="Microsoft GothicNeo"/>
+                <a:ea typeface="Microsoft GothicNeo"/>
+                <a:cs typeface="Microsoft GothicNeo"/>
+              </a:rPr>
+              <a:t>충성 고객 확대</a:t>
+            </a:r>
+            <a:r>
+              <a:rPr lang="en-US" altLang="ko-KR" sz="1300" b="1" dirty="0">
+                <a:solidFill>
+                  <a:srgbClr val="C00000"/>
+                </a:solidFill>
+                <a:latin typeface="Microsoft GothicNeo"/>
+                <a:ea typeface="Microsoft GothicNeo"/>
+                <a:cs typeface="Microsoft GothicNeo"/>
+              </a:rPr>
+              <a:t>, </a:t>
+            </a:r>
+            <a:r>
+              <a:rPr lang="ko-KR" altLang="en-US" sz="1300" b="1" dirty="0">
+                <a:solidFill>
+                  <a:srgbClr val="C00000"/>
+                </a:solidFill>
+                <a:latin typeface="Microsoft GothicNeo"/>
+                <a:ea typeface="Microsoft GothicNeo"/>
+                <a:cs typeface="Microsoft GothicNeo"/>
+              </a:rPr>
+              <a:t>디지털 전환 가속화</a:t>
+            </a:r>
+          </a:p>
+          <a:p>
+            <a:pPr marL="800100" lvl="3" indent="-228600">
+              <a:lnSpc>
+                <a:spcPct val="150000"/>
+              </a:lnSpc>
+              <a:buFont typeface="Calibri"/>
+              <a:buChar char="-"/>
+            </a:pPr>
+            <a:r>
+              <a:rPr lang="en-US" altLang="ko-KR" sz="1300" dirty="0">
+                <a:latin typeface="Microsoft GothicNeo"/>
+                <a:ea typeface="Microsoft GothicNeo"/>
+                <a:cs typeface="Microsoft GothicNeo"/>
+              </a:rPr>
+              <a:t>“</a:t>
+            </a:r>
+            <a:r>
+              <a:rPr lang="ko-KR" altLang="en-US" sz="1300" dirty="0" err="1">
+                <a:latin typeface="Microsoft GothicNeo"/>
+                <a:ea typeface="Microsoft GothicNeo"/>
+                <a:cs typeface="Microsoft GothicNeo"/>
+              </a:rPr>
+              <a:t>산탄데르가</a:t>
+            </a:r>
+            <a:r>
+              <a:rPr lang="ko-KR" altLang="en-US" sz="1300" dirty="0">
+                <a:latin typeface="Microsoft GothicNeo"/>
+                <a:ea typeface="Microsoft GothicNeo"/>
+                <a:cs typeface="Microsoft GothicNeo"/>
+              </a:rPr>
+              <a:t> 고객 경험을 혁신하고 </a:t>
+            </a:r>
+            <a:r>
+              <a:rPr lang="en-US" altLang="ko-KR" sz="1300" dirty="0">
+                <a:latin typeface="Microsoft GothicNeo"/>
+                <a:ea typeface="Microsoft GothicNeo"/>
+                <a:cs typeface="Microsoft GothicNeo"/>
+              </a:rPr>
+              <a:t>NPS </a:t>
+            </a:r>
+            <a:r>
+              <a:rPr lang="ko-KR" altLang="en-US" sz="1300" dirty="0">
+                <a:latin typeface="Microsoft GothicNeo"/>
+                <a:ea typeface="Microsoft GothicNeo"/>
+                <a:cs typeface="Microsoft GothicNeo"/>
+              </a:rPr>
+              <a:t>개선을 위해</a:t>
+            </a:r>
+            <a:r>
+              <a:rPr lang="en-US" altLang="ko-KR" sz="1300" dirty="0">
+                <a:latin typeface="Microsoft GothicNeo"/>
+                <a:ea typeface="Microsoft GothicNeo"/>
+                <a:cs typeface="Microsoft GothicNeo"/>
+              </a:rPr>
+              <a:t>, </a:t>
+            </a:r>
+            <a:r>
+              <a:rPr lang="ko-KR" altLang="en-US" sz="1300" b="1" dirty="0">
+                <a:latin typeface="Microsoft GothicNeo"/>
+                <a:ea typeface="Microsoft GothicNeo"/>
+                <a:cs typeface="Microsoft GothicNeo"/>
+              </a:rPr>
+              <a:t>어떤 요인이 만족도에 영향을 주는지</a:t>
+            </a:r>
+            <a:r>
+              <a:rPr lang="ko-KR" altLang="en-US" sz="1300" dirty="0">
+                <a:latin typeface="Microsoft GothicNeo"/>
+                <a:ea typeface="Microsoft GothicNeo"/>
+                <a:cs typeface="Microsoft GothicNeo"/>
+              </a:rPr>
+              <a:t> 데이터 분석을 통해 규명</a:t>
+            </a:r>
+          </a:p>
+        </p:txBody>
+      </p:sp>
+      <p:sp>
+        <p:nvSpPr>
+          <p:cNvPr id="4" name="직사각형 3">
+            <a:extLst>
+              <a:ext uri="{FF2B5EF4-FFF2-40B4-BE49-F238E27FC236}">
+                <a16:creationId xmlns:a16="http://schemas.microsoft.com/office/drawing/2014/main" id="{585AB578-2066-2FF2-2668-3D174838F1D7}"/>
+              </a:ext>
+            </a:extLst>
+          </p:cNvPr>
+          <p:cNvSpPr/>
+          <p:nvPr/>
+        </p:nvSpPr>
+        <p:spPr>
+          <a:xfrm>
+            <a:off x="444500" y="1026583"/>
+            <a:ext cx="63499" cy="1291166"/>
+          </a:xfrm>
+          <a:prstGeom prst="rect">
+            <a:avLst/>
+          </a:prstGeom>
+          <a:solidFill>
+            <a:srgbClr val="C00000"/>
+          </a:solidFill>
+          <a:ln>
+            <a:noFill/>
+          </a:ln>
+        </p:spPr>
+        <p:style>
+          <a:lnRef idx="2">
+            <a:schemeClr val="accent1">
+              <a:shade val="15000"/>
+            </a:schemeClr>
+          </a:lnRef>
+          <a:fillRef idx="1">
+            <a:schemeClr val="accent1"/>
+          </a:fillRef>
+          <a:effectRef idx="0">
+            <a:schemeClr val="accent1"/>
+          </a:effectRef>
+          <a:fontRef idx="minor">
+            <a:schemeClr val="lt1"/>
+          </a:fontRef>
+        </p:style>
+        <p:txBody>
+          <a:bodyPr rtlCol="0" anchor="ctr"/>
+          <a:lstStyle/>
+          <a:p>
+            <a:pPr algn="ctr"/>
+            <a:endParaRPr lang="ko-KR" altLang="en-US"/>
+          </a:p>
+        </p:txBody>
+      </p:sp>
+      <p:pic>
+        <p:nvPicPr>
+          <p:cNvPr id="1026" name="Picture 2">
+            <a:extLst>
+              <a:ext uri="{FF2B5EF4-FFF2-40B4-BE49-F238E27FC236}">
+                <a16:creationId xmlns:a16="http://schemas.microsoft.com/office/drawing/2014/main" id="{7C3CB014-9220-ACE3-CECB-B169544FB728}"/>
+              </a:ext>
+            </a:extLst>
+          </p:cNvPr>
+          <p:cNvPicPr>
+            <a:picLocks noChangeAspect="1" noChangeArrowheads="1"/>
+          </p:cNvPicPr>
+          <p:nvPr/>
+        </p:nvPicPr>
+        <p:blipFill>
+          <a:blip r:embed="rId2" cstate="print">
+            <a:extLst>
+              <a:ext uri="{28A0092B-C50C-407E-A947-70E740481C1C}">
+                <a14:useLocalDpi xmlns:a14="http://schemas.microsoft.com/office/drawing/2010/main" val="0"/>
+              </a:ext>
+            </a:extLst>
+          </a:blip>
+          <a:srcRect/>
+          <a:stretch>
+            <a:fillRect/>
+          </a:stretch>
+        </p:blipFill>
+        <p:spPr bwMode="auto">
+          <a:xfrm>
+            <a:off x="917913" y="2873736"/>
+            <a:ext cx="6007344" cy="3200006"/>
+          </a:xfrm>
+          <a:prstGeom prst="rect">
+            <a:avLst/>
+          </a:prstGeom>
+          <a:noFill/>
+          <a:extLst>
+            <a:ext uri="{909E8E84-426E-40DD-AFC4-6F175D3DCCD1}">
+              <a14:hiddenFill xmlns:a14="http://schemas.microsoft.com/office/drawing/2010/main">
+                <a:solidFill>
+                  <a:srgbClr val="FFFFFF"/>
+                </a:solidFill>
+              </a14:hiddenFill>
+            </a:ext>
+          </a:extLst>
+        </p:spPr>
+      </p:pic>
+      <p:pic>
+        <p:nvPicPr>
+          <p:cNvPr id="6" name="그림 5" descr="File:Santander Logo.PNG - Wikimedia Commons">
+            <a:extLst>
+              <a:ext uri="{FF2B5EF4-FFF2-40B4-BE49-F238E27FC236}">
+                <a16:creationId xmlns:a16="http://schemas.microsoft.com/office/drawing/2014/main" id="{8BC14684-08B8-2619-DCA8-A9B4256E5187}"/>
+              </a:ext>
+            </a:extLst>
+          </p:cNvPr>
+          <p:cNvPicPr>
+            <a:picLocks noChangeAspect="1"/>
+          </p:cNvPicPr>
+          <p:nvPr/>
+        </p:nvPicPr>
+        <p:blipFill>
+          <a:blip r:embed="rId3"/>
+          <a:stretch>
+            <a:fillRect/>
+          </a:stretch>
+        </p:blipFill>
+        <p:spPr>
+          <a:xfrm>
+            <a:off x="2" y="5771641"/>
+            <a:ext cx="2901462" cy="1088332"/>
+          </a:xfrm>
+          <a:prstGeom prst="rect">
+            <a:avLst/>
+          </a:prstGeom>
+        </p:spPr>
+      </p:pic>
+      <p:pic>
+        <p:nvPicPr>
+          <p:cNvPr id="1028" name="Picture 4">
+            <a:extLst>
+              <a:ext uri="{FF2B5EF4-FFF2-40B4-BE49-F238E27FC236}">
+                <a16:creationId xmlns:a16="http://schemas.microsoft.com/office/drawing/2014/main" id="{5F1738E2-904A-E240-DFE4-0FB282C55053}"/>
+              </a:ext>
+            </a:extLst>
+          </p:cNvPr>
+          <p:cNvPicPr>
+            <a:picLocks noChangeAspect="1" noChangeArrowheads="1"/>
+          </p:cNvPicPr>
+          <p:nvPr/>
+        </p:nvPicPr>
+        <p:blipFill>
+          <a:blip r:embed="rId4">
+            <a:extLst>
+              <a:ext uri="{28A0092B-C50C-407E-A947-70E740481C1C}">
+                <a14:useLocalDpi xmlns:a14="http://schemas.microsoft.com/office/drawing/2010/main" val="0"/>
+              </a:ext>
+            </a:extLst>
+          </a:blip>
+          <a:srcRect/>
+          <a:stretch>
+            <a:fillRect/>
+          </a:stretch>
+        </p:blipFill>
+        <p:spPr bwMode="auto">
+          <a:xfrm>
+            <a:off x="7120584" y="3429000"/>
+            <a:ext cx="3239229" cy="2450998"/>
+          </a:xfrm>
+          <a:prstGeom prst="rect">
+            <a:avLst/>
+          </a:prstGeom>
+          <a:noFill/>
+          <a:extLst>
+            <a:ext uri="{909E8E84-426E-40DD-AFC4-6F175D3DCCD1}">
+              <a14:hiddenFill xmlns:a14="http://schemas.microsoft.com/office/drawing/2010/main">
+                <a:solidFill>
+                  <a:srgbClr val="FFFFFF"/>
+                </a:solidFill>
+              </a14:hiddenFill>
+            </a:ext>
+          </a:extLst>
+        </p:spPr>
+      </p:pic>
+      <p:sp>
+        <p:nvSpPr>
+          <p:cNvPr id="8" name="직사각형 7">
+            <a:extLst>
+              <a:ext uri="{FF2B5EF4-FFF2-40B4-BE49-F238E27FC236}">
+                <a16:creationId xmlns:a16="http://schemas.microsoft.com/office/drawing/2014/main" id="{D4D6E624-D34C-83A9-2B1E-3F3EDC2E51C8}"/>
+              </a:ext>
+            </a:extLst>
+          </p:cNvPr>
+          <p:cNvSpPr/>
+          <p:nvPr/>
+        </p:nvSpPr>
+        <p:spPr>
+          <a:xfrm flipV="1">
+            <a:off x="6925257" y="3368528"/>
+            <a:ext cx="4633344" cy="45719"/>
+          </a:xfrm>
+          <a:prstGeom prst="rect">
+            <a:avLst/>
+          </a:prstGeom>
+          <a:solidFill>
+            <a:srgbClr val="C00000"/>
+          </a:solidFill>
+          <a:ln>
+            <a:noFill/>
+          </a:ln>
+        </p:spPr>
+        <p:style>
+          <a:lnRef idx="2">
+            <a:schemeClr val="accent1">
+              <a:shade val="15000"/>
+            </a:schemeClr>
+          </a:lnRef>
+          <a:fillRef idx="1">
+            <a:schemeClr val="accent1"/>
+          </a:fillRef>
+          <a:effectRef idx="0">
+            <a:schemeClr val="accent1"/>
+          </a:effectRef>
+          <a:fontRef idx="minor">
+            <a:schemeClr val="lt1"/>
+          </a:fontRef>
+        </p:style>
+        <p:txBody>
+          <a:bodyPr rtlCol="0" anchor="ctr"/>
+          <a:lstStyle/>
+          <a:p>
+            <a:pPr algn="ctr"/>
+            <a:endParaRPr lang="ko-KR" altLang="en-US"/>
+          </a:p>
+        </p:txBody>
+      </p:sp>
+      <p:sp>
+        <p:nvSpPr>
+          <p:cNvPr id="12" name="TextBox 11">
+            <a:extLst>
+              <a:ext uri="{FF2B5EF4-FFF2-40B4-BE49-F238E27FC236}">
+                <a16:creationId xmlns:a16="http://schemas.microsoft.com/office/drawing/2014/main" id="{EE112614-7320-98C1-4E61-F2F3F9301AEB}"/>
+              </a:ext>
+            </a:extLst>
+          </p:cNvPr>
+          <p:cNvSpPr txBox="1"/>
+          <p:nvPr/>
+        </p:nvSpPr>
+        <p:spPr>
+          <a:xfrm>
+            <a:off x="1904186" y="2636288"/>
+            <a:ext cx="8383627" cy="261610"/>
+          </a:xfrm>
+          <a:prstGeom prst="rect">
+            <a:avLst/>
+          </a:prstGeom>
+          <a:noFill/>
+        </p:spPr>
+        <p:txBody>
+          <a:bodyPr rot="0" spcFirstLastPara="0" vertOverflow="overflow" horzOverflow="overflow" vert="horz" wrap="square" lIns="91440" tIns="45720" rIns="91440" bIns="45720" numCol="1" spcCol="0" rtlCol="0" fromWordArt="0" anchor="t" anchorCtr="0" forceAA="0" compatLnSpc="1">
+            <a:prstTxWarp prst="textNoShape">
+              <a:avLst/>
+            </a:prstTxWarp>
+            <a:spAutoFit/>
+          </a:bodyPr>
+          <a:lstStyle/>
+          <a:p>
+            <a:pPr algn="ctr"/>
+            <a:r>
+              <a:rPr lang="ko-KR" altLang="en-US" sz="1100" dirty="0">
+                <a:latin typeface="Microsoft GothicNeo"/>
+                <a:ea typeface="Microsoft GothicNeo"/>
+                <a:cs typeface="Microsoft GothicNeo"/>
+              </a:rPr>
+              <a:t>[ 그림 2.</a:t>
+            </a:r>
+            <a:r>
+              <a:rPr lang="en-US" altLang="ko-KR" sz="1100" dirty="0">
+                <a:latin typeface="Microsoft GothicNeo"/>
+                <a:ea typeface="Microsoft GothicNeo"/>
+                <a:cs typeface="Microsoft GothicNeo"/>
+              </a:rPr>
+              <a:t>3</a:t>
+            </a:r>
+            <a:r>
+              <a:rPr lang="ko-KR" altLang="en-US" sz="1100" dirty="0">
+                <a:latin typeface="Microsoft GothicNeo"/>
+                <a:ea typeface="Microsoft GothicNeo"/>
+                <a:cs typeface="Microsoft GothicNeo"/>
+              </a:rPr>
+              <a:t> </a:t>
+            </a:r>
+            <a:r>
+              <a:rPr lang="ko-KR" altLang="en-US" sz="1100" dirty="0" err="1">
+                <a:latin typeface="Microsoft GothicNeo"/>
+                <a:ea typeface="Microsoft GothicNeo"/>
+                <a:cs typeface="Microsoft GothicNeo"/>
+              </a:rPr>
+              <a:t>산탄데르</a:t>
+            </a:r>
+            <a:r>
+              <a:rPr lang="ko-KR" altLang="en-US" sz="1100" dirty="0">
+                <a:latin typeface="Microsoft GothicNeo"/>
+                <a:ea typeface="Microsoft GothicNeo"/>
+                <a:cs typeface="Microsoft GothicNeo"/>
+              </a:rPr>
+              <a:t> 은행 디지털 전환 및 고객중심 경영 만족도 </a:t>
+            </a:r>
+            <a:r>
+              <a:rPr lang="en-US" altLang="ko-KR" sz="1100" dirty="0">
+                <a:latin typeface="Microsoft GothicNeo"/>
+                <a:ea typeface="Microsoft GothicNeo"/>
+                <a:cs typeface="Microsoft GothicNeo"/>
+              </a:rPr>
+              <a:t>NPS</a:t>
+            </a:r>
+            <a:r>
+              <a:rPr lang="ko-KR" altLang="en-US" sz="1100" dirty="0">
+                <a:latin typeface="Microsoft GothicNeo"/>
+                <a:ea typeface="Microsoft GothicNeo"/>
+                <a:cs typeface="Microsoft GothicNeo"/>
+              </a:rPr>
+              <a:t> 조사 </a:t>
+            </a:r>
+            <a:r>
+              <a:rPr lang="en-US" altLang="ko-KR" sz="1100" dirty="0">
+                <a:latin typeface="Microsoft GothicNeo"/>
+                <a:ea typeface="Microsoft GothicNeo"/>
+                <a:cs typeface="Microsoft GothicNeo"/>
+              </a:rPr>
+              <a:t>(2019) </a:t>
+            </a:r>
+            <a:r>
+              <a:rPr lang="ko-KR" altLang="en-US" sz="1100" dirty="0">
+                <a:latin typeface="Microsoft GothicNeo"/>
+                <a:ea typeface="Microsoft GothicNeo"/>
+                <a:cs typeface="Microsoft GothicNeo"/>
+              </a:rPr>
+              <a:t>]</a:t>
+            </a:r>
+          </a:p>
+        </p:txBody>
+      </p:sp>
+      <p:sp>
+        <p:nvSpPr>
+          <p:cNvPr id="13" name="TextBox 12">
+            <a:extLst>
+              <a:ext uri="{FF2B5EF4-FFF2-40B4-BE49-F238E27FC236}">
+                <a16:creationId xmlns:a16="http://schemas.microsoft.com/office/drawing/2014/main" id="{F2BDD9B2-1CA4-2CB2-3E4C-9C795853DBF0}"/>
+              </a:ext>
+            </a:extLst>
+          </p:cNvPr>
+          <p:cNvSpPr txBox="1"/>
+          <p:nvPr/>
+        </p:nvSpPr>
+        <p:spPr>
+          <a:xfrm>
+            <a:off x="8163915" y="5894751"/>
+            <a:ext cx="3394686" cy="246221"/>
+          </a:xfrm>
+          <a:prstGeom prst="rect">
+            <a:avLst/>
+          </a:prstGeom>
+          <a:noFill/>
+        </p:spPr>
+        <p:txBody>
+          <a:bodyPr rot="0" spcFirstLastPara="0" vertOverflow="overflow" horzOverflow="overflow" vert="horz" wrap="square" lIns="91440" tIns="45720" rIns="91440" bIns="45720" numCol="1" spcCol="0" rtlCol="0" fromWordArt="0" anchor="t" anchorCtr="0" forceAA="0" compatLnSpc="1">
+            <a:prstTxWarp prst="textNoShape">
+              <a:avLst/>
+            </a:prstTxWarp>
+            <a:spAutoFit/>
+          </a:bodyPr>
+          <a:lstStyle/>
+          <a:p>
+            <a:pPr algn="ctr"/>
+            <a:r>
+              <a:rPr lang="ko-KR" altLang="en-US" sz="1000" dirty="0">
+                <a:latin typeface="Microsoft GothicNeo"/>
+                <a:ea typeface="Microsoft GothicNeo"/>
+                <a:cs typeface="Microsoft GothicNeo"/>
+              </a:rPr>
+              <a:t>자료</a:t>
+            </a:r>
+            <a:r>
+              <a:rPr lang="en-US" altLang="ko-KR" sz="1000" dirty="0">
+                <a:latin typeface="Microsoft GothicNeo"/>
+                <a:ea typeface="Microsoft GothicNeo"/>
+                <a:cs typeface="Microsoft GothicNeo"/>
+              </a:rPr>
+              <a:t> : NPS – Customer</a:t>
+            </a:r>
+            <a:r>
+              <a:rPr lang="ko-KR" altLang="en-US" sz="1000" dirty="0">
+                <a:latin typeface="Microsoft GothicNeo"/>
+                <a:ea typeface="Microsoft GothicNeo"/>
+                <a:cs typeface="Microsoft GothicNeo"/>
+              </a:rPr>
+              <a:t> </a:t>
+            </a:r>
+            <a:r>
+              <a:rPr lang="en-US" altLang="ko-KR" sz="1000" dirty="0">
+                <a:latin typeface="Microsoft GothicNeo"/>
+                <a:ea typeface="Microsoft GothicNeo"/>
+                <a:cs typeface="Microsoft GothicNeo"/>
+              </a:rPr>
+              <a:t>Satisfaction by </a:t>
+            </a:r>
+            <a:r>
+              <a:rPr lang="en-US" altLang="ko-KR" sz="1000" dirty="0" err="1">
+                <a:latin typeface="Microsoft GothicNeo"/>
+                <a:ea typeface="Microsoft GothicNeo"/>
+                <a:cs typeface="Microsoft GothicNeo"/>
+              </a:rPr>
+              <a:t>Stiga</a:t>
+            </a:r>
+            <a:r>
+              <a:rPr lang="en-US" altLang="ko-KR" sz="1000" dirty="0">
+                <a:latin typeface="Microsoft GothicNeo"/>
+                <a:ea typeface="Microsoft GothicNeo"/>
+                <a:cs typeface="Microsoft GothicNeo"/>
+              </a:rPr>
+              <a:t> / Deloitte</a:t>
+            </a:r>
+            <a:endParaRPr lang="ko-KR" altLang="en-US" sz="1000" dirty="0">
+              <a:latin typeface="Microsoft GothicNeo"/>
+              <a:ea typeface="Microsoft GothicNeo"/>
+              <a:cs typeface="Microsoft GothicNeo"/>
+            </a:endParaRPr>
+          </a:p>
+        </p:txBody>
+      </p:sp>
+    </p:spTree>
+    <p:extLst>
+      <p:ext uri="{BB962C8B-B14F-4D97-AF65-F5344CB8AC3E}">
+        <p14:creationId xmlns:p14="http://schemas.microsoft.com/office/powerpoint/2010/main" val="3126530277"/>
+      </p:ext>
+    </p:extLst>
+  </p:cSld>
+  <p:clrMapOvr>
+    <a:masterClrMapping/>
+  </p:clrMapOvr>
+</p:sld>
+</file>
+
+<file path=ppt/slides/slide5.xml><?xml version="1.0" encoding="utf-8"?>
+<p:sld xmlns:a="http://schemas.openxmlformats.org/drawingml/2006/main" xmlns:r="http://schemas.openxmlformats.org/officeDocument/2006/relationships" xmlns:p="http://schemas.openxmlformats.org/presentationml/2006/main">
+  <p:cSld>
+    <p:spTree>
+      <p:nvGrpSpPr>
+        <p:cNvPr id="1" name="">
+          <a:extLst>
+            <a:ext uri="{FF2B5EF4-FFF2-40B4-BE49-F238E27FC236}">
+              <a16:creationId xmlns:a16="http://schemas.microsoft.com/office/drawing/2014/main" id="{54ED3A31-F41A-524E-DDD0-C30019B8321A}"/>
+            </a:ext>
+          </a:extLst>
+        </p:cNvPr>
+        <p:cNvGrpSpPr/>
+        <p:nvPr/>
+      </p:nvGrpSpPr>
+      <p:grpSpPr>
+        <a:xfrm>
+          <a:off x="0" y="0"/>
+          <a:ext cx="0" cy="0"/>
+          <a:chOff x="0" y="0"/>
+          <a:chExt cx="0" cy="0"/>
+        </a:xfrm>
+      </p:grpSpPr>
+      <p:sp>
+        <p:nvSpPr>
+          <p:cNvPr id="5" name="직사각형 4">
+            <a:extLst>
+              <a:ext uri="{FF2B5EF4-FFF2-40B4-BE49-F238E27FC236}">
+                <a16:creationId xmlns:a16="http://schemas.microsoft.com/office/drawing/2014/main" id="{EB132456-2703-A257-C348-A2DB5EC64678}"/>
+              </a:ext>
+            </a:extLst>
+          </p:cNvPr>
+          <p:cNvSpPr/>
+          <p:nvPr/>
+        </p:nvSpPr>
+        <p:spPr>
+          <a:xfrm>
+            <a:off x="-169334" y="0"/>
+            <a:ext cx="12848166" cy="656167"/>
+          </a:xfrm>
+          <a:prstGeom prst="rect">
+            <a:avLst/>
+          </a:prstGeom>
+          <a:solidFill>
+            <a:schemeClr val="bg1">
+              <a:lumMod val="95000"/>
+            </a:schemeClr>
+          </a:solidFill>
+          <a:ln>
+            <a:noFill/>
+          </a:ln>
+        </p:spPr>
+        <p:style>
+          <a:lnRef idx="2">
+            <a:schemeClr val="accent1">
+              <a:shade val="15000"/>
+            </a:schemeClr>
+          </a:lnRef>
+          <a:fillRef idx="1">
+            <a:schemeClr val="accent1"/>
+          </a:fillRef>
+          <a:effectRef idx="0">
+            <a:schemeClr val="accent1"/>
+          </a:effectRef>
+          <a:fontRef idx="minor">
+            <a:schemeClr val="lt1"/>
+          </a:fontRef>
+        </p:style>
+        <p:txBody>
+          <a:bodyPr rtlCol="0" anchor="ctr"/>
+          <a:lstStyle/>
+          <a:p>
+            <a:pPr algn="ctr"/>
+            <a:endParaRPr lang="ko-KR" altLang="en-US"/>
+          </a:p>
+        </p:txBody>
+      </p:sp>
+      <p:sp>
+        <p:nvSpPr>
+          <p:cNvPr id="7" name="TextBox 6">
+            <a:extLst>
+              <a:ext uri="{FF2B5EF4-FFF2-40B4-BE49-F238E27FC236}">
+                <a16:creationId xmlns:a16="http://schemas.microsoft.com/office/drawing/2014/main" id="{2D318873-2D0B-93E2-7877-C7AF3190EC31}"/>
+              </a:ext>
+            </a:extLst>
+          </p:cNvPr>
+          <p:cNvSpPr txBox="1"/>
+          <p:nvPr/>
+        </p:nvSpPr>
+        <p:spPr>
+          <a:xfrm>
+            <a:off x="-2" y="179916"/>
+            <a:ext cx="7217832" cy="477054"/>
+          </a:xfrm>
+          <a:prstGeom prst="rect">
+            <a:avLst/>
+          </a:prstGeom>
+          <a:noFill/>
+          <a:ln>
+            <a:noFill/>
+          </a:ln>
+        </p:spPr>
+        <p:txBody>
+          <a:bodyPr rot="0" spcFirstLastPara="0" vertOverflow="overflow" horzOverflow="overflow" vert="horz" wrap="square" lIns="91440" tIns="45720" rIns="91440" bIns="45720" numCol="1" spcCol="0" rtlCol="0" fromWordArt="0" anchor="t" anchorCtr="0" forceAA="0" compatLnSpc="1">
+            <a:prstTxWarp prst="textNoShape">
+              <a:avLst/>
+            </a:prstTxWarp>
+            <a:spAutoFit/>
+          </a:bodyPr>
+          <a:lstStyle/>
+          <a:p>
+            <a:r>
+              <a:rPr lang="ko-KR" altLang="en-US" sz="2500" dirty="0">
+                <a:solidFill>
+                  <a:srgbClr val="747474"/>
+                </a:solidFill>
+                <a:latin typeface="Microsoft GothicNeo"/>
+                <a:ea typeface="Microsoft GothicNeo"/>
+                <a:cs typeface="Arial"/>
+              </a:rPr>
+              <a:t>02-</a:t>
+            </a:r>
+            <a:r>
+              <a:rPr lang="en-US" altLang="ko-KR" sz="2500" dirty="0">
+                <a:solidFill>
+                  <a:srgbClr val="747474"/>
+                </a:solidFill>
+                <a:latin typeface="Microsoft GothicNeo"/>
+                <a:ea typeface="Microsoft GothicNeo"/>
+                <a:cs typeface="Arial"/>
+              </a:rPr>
+              <a:t>4</a:t>
+            </a:r>
+            <a:r>
+              <a:rPr lang="ko-KR" altLang="en-US" sz="2500" dirty="0">
+                <a:solidFill>
+                  <a:srgbClr val="747474"/>
+                </a:solidFill>
+                <a:latin typeface="Microsoft GothicNeo"/>
+                <a:ea typeface="Microsoft GothicNeo"/>
+                <a:cs typeface="Arial"/>
+              </a:rPr>
+              <a:t> 데이터 설명 및 주요 피처 분석</a:t>
+            </a:r>
+          </a:p>
+        </p:txBody>
+      </p:sp>
+      <p:sp>
+        <p:nvSpPr>
+          <p:cNvPr id="2" name="TextBox 1">
+            <a:extLst>
+              <a:ext uri="{FF2B5EF4-FFF2-40B4-BE49-F238E27FC236}">
+                <a16:creationId xmlns:a16="http://schemas.microsoft.com/office/drawing/2014/main" id="{E4D2C1DC-C386-0764-A702-8028D39D9792}"/>
+              </a:ext>
+            </a:extLst>
+          </p:cNvPr>
+          <p:cNvSpPr txBox="1"/>
+          <p:nvPr/>
+        </p:nvSpPr>
+        <p:spPr>
+          <a:xfrm>
+            <a:off x="613833" y="941917"/>
+            <a:ext cx="10002506" cy="1972656"/>
+          </a:xfrm>
+          <a:prstGeom prst="rect">
+            <a:avLst/>
+          </a:prstGeom>
+          <a:noFill/>
+        </p:spPr>
+        <p:txBody>
+          <a:bodyPr rot="0" spcFirstLastPara="0" vertOverflow="overflow" horzOverflow="overflow" vert="horz" wrap="square" lIns="91440" tIns="45720" rIns="91440" bIns="45720" numCol="1" spcCol="0" rtlCol="0" fromWordArt="0" anchor="t" anchorCtr="0" forceAA="0" compatLnSpc="1">
+            <a:prstTxWarp prst="textNoShape">
+              <a:avLst/>
+            </a:prstTxWarp>
+            <a:spAutoFit/>
+          </a:bodyPr>
+          <a:lstStyle/>
+          <a:p>
+            <a:pPr marL="285750" indent="-285750">
+              <a:lnSpc>
+                <a:spcPct val="150000"/>
+              </a:lnSpc>
+              <a:buFont typeface="Wingdings"/>
+              <a:buChar char="q"/>
+            </a:pPr>
+            <a:r>
+              <a:rPr lang="ko-KR" altLang="en-US" dirty="0">
+                <a:latin typeface="Microsoft GothicNeo"/>
+                <a:ea typeface="Microsoft GothicNeo"/>
+                <a:cs typeface="Microsoft GothicNeo"/>
+              </a:rPr>
+              <a:t>데이터셋 및 불균형 문제 </a:t>
+            </a:r>
+          </a:p>
+          <a:p>
+            <a:pPr marL="400050" lvl="2" indent="228600">
+              <a:lnSpc>
+                <a:spcPct val="150000"/>
+              </a:lnSpc>
+              <a:buFont typeface="Wingdings,Sans-Serif"/>
+              <a:buChar char="§"/>
+            </a:pPr>
+            <a:r>
+              <a:rPr lang="ko-KR" altLang="en-US" sz="1300" dirty="0">
+                <a:latin typeface="Microsoft GothicNeo"/>
+                <a:ea typeface="Microsoft GothicNeo"/>
+                <a:cs typeface="Microsoft GothicNeo"/>
+              </a:rPr>
+              <a:t>데이터셋 </a:t>
+            </a:r>
+            <a:r>
+              <a:rPr lang="en-US" altLang="ko-KR" sz="1300" dirty="0">
+                <a:latin typeface="Microsoft GothicNeo"/>
+                <a:ea typeface="Microsoft GothicNeo"/>
+                <a:cs typeface="Microsoft GothicNeo"/>
+              </a:rPr>
+              <a:t>: </a:t>
+            </a:r>
+            <a:r>
+              <a:rPr lang="ko-KR" altLang="en-US" sz="1300" dirty="0">
+                <a:latin typeface="Microsoft GothicNeo"/>
+                <a:ea typeface="Microsoft GothicNeo"/>
+                <a:cs typeface="Microsoft GothicNeo"/>
+              </a:rPr>
+              <a:t>약 </a:t>
+            </a:r>
+            <a:r>
+              <a:rPr lang="en-US" altLang="ko-KR" sz="1300" dirty="0">
+                <a:latin typeface="Microsoft GothicNeo"/>
+                <a:ea typeface="Microsoft GothicNeo"/>
+                <a:cs typeface="Microsoft GothicNeo"/>
+              </a:rPr>
+              <a:t>7</a:t>
+            </a:r>
+            <a:r>
+              <a:rPr lang="ko-KR" altLang="en-US" sz="1300" dirty="0">
+                <a:latin typeface="Microsoft GothicNeo"/>
+                <a:ea typeface="Microsoft GothicNeo"/>
+                <a:cs typeface="Microsoft GothicNeo"/>
+              </a:rPr>
+              <a:t>만 </a:t>
+            </a:r>
+            <a:r>
+              <a:rPr lang="en-US" altLang="ko-KR" sz="1300" dirty="0">
+                <a:latin typeface="Microsoft GothicNeo"/>
+                <a:ea typeface="Microsoft GothicNeo"/>
+                <a:cs typeface="Microsoft GothicNeo"/>
+              </a:rPr>
+              <a:t>6</a:t>
+            </a:r>
+            <a:r>
+              <a:rPr lang="ko-KR" altLang="en-US" sz="1300" dirty="0">
+                <a:latin typeface="Microsoft GothicNeo"/>
+                <a:ea typeface="Microsoft GothicNeo"/>
+                <a:cs typeface="Microsoft GothicNeo"/>
+              </a:rPr>
+              <a:t>천여명 고객과 </a:t>
+            </a:r>
+            <a:r>
+              <a:rPr lang="en-US" altLang="ko-KR" sz="1300" dirty="0">
+                <a:latin typeface="Microsoft GothicNeo"/>
+                <a:ea typeface="Microsoft GothicNeo"/>
+                <a:cs typeface="Microsoft GothicNeo"/>
+              </a:rPr>
+              <a:t>371</a:t>
+            </a:r>
+            <a:r>
+              <a:rPr lang="ko-KR" altLang="en-US" sz="1300" dirty="0">
+                <a:latin typeface="Microsoft GothicNeo"/>
+                <a:ea typeface="Microsoft GothicNeo"/>
+                <a:cs typeface="Microsoft GothicNeo"/>
+              </a:rPr>
+              <a:t>개 변수 </a:t>
+            </a:r>
+            <a:r>
+              <a:rPr lang="en-US" altLang="ko-KR" sz="1300" dirty="0">
+                <a:latin typeface="Microsoft GothicNeo"/>
+                <a:ea typeface="Microsoft GothicNeo"/>
+                <a:cs typeface="Microsoft GothicNeo"/>
+              </a:rPr>
+              <a:t>(0 : </a:t>
+            </a:r>
+            <a:r>
+              <a:rPr lang="ko-KR" altLang="en-US" sz="1300" dirty="0">
+                <a:latin typeface="Microsoft GothicNeo"/>
+                <a:ea typeface="Microsoft GothicNeo"/>
+                <a:cs typeface="Microsoft GothicNeo"/>
+              </a:rPr>
+              <a:t>만족</a:t>
+            </a:r>
+            <a:r>
+              <a:rPr lang="en-US" altLang="ko-KR" sz="1300" dirty="0">
+                <a:latin typeface="Microsoft GothicNeo"/>
+                <a:ea typeface="Microsoft GothicNeo"/>
+                <a:cs typeface="Microsoft GothicNeo"/>
+              </a:rPr>
+              <a:t>, 1 : </a:t>
+            </a:r>
+            <a:r>
+              <a:rPr lang="ko-KR" altLang="en-US" sz="1300" dirty="0">
+                <a:latin typeface="Microsoft GothicNeo"/>
+                <a:ea typeface="Microsoft GothicNeo"/>
+                <a:cs typeface="Microsoft GothicNeo"/>
+              </a:rPr>
+              <a:t>불만족</a:t>
+            </a:r>
+            <a:r>
+              <a:rPr lang="en-US" altLang="ko-KR" sz="1300" dirty="0">
+                <a:latin typeface="Microsoft GothicNeo"/>
+                <a:ea typeface="Microsoft GothicNeo"/>
+                <a:cs typeface="Microsoft GothicNeo"/>
+              </a:rPr>
+              <a:t>)</a:t>
+            </a:r>
+          </a:p>
+          <a:p>
+            <a:pPr marL="400050" lvl="2" indent="228600">
+              <a:lnSpc>
+                <a:spcPct val="150000"/>
+              </a:lnSpc>
+              <a:buFont typeface="Wingdings,Sans-Serif"/>
+              <a:buChar char="§"/>
+            </a:pPr>
+            <a:r>
+              <a:rPr lang="ko-KR" altLang="en-US" sz="1300" dirty="0">
+                <a:latin typeface="Microsoft GothicNeo"/>
+                <a:ea typeface="Microsoft GothicNeo"/>
+                <a:cs typeface="Microsoft GothicNeo"/>
+              </a:rPr>
+              <a:t>모든 변수명이 개인정보 보호를 위해 암호화 되어있음</a:t>
+            </a:r>
+            <a:endParaRPr lang="ko-KR" sz="1300" dirty="0">
+              <a:latin typeface="Microsoft GothicNeo"/>
+              <a:ea typeface="Microsoft GothicNeo"/>
+              <a:cs typeface="Microsoft GothicNeo"/>
+            </a:endParaRPr>
+          </a:p>
+          <a:p>
+            <a:pPr marL="400050" lvl="2" indent="228600">
+              <a:lnSpc>
+                <a:spcPct val="150000"/>
+              </a:lnSpc>
+              <a:buFont typeface="Wingdings"/>
+              <a:buChar char="§"/>
+            </a:pPr>
+            <a:r>
+              <a:rPr lang="ko-KR" altLang="en-US" sz="1300" dirty="0">
+                <a:latin typeface="Microsoft GothicNeo"/>
+                <a:ea typeface="Microsoft GothicNeo"/>
+                <a:cs typeface="Microsoft GothicNeo"/>
+              </a:rPr>
+              <a:t>불만족 고객은 소수</a:t>
+            </a:r>
+            <a:r>
+              <a:rPr lang="en-US" altLang="ko-KR" sz="1300" dirty="0">
+                <a:latin typeface="Microsoft GothicNeo"/>
+                <a:ea typeface="Microsoft GothicNeo"/>
+                <a:cs typeface="Microsoft GothicNeo"/>
+              </a:rPr>
+              <a:t>(</a:t>
+            </a:r>
+            <a:r>
+              <a:rPr lang="ko-KR" altLang="en-US" sz="1300" dirty="0">
+                <a:latin typeface="Microsoft GothicNeo"/>
+                <a:ea typeface="Microsoft GothicNeo"/>
+                <a:cs typeface="Microsoft GothicNeo"/>
+              </a:rPr>
+              <a:t>약 </a:t>
+            </a:r>
+            <a:r>
+              <a:rPr lang="en-US" altLang="ko-KR" sz="1300" dirty="0">
+                <a:latin typeface="Microsoft GothicNeo"/>
+                <a:ea typeface="Microsoft GothicNeo"/>
+                <a:cs typeface="Microsoft GothicNeo"/>
+              </a:rPr>
+              <a:t>4%)</a:t>
+            </a:r>
+            <a:r>
+              <a:rPr lang="ko-KR" altLang="en-US" sz="1300" dirty="0">
+                <a:latin typeface="Microsoft GothicNeo"/>
+                <a:ea typeface="Microsoft GothicNeo"/>
+                <a:cs typeface="Microsoft GothicNeo"/>
+              </a:rPr>
+              <a:t>로 데이터 불균형 존재</a:t>
+            </a:r>
+            <a:endParaRPr lang="ko-KR" altLang="en-US" sz="1300" b="1" dirty="0">
+              <a:solidFill>
+                <a:srgbClr val="C00000"/>
+              </a:solidFill>
+              <a:latin typeface="Microsoft GothicNeo"/>
+              <a:ea typeface="Microsoft GothicNeo"/>
+              <a:cs typeface="Microsoft GothicNeo"/>
+            </a:endParaRPr>
+          </a:p>
+          <a:p>
+            <a:pPr marL="800100" lvl="3" indent="-228600">
+              <a:lnSpc>
+                <a:spcPct val="150000"/>
+              </a:lnSpc>
+              <a:buFont typeface="Calibri"/>
+              <a:buChar char="-"/>
+            </a:pPr>
+            <a:r>
+              <a:rPr lang="en-US" altLang="ko-KR" sz="1300" dirty="0">
+                <a:latin typeface="Microsoft GothicNeo"/>
+                <a:ea typeface="Microsoft GothicNeo"/>
+                <a:cs typeface="Microsoft GothicNeo"/>
+              </a:rPr>
+              <a:t>(</a:t>
+            </a:r>
+            <a:r>
+              <a:rPr lang="ko-KR" altLang="en-US" sz="1300" dirty="0" err="1">
+                <a:latin typeface="Microsoft GothicNeo"/>
+                <a:ea typeface="Microsoft GothicNeo"/>
+                <a:cs typeface="Microsoft GothicNeo"/>
+              </a:rPr>
+              <a:t>피처명</a:t>
+            </a:r>
+            <a:r>
+              <a:rPr lang="en-US" altLang="ko-KR" sz="1300" dirty="0">
+                <a:latin typeface="Microsoft GothicNeo"/>
+                <a:ea typeface="Microsoft GothicNeo"/>
+                <a:cs typeface="Microsoft GothicNeo"/>
+              </a:rPr>
+              <a:t>) ID : </a:t>
+            </a:r>
+            <a:r>
+              <a:rPr lang="ko-KR" altLang="en-US" sz="1300" dirty="0">
+                <a:latin typeface="Microsoft GothicNeo"/>
+                <a:ea typeface="Microsoft GothicNeo"/>
+                <a:cs typeface="Microsoft GothicNeo"/>
+              </a:rPr>
+              <a:t>고객 고유 식별 번호</a:t>
+            </a:r>
+            <a:r>
+              <a:rPr lang="en-US" altLang="ko-KR" sz="1300" dirty="0">
+                <a:latin typeface="Microsoft GothicNeo"/>
+                <a:ea typeface="Microsoft GothicNeo"/>
+                <a:cs typeface="Microsoft GothicNeo"/>
+              </a:rPr>
+              <a:t>, var3 : </a:t>
+            </a:r>
+            <a:r>
+              <a:rPr lang="ko-KR" altLang="en-US" sz="1300" dirty="0">
+                <a:latin typeface="Microsoft GothicNeo"/>
+                <a:ea typeface="Microsoft GothicNeo"/>
+                <a:cs typeface="Microsoft GothicNeo"/>
+              </a:rPr>
+              <a:t>고객 나이 또는 계좌개설 후 경과 </a:t>
+            </a:r>
+            <a:r>
+              <a:rPr lang="ko-KR" altLang="en-US" sz="1300" dirty="0" err="1">
+                <a:latin typeface="Microsoft GothicNeo"/>
+                <a:ea typeface="Microsoft GothicNeo"/>
+                <a:cs typeface="Microsoft GothicNeo"/>
+              </a:rPr>
+              <a:t>개월수</a:t>
+            </a:r>
+            <a:r>
+              <a:rPr lang="en-US" altLang="ko-KR" sz="1300" dirty="0">
+                <a:latin typeface="Microsoft GothicNeo"/>
+                <a:ea typeface="Microsoft GothicNeo"/>
+                <a:cs typeface="Microsoft GothicNeo"/>
+              </a:rPr>
+              <a:t>, var15 : </a:t>
+            </a:r>
+            <a:r>
+              <a:rPr lang="ko-KR" altLang="en-US" sz="1300" dirty="0">
+                <a:latin typeface="Microsoft GothicNeo"/>
+                <a:ea typeface="Microsoft GothicNeo"/>
+                <a:cs typeface="Microsoft GothicNeo"/>
+              </a:rPr>
+              <a:t>고객 연령대</a:t>
+            </a:r>
+            <a:endParaRPr lang="en-US" altLang="ko-KR" sz="1300" dirty="0">
+              <a:latin typeface="Microsoft GothicNeo"/>
+              <a:ea typeface="Microsoft GothicNeo"/>
+              <a:cs typeface="Microsoft GothicNeo"/>
+            </a:endParaRPr>
+          </a:p>
+          <a:p>
+            <a:pPr marL="800100" lvl="3" indent="-228600">
+              <a:lnSpc>
+                <a:spcPct val="150000"/>
+              </a:lnSpc>
+              <a:buFont typeface="Calibri"/>
+              <a:buChar char="-"/>
+            </a:pPr>
+            <a:r>
+              <a:rPr lang="en-US" altLang="ko-KR" sz="1300" dirty="0">
+                <a:solidFill>
+                  <a:srgbClr val="C00000"/>
+                </a:solidFill>
+                <a:latin typeface="Microsoft GothicNeo"/>
+                <a:ea typeface="Microsoft GothicNeo"/>
+                <a:cs typeface="Microsoft GothicNeo"/>
+              </a:rPr>
+              <a:t>var3 </a:t>
+            </a:r>
+            <a:r>
+              <a:rPr lang="ko-KR" altLang="en-US" sz="1300" dirty="0">
+                <a:solidFill>
+                  <a:srgbClr val="C00000"/>
+                </a:solidFill>
+                <a:latin typeface="Microsoft GothicNeo"/>
+                <a:ea typeface="Microsoft GothicNeo"/>
+                <a:cs typeface="Microsoft GothicNeo"/>
+              </a:rPr>
+              <a:t>중 </a:t>
+            </a:r>
+            <a:r>
+              <a:rPr lang="en-US" altLang="ko-KR" sz="1300" dirty="0">
+                <a:solidFill>
+                  <a:srgbClr val="C00000"/>
+                </a:solidFill>
+                <a:latin typeface="Microsoft GothicNeo"/>
+                <a:ea typeface="Microsoft GothicNeo"/>
+                <a:cs typeface="Microsoft GothicNeo"/>
+              </a:rPr>
+              <a:t>-99999 </a:t>
+            </a:r>
+            <a:r>
+              <a:rPr lang="ko-KR" altLang="en-US" sz="1300" dirty="0">
+                <a:solidFill>
+                  <a:srgbClr val="C00000"/>
+                </a:solidFill>
+                <a:latin typeface="Microsoft GothicNeo"/>
+                <a:ea typeface="Microsoft GothicNeo"/>
+                <a:cs typeface="Microsoft GothicNeo"/>
+              </a:rPr>
+              <a:t>는</a:t>
+            </a:r>
+            <a:r>
+              <a:rPr lang="en-US" altLang="ko-KR" sz="1300" dirty="0">
+                <a:solidFill>
+                  <a:srgbClr val="C00000"/>
+                </a:solidFill>
+                <a:latin typeface="Microsoft GothicNeo"/>
+                <a:ea typeface="Microsoft GothicNeo"/>
+                <a:cs typeface="Microsoft GothicNeo"/>
+              </a:rPr>
+              <a:t> </a:t>
+            </a:r>
+            <a:r>
+              <a:rPr lang="ko-KR" altLang="en-US" sz="1300" dirty="0">
+                <a:solidFill>
+                  <a:srgbClr val="C00000"/>
+                </a:solidFill>
+                <a:latin typeface="Microsoft GothicNeo"/>
+                <a:ea typeface="Microsoft GothicNeo"/>
+                <a:cs typeface="Microsoft GothicNeo"/>
+              </a:rPr>
+              <a:t>명시적 </a:t>
+            </a:r>
+            <a:r>
+              <a:rPr lang="ko-KR" altLang="en-US" sz="1300" dirty="0" err="1">
+                <a:solidFill>
+                  <a:srgbClr val="C00000"/>
+                </a:solidFill>
+                <a:latin typeface="Microsoft GothicNeo"/>
+                <a:ea typeface="Microsoft GothicNeo"/>
+                <a:cs typeface="Microsoft GothicNeo"/>
+              </a:rPr>
+              <a:t>결측치</a:t>
+            </a:r>
+            <a:r>
+              <a:rPr lang="en-US" altLang="ko-KR" sz="1300" dirty="0">
+                <a:solidFill>
+                  <a:srgbClr val="C00000"/>
+                </a:solidFill>
+                <a:latin typeface="Microsoft GothicNeo"/>
+                <a:ea typeface="Microsoft GothicNeo"/>
+                <a:cs typeface="Microsoft GothicNeo"/>
+              </a:rPr>
+              <a:t> </a:t>
+            </a:r>
+            <a:endParaRPr lang="ko-KR" altLang="en-US" sz="1300" dirty="0">
+              <a:solidFill>
+                <a:srgbClr val="C00000"/>
+              </a:solidFill>
+              <a:latin typeface="Microsoft GothicNeo"/>
+              <a:ea typeface="Microsoft GothicNeo"/>
+              <a:cs typeface="Microsoft GothicNeo"/>
+            </a:endParaRPr>
+          </a:p>
+        </p:txBody>
+      </p:sp>
+      <p:sp>
+        <p:nvSpPr>
+          <p:cNvPr id="4" name="직사각형 3">
+            <a:extLst>
+              <a:ext uri="{FF2B5EF4-FFF2-40B4-BE49-F238E27FC236}">
+                <a16:creationId xmlns:a16="http://schemas.microsoft.com/office/drawing/2014/main" id="{5FAC4970-946B-8EB6-1F15-E2FB74A2DE69}"/>
+              </a:ext>
+            </a:extLst>
+          </p:cNvPr>
+          <p:cNvSpPr/>
+          <p:nvPr/>
+        </p:nvSpPr>
+        <p:spPr>
+          <a:xfrm>
+            <a:off x="444500" y="1026583"/>
+            <a:ext cx="63499" cy="1291166"/>
+          </a:xfrm>
+          <a:prstGeom prst="rect">
+            <a:avLst/>
+          </a:prstGeom>
+          <a:solidFill>
+            <a:srgbClr val="C00000"/>
+          </a:solidFill>
+          <a:ln>
+            <a:noFill/>
+          </a:ln>
+        </p:spPr>
+        <p:style>
+          <a:lnRef idx="2">
+            <a:schemeClr val="accent1">
+              <a:shade val="15000"/>
+            </a:schemeClr>
+          </a:lnRef>
+          <a:fillRef idx="1">
+            <a:schemeClr val="accent1"/>
+          </a:fillRef>
+          <a:effectRef idx="0">
+            <a:schemeClr val="accent1"/>
+          </a:effectRef>
+          <a:fontRef idx="minor">
+            <a:schemeClr val="lt1"/>
+          </a:fontRef>
+        </p:style>
+        <p:txBody>
+          <a:bodyPr rtlCol="0" anchor="ctr"/>
+          <a:lstStyle/>
+          <a:p>
+            <a:pPr algn="ctr"/>
+            <a:endParaRPr lang="ko-KR" altLang="en-US"/>
+          </a:p>
+        </p:txBody>
+      </p:sp>
+      <p:pic>
+        <p:nvPicPr>
+          <p:cNvPr id="6" name="그림 5" descr="File:Santander Logo.PNG - Wikimedia Commons">
+            <a:extLst>
+              <a:ext uri="{FF2B5EF4-FFF2-40B4-BE49-F238E27FC236}">
+                <a16:creationId xmlns:a16="http://schemas.microsoft.com/office/drawing/2014/main" id="{C4E4E96E-79EB-B89C-DB5F-158D886E06B7}"/>
+              </a:ext>
+            </a:extLst>
+          </p:cNvPr>
+          <p:cNvPicPr>
+            <a:picLocks noChangeAspect="1"/>
+          </p:cNvPicPr>
+          <p:nvPr/>
+        </p:nvPicPr>
+        <p:blipFill>
+          <a:blip r:embed="rId2"/>
+          <a:stretch>
+            <a:fillRect/>
+          </a:stretch>
+        </p:blipFill>
+        <p:spPr>
+          <a:xfrm>
+            <a:off x="2" y="5771641"/>
+            <a:ext cx="2901462" cy="1088332"/>
+          </a:xfrm>
+          <a:prstGeom prst="rect">
+            <a:avLst/>
+          </a:prstGeom>
+        </p:spPr>
+      </p:pic>
+      <p:pic>
+        <p:nvPicPr>
+          <p:cNvPr id="3" name="그림 2">
+            <a:extLst>
+              <a:ext uri="{FF2B5EF4-FFF2-40B4-BE49-F238E27FC236}">
+                <a16:creationId xmlns:a16="http://schemas.microsoft.com/office/drawing/2014/main" id="{82EF3BDC-A822-2C49-8226-A58AF1A1317D}"/>
+              </a:ext>
+            </a:extLst>
+          </p:cNvPr>
+          <p:cNvPicPr>
+            <a:picLocks noChangeAspect="1"/>
+          </p:cNvPicPr>
+          <p:nvPr/>
+        </p:nvPicPr>
+        <p:blipFill>
+          <a:blip r:embed="rId3">
+            <a:extLst>
+              <a:ext uri="{28A0092B-C50C-407E-A947-70E740481C1C}">
+                <a14:useLocalDpi xmlns:a14="http://schemas.microsoft.com/office/drawing/2010/main" val="0"/>
+              </a:ext>
+            </a:extLst>
+          </a:blip>
+          <a:srcRect/>
+          <a:stretch>
+            <a:fillRect/>
+          </a:stretch>
+        </p:blipFill>
+        <p:spPr bwMode="auto">
+          <a:xfrm>
+            <a:off x="2343230" y="3350170"/>
+            <a:ext cx="6543712" cy="2869122"/>
+          </a:xfrm>
+          <a:prstGeom prst="rect">
+            <a:avLst/>
+          </a:prstGeom>
+          <a:noFill/>
+        </p:spPr>
+      </p:pic>
+      <p:sp>
+        <p:nvSpPr>
+          <p:cNvPr id="9" name="TextBox 8">
+            <a:extLst>
+              <a:ext uri="{FF2B5EF4-FFF2-40B4-BE49-F238E27FC236}">
+                <a16:creationId xmlns:a16="http://schemas.microsoft.com/office/drawing/2014/main" id="{8892466F-BBC6-478A-096F-8529197E97E3}"/>
+              </a:ext>
+            </a:extLst>
+          </p:cNvPr>
+          <p:cNvSpPr txBox="1"/>
+          <p:nvPr/>
+        </p:nvSpPr>
+        <p:spPr>
+          <a:xfrm>
+            <a:off x="1904186" y="3054427"/>
+            <a:ext cx="8383627" cy="261610"/>
+          </a:xfrm>
+          <a:prstGeom prst="rect">
+            <a:avLst/>
+          </a:prstGeom>
+          <a:noFill/>
+        </p:spPr>
+        <p:txBody>
+          <a:bodyPr rot="0" spcFirstLastPara="0" vertOverflow="overflow" horzOverflow="overflow" vert="horz" wrap="square" lIns="91440" tIns="45720" rIns="91440" bIns="45720" numCol="1" spcCol="0" rtlCol="0" fromWordArt="0" anchor="t" anchorCtr="0" forceAA="0" compatLnSpc="1">
+            <a:prstTxWarp prst="textNoShape">
+              <a:avLst/>
+            </a:prstTxWarp>
+            <a:spAutoFit/>
+          </a:bodyPr>
+          <a:lstStyle/>
+          <a:p>
+            <a:pPr algn="ctr"/>
+            <a:r>
+              <a:rPr lang="ko-KR" altLang="en-US" sz="1100" dirty="0">
+                <a:latin typeface="Microsoft GothicNeo"/>
+                <a:ea typeface="Microsoft GothicNeo"/>
+                <a:cs typeface="Microsoft GothicNeo"/>
+              </a:rPr>
+              <a:t>[ 그림 2.</a:t>
+            </a:r>
+            <a:r>
+              <a:rPr lang="en-US" altLang="ko-KR" sz="1100" dirty="0">
+                <a:latin typeface="Microsoft GothicNeo"/>
+                <a:ea typeface="Microsoft GothicNeo"/>
+                <a:cs typeface="Microsoft GothicNeo"/>
+              </a:rPr>
+              <a:t>4</a:t>
+            </a:r>
+            <a:r>
+              <a:rPr lang="ko-KR" altLang="en-US" sz="1100" dirty="0">
+                <a:latin typeface="Microsoft GothicNeo"/>
+                <a:ea typeface="Microsoft GothicNeo"/>
+                <a:cs typeface="Microsoft GothicNeo"/>
+              </a:rPr>
+              <a:t> </a:t>
+            </a:r>
+            <a:r>
+              <a:rPr lang="ko-KR" altLang="en-US" sz="1100" dirty="0" err="1">
+                <a:latin typeface="Microsoft GothicNeo"/>
+                <a:ea typeface="Microsoft GothicNeo"/>
+                <a:cs typeface="Microsoft GothicNeo"/>
+              </a:rPr>
+              <a:t>산탄데르</a:t>
+            </a:r>
+            <a:r>
+              <a:rPr lang="ko-KR" altLang="en-US" sz="1100" dirty="0">
+                <a:latin typeface="Microsoft GothicNeo"/>
+                <a:ea typeface="Microsoft GothicNeo"/>
+                <a:cs typeface="Microsoft GothicNeo"/>
+              </a:rPr>
+              <a:t> 데이터셋</a:t>
+            </a:r>
+            <a:r>
+              <a:rPr lang="en-US" altLang="ko-KR" sz="1100" dirty="0">
+                <a:latin typeface="Microsoft GothicNeo"/>
+                <a:ea typeface="Microsoft GothicNeo"/>
+                <a:cs typeface="Microsoft GothicNeo"/>
+              </a:rPr>
+              <a:t> TARGET(</a:t>
+            </a:r>
+            <a:r>
+              <a:rPr lang="ko-KR" altLang="en-US" sz="1100" dirty="0">
+                <a:latin typeface="Microsoft GothicNeo"/>
+                <a:ea typeface="Microsoft GothicNeo"/>
+                <a:cs typeface="Microsoft GothicNeo"/>
+              </a:rPr>
+              <a:t>레이블</a:t>
+            </a:r>
+            <a:r>
+              <a:rPr lang="en-US" altLang="ko-KR" sz="1100" dirty="0">
+                <a:latin typeface="Microsoft GothicNeo"/>
+                <a:ea typeface="Microsoft GothicNeo"/>
+                <a:cs typeface="Microsoft GothicNeo"/>
+              </a:rPr>
+              <a:t>) </a:t>
+            </a:r>
+            <a:r>
+              <a:rPr lang="ko-KR" altLang="en-US" sz="1100" dirty="0">
+                <a:latin typeface="Microsoft GothicNeo"/>
+                <a:ea typeface="Microsoft GothicNeo"/>
+                <a:cs typeface="Microsoft GothicNeo"/>
+              </a:rPr>
+              <a:t>분포 시각화</a:t>
+            </a:r>
+            <a:r>
+              <a:rPr lang="en-US" altLang="ko-KR" sz="1100" dirty="0">
+                <a:latin typeface="Microsoft GothicNeo"/>
+                <a:ea typeface="Microsoft GothicNeo"/>
+                <a:cs typeface="Microsoft GothicNeo"/>
+              </a:rPr>
+              <a:t> </a:t>
+            </a:r>
+            <a:r>
+              <a:rPr lang="ko-KR" altLang="en-US" sz="1100" dirty="0">
+                <a:latin typeface="Microsoft GothicNeo"/>
+                <a:ea typeface="Microsoft GothicNeo"/>
+                <a:cs typeface="Microsoft GothicNeo"/>
+              </a:rPr>
+              <a:t>]</a:t>
+            </a:r>
+          </a:p>
+        </p:txBody>
+      </p:sp>
+    </p:spTree>
+    <p:extLst>
+      <p:ext uri="{BB962C8B-B14F-4D97-AF65-F5344CB8AC3E}">
+        <p14:creationId xmlns:p14="http://schemas.microsoft.com/office/powerpoint/2010/main" val="4266050479"/>
+      </p:ext>
+    </p:extLst>
+  </p:cSld>
+  <p:clrMapOvr>
+    <a:masterClrMapping/>
+  </p:clrMapOvr>
+</p:sld>
+</file>
+
+<file path=ppt/slides/slide6.xml><?xml version="1.0" encoding="utf-8"?>
+<p:sld xmlns:a="http://schemas.openxmlformats.org/drawingml/2006/main" xmlns:r="http://schemas.openxmlformats.org/officeDocument/2006/relationships" xmlns:p="http://schemas.openxmlformats.org/presentationml/2006/main">
+  <p:cSld>
+    <p:spTree>
+      <p:nvGrpSpPr>
+        <p:cNvPr id="1" name="">
+          <a:extLst>
+            <a:ext uri="{FF2B5EF4-FFF2-40B4-BE49-F238E27FC236}">
+              <a16:creationId xmlns:a16="http://schemas.microsoft.com/office/drawing/2014/main" id="{D1891A01-40C2-C4D8-D629-D6E4963A63EF}"/>
+            </a:ext>
+          </a:extLst>
+        </p:cNvPr>
+        <p:cNvGrpSpPr/>
+        <p:nvPr/>
+      </p:nvGrpSpPr>
+      <p:grpSpPr>
+        <a:xfrm>
+          <a:off x="0" y="0"/>
+          <a:ext cx="0" cy="0"/>
+          <a:chOff x="0" y="0"/>
+          <a:chExt cx="0" cy="0"/>
+        </a:xfrm>
+      </p:grpSpPr>
+      <p:sp>
+        <p:nvSpPr>
+          <p:cNvPr id="5" name="직사각형 4">
+            <a:extLst>
+              <a:ext uri="{FF2B5EF4-FFF2-40B4-BE49-F238E27FC236}">
+                <a16:creationId xmlns:a16="http://schemas.microsoft.com/office/drawing/2014/main" id="{E65A27B8-CC1B-572D-0B71-E756AF575F72}"/>
+              </a:ext>
+            </a:extLst>
+          </p:cNvPr>
+          <p:cNvSpPr/>
+          <p:nvPr/>
+        </p:nvSpPr>
+        <p:spPr>
+          <a:xfrm>
+            <a:off x="-169334" y="0"/>
+            <a:ext cx="12848166" cy="656167"/>
+          </a:xfrm>
+          <a:prstGeom prst="rect">
+            <a:avLst/>
+          </a:prstGeom>
+          <a:solidFill>
+            <a:schemeClr val="bg1">
+              <a:lumMod val="95000"/>
+            </a:schemeClr>
+          </a:solidFill>
+          <a:ln>
+            <a:noFill/>
+          </a:ln>
+        </p:spPr>
+        <p:style>
+          <a:lnRef idx="2">
+            <a:schemeClr val="accent1">
+              <a:shade val="15000"/>
+            </a:schemeClr>
+          </a:lnRef>
+          <a:fillRef idx="1">
+            <a:schemeClr val="accent1"/>
+          </a:fillRef>
+          <a:effectRef idx="0">
+            <a:schemeClr val="accent1"/>
+          </a:effectRef>
+          <a:fontRef idx="minor">
+            <a:schemeClr val="lt1"/>
+          </a:fontRef>
+        </p:style>
+        <p:txBody>
+          <a:bodyPr rtlCol="0" anchor="ctr"/>
+          <a:lstStyle/>
+          <a:p>
+            <a:pPr algn="ctr"/>
+            <a:endParaRPr lang="ko-KR" altLang="en-US"/>
+          </a:p>
+        </p:txBody>
+      </p:sp>
+      <p:sp>
+        <p:nvSpPr>
+          <p:cNvPr id="7" name="TextBox 6">
+            <a:extLst>
+              <a:ext uri="{FF2B5EF4-FFF2-40B4-BE49-F238E27FC236}">
+                <a16:creationId xmlns:a16="http://schemas.microsoft.com/office/drawing/2014/main" id="{9AEE2589-F7B1-0900-39C1-27CE30704AA8}"/>
+              </a:ext>
+            </a:extLst>
+          </p:cNvPr>
+          <p:cNvSpPr txBox="1"/>
+          <p:nvPr/>
+        </p:nvSpPr>
+        <p:spPr>
+          <a:xfrm>
+            <a:off x="-2" y="179916"/>
+            <a:ext cx="7217832" cy="477054"/>
+          </a:xfrm>
+          <a:prstGeom prst="rect">
+            <a:avLst/>
+          </a:prstGeom>
+          <a:noFill/>
+          <a:ln>
+            <a:noFill/>
+          </a:ln>
+        </p:spPr>
+        <p:txBody>
+          <a:bodyPr rot="0" spcFirstLastPara="0" vertOverflow="overflow" horzOverflow="overflow" vert="horz" wrap="square" lIns="91440" tIns="45720" rIns="91440" bIns="45720" numCol="1" spcCol="0" rtlCol="0" fromWordArt="0" anchor="t" anchorCtr="0" forceAA="0" compatLnSpc="1">
+            <a:prstTxWarp prst="textNoShape">
+              <a:avLst/>
+            </a:prstTxWarp>
+            <a:spAutoFit/>
+          </a:bodyPr>
+          <a:lstStyle/>
+          <a:p>
+            <a:r>
+              <a:rPr lang="ko-KR" altLang="en-US" sz="2500" dirty="0">
+                <a:solidFill>
+                  <a:srgbClr val="747474"/>
+                </a:solidFill>
+                <a:latin typeface="Microsoft GothicNeo"/>
+                <a:ea typeface="Microsoft GothicNeo"/>
+                <a:cs typeface="Arial"/>
+              </a:rPr>
+              <a:t>02-</a:t>
+            </a:r>
+            <a:r>
+              <a:rPr lang="en-US" altLang="ko-KR" sz="2500" dirty="0">
+                <a:solidFill>
+                  <a:srgbClr val="747474"/>
+                </a:solidFill>
+                <a:latin typeface="Microsoft GothicNeo"/>
+                <a:ea typeface="Microsoft GothicNeo"/>
+                <a:cs typeface="Arial"/>
+              </a:rPr>
+              <a:t>4</a:t>
+            </a:r>
+            <a:r>
+              <a:rPr lang="ko-KR" altLang="en-US" sz="2500" dirty="0">
+                <a:solidFill>
+                  <a:srgbClr val="747474"/>
+                </a:solidFill>
+                <a:latin typeface="Microsoft GothicNeo"/>
+                <a:ea typeface="Microsoft GothicNeo"/>
+                <a:cs typeface="Arial"/>
+              </a:rPr>
+              <a:t> 데이터 설명 및 주요 피처 분석</a:t>
+            </a:r>
+          </a:p>
+        </p:txBody>
+      </p:sp>
+      <p:sp>
+        <p:nvSpPr>
+          <p:cNvPr id="2" name="TextBox 1">
+            <a:extLst>
+              <a:ext uri="{FF2B5EF4-FFF2-40B4-BE49-F238E27FC236}">
+                <a16:creationId xmlns:a16="http://schemas.microsoft.com/office/drawing/2014/main" id="{33C3CC56-F51A-E070-9090-7C55394FA1B1}"/>
+              </a:ext>
+            </a:extLst>
+          </p:cNvPr>
+          <p:cNvSpPr txBox="1"/>
+          <p:nvPr/>
+        </p:nvSpPr>
+        <p:spPr>
+          <a:xfrm>
+            <a:off x="613833" y="941917"/>
+            <a:ext cx="10002506" cy="2183162"/>
+          </a:xfrm>
+          <a:prstGeom prst="rect">
+            <a:avLst/>
+          </a:prstGeom>
+          <a:noFill/>
+        </p:spPr>
+        <p:txBody>
+          <a:bodyPr rot="0" spcFirstLastPara="0" vertOverflow="overflow" horzOverflow="overflow" vert="horz" wrap="square" lIns="91440" tIns="45720" rIns="91440" bIns="45720" numCol="1" spcCol="0" rtlCol="0" fromWordArt="0" anchor="t" anchorCtr="0" forceAA="0" compatLnSpc="1">
+            <a:prstTxWarp prst="textNoShape">
+              <a:avLst/>
+            </a:prstTxWarp>
+            <a:spAutoFit/>
+          </a:bodyPr>
+          <a:lstStyle/>
+          <a:p>
+            <a:pPr marL="285750" indent="-285750">
+              <a:lnSpc>
+                <a:spcPct val="150000"/>
+              </a:lnSpc>
+              <a:buFont typeface="Wingdings"/>
+              <a:buChar char="q"/>
+            </a:pPr>
+            <a:r>
+              <a:rPr lang="ko-KR" altLang="en-US" dirty="0">
+                <a:latin typeface="Microsoft GothicNeo"/>
+                <a:ea typeface="Microsoft GothicNeo"/>
+                <a:cs typeface="Microsoft GothicNeo"/>
+              </a:rPr>
+              <a:t>불균형 데이터셋 에서의 </a:t>
+            </a:r>
+            <a:r>
+              <a:rPr lang="en-US" altLang="ko-KR" dirty="0">
+                <a:latin typeface="Microsoft GothicNeo"/>
+                <a:ea typeface="Microsoft GothicNeo"/>
+                <a:cs typeface="Microsoft GothicNeo"/>
+              </a:rPr>
+              <a:t>ROC-AUC</a:t>
+            </a:r>
+            <a:r>
+              <a:rPr lang="ko-KR" altLang="en-US" dirty="0">
+                <a:latin typeface="Microsoft GothicNeo"/>
+                <a:ea typeface="Microsoft GothicNeo"/>
+                <a:cs typeface="Microsoft GothicNeo"/>
+              </a:rPr>
+              <a:t> </a:t>
+            </a:r>
+          </a:p>
+          <a:p>
+            <a:pPr marL="400050" lvl="2" indent="228600">
+              <a:lnSpc>
+                <a:spcPct val="150000"/>
+              </a:lnSpc>
+              <a:buFont typeface="Wingdings,Sans-Serif"/>
+              <a:buChar char="§"/>
+            </a:pPr>
+            <a:r>
+              <a:rPr lang="ko-KR" altLang="en-US" sz="1300" dirty="0">
+                <a:latin typeface="Microsoft GothicNeo"/>
+                <a:ea typeface="Microsoft GothicNeo"/>
+                <a:cs typeface="Microsoft GothicNeo"/>
+              </a:rPr>
+              <a:t>극심한 불균형 데이터셋에서의 정확도</a:t>
+            </a:r>
+            <a:r>
+              <a:rPr lang="en-US" altLang="ko-KR" sz="1300" dirty="0">
+                <a:latin typeface="Microsoft GothicNeo"/>
+                <a:ea typeface="Microsoft GothicNeo"/>
+                <a:cs typeface="Microsoft GothicNeo"/>
+              </a:rPr>
+              <a:t>(Accuracy)</a:t>
+            </a:r>
+            <a:r>
+              <a:rPr lang="ko-KR" altLang="en-US" sz="1300" dirty="0">
+                <a:latin typeface="Microsoft GothicNeo"/>
+                <a:ea typeface="Microsoft GothicNeo"/>
+                <a:cs typeface="Microsoft GothicNeo"/>
+              </a:rPr>
+              <a:t>의 한계점 존재</a:t>
+            </a:r>
+            <a:endParaRPr lang="en-US" altLang="ko-KR" sz="1300" dirty="0">
+              <a:latin typeface="Microsoft GothicNeo"/>
+              <a:ea typeface="Microsoft GothicNeo"/>
+              <a:cs typeface="Microsoft GothicNeo"/>
+            </a:endParaRPr>
+          </a:p>
+          <a:p>
+            <a:pPr marL="400050" lvl="2" indent="228600">
+              <a:lnSpc>
+                <a:spcPct val="150000"/>
+              </a:lnSpc>
+              <a:buFont typeface="Wingdings,Sans-Serif"/>
+              <a:buChar char="§"/>
+            </a:pPr>
+            <a:r>
+              <a:rPr lang="ko-KR" altLang="en-US" sz="1300" dirty="0">
+                <a:latin typeface="Microsoft GothicNeo"/>
+                <a:ea typeface="Microsoft GothicNeo"/>
+                <a:cs typeface="Microsoft GothicNeo"/>
+              </a:rPr>
+              <a:t>모델의 분류 성능을 시각적으로 확인</a:t>
+            </a:r>
+            <a:endParaRPr lang="ko-KR" altLang="en-US" sz="1300" b="1" dirty="0">
+              <a:solidFill>
+                <a:srgbClr val="C00000"/>
+              </a:solidFill>
+              <a:latin typeface="Microsoft GothicNeo"/>
+              <a:ea typeface="Microsoft GothicNeo"/>
+              <a:cs typeface="Microsoft GothicNeo"/>
+            </a:endParaRPr>
+          </a:p>
+          <a:p>
+            <a:pPr marL="800100" lvl="3" indent="-228600">
+              <a:lnSpc>
+                <a:spcPct val="150000"/>
+              </a:lnSpc>
+              <a:buFont typeface="Calibri"/>
+              <a:buChar char="-"/>
+            </a:pPr>
+            <a:r>
+              <a:rPr lang="en-US" altLang="ko-KR" sz="1200" dirty="0">
+                <a:latin typeface="Microsoft GothicNeo"/>
+                <a:ea typeface="Microsoft GothicNeo"/>
+                <a:cs typeface="Microsoft GothicNeo"/>
+              </a:rPr>
+              <a:t>X</a:t>
+            </a:r>
+            <a:r>
+              <a:rPr lang="ko-KR" altLang="en-US" sz="1200" dirty="0">
+                <a:latin typeface="Microsoft GothicNeo"/>
+                <a:ea typeface="Microsoft GothicNeo"/>
+                <a:cs typeface="Microsoft GothicNeo"/>
+              </a:rPr>
+              <a:t>축 </a:t>
+            </a:r>
+            <a:r>
+              <a:rPr lang="en-US" altLang="ko-KR" sz="1200" dirty="0">
+                <a:latin typeface="Microsoft GothicNeo"/>
+                <a:ea typeface="Microsoft GothicNeo"/>
+                <a:cs typeface="Microsoft GothicNeo"/>
+              </a:rPr>
+              <a:t>: (FPR) </a:t>
+            </a:r>
+            <a:r>
+              <a:rPr lang="ko-KR" altLang="en-US" sz="1200" dirty="0">
+                <a:latin typeface="Microsoft GothicNeo"/>
+                <a:ea typeface="Microsoft GothicNeo"/>
+                <a:cs typeface="Microsoft GothicNeo"/>
+              </a:rPr>
+              <a:t>실제 만족 고객인데 불만족으로 잘못 분류한 비율</a:t>
+            </a:r>
+            <a:endParaRPr lang="en-US" altLang="ko-KR" sz="1200" dirty="0">
+              <a:latin typeface="Microsoft GothicNeo"/>
+              <a:ea typeface="Microsoft GothicNeo"/>
+              <a:cs typeface="Microsoft GothicNeo"/>
+            </a:endParaRPr>
+          </a:p>
+          <a:p>
+            <a:pPr marL="800100" lvl="3" indent="-228600">
+              <a:lnSpc>
+                <a:spcPct val="150000"/>
+              </a:lnSpc>
+              <a:buFont typeface="Calibri"/>
+              <a:buChar char="-"/>
+            </a:pPr>
+            <a:r>
+              <a:rPr lang="en-US" altLang="ko-KR" sz="1200" dirty="0">
+                <a:latin typeface="Microsoft GothicNeo"/>
+                <a:ea typeface="Microsoft GothicNeo"/>
+                <a:cs typeface="Microsoft GothicNeo"/>
+              </a:rPr>
+              <a:t>Y</a:t>
+            </a:r>
+            <a:r>
+              <a:rPr lang="ko-KR" altLang="en-US" sz="1200" dirty="0">
+                <a:latin typeface="Microsoft GothicNeo"/>
+                <a:ea typeface="Microsoft GothicNeo"/>
+                <a:cs typeface="Microsoft GothicNeo"/>
+              </a:rPr>
+              <a:t>축 </a:t>
+            </a:r>
+            <a:r>
+              <a:rPr lang="en-US" altLang="ko-KR" sz="1200" dirty="0">
+                <a:latin typeface="Microsoft GothicNeo"/>
+                <a:ea typeface="Microsoft GothicNeo"/>
+                <a:cs typeface="Microsoft GothicNeo"/>
+              </a:rPr>
+              <a:t>: (TPR) </a:t>
+            </a:r>
+            <a:r>
+              <a:rPr lang="ko-KR" altLang="en-US" sz="1200" dirty="0">
+                <a:latin typeface="Microsoft GothicNeo"/>
+                <a:ea typeface="Microsoft GothicNeo"/>
+                <a:cs typeface="Microsoft GothicNeo"/>
+              </a:rPr>
+              <a:t>실제 불만족 고객을 올바르게 분류한 비율</a:t>
+            </a:r>
+            <a:endParaRPr lang="en-US" altLang="ko-KR" sz="1200" dirty="0">
+              <a:latin typeface="Microsoft GothicNeo"/>
+              <a:ea typeface="Microsoft GothicNeo"/>
+              <a:cs typeface="Microsoft GothicNeo"/>
+            </a:endParaRPr>
+          </a:p>
+          <a:p>
+            <a:pPr marL="800100" lvl="3" indent="-228600">
+              <a:lnSpc>
+                <a:spcPct val="150000"/>
+              </a:lnSpc>
+              <a:buFont typeface="Calibri"/>
+              <a:buChar char="-"/>
+            </a:pPr>
+            <a:r>
+              <a:rPr lang="en-US" altLang="ko-KR" sz="1200" dirty="0">
+                <a:solidFill>
+                  <a:srgbClr val="C00000"/>
+                </a:solidFill>
+                <a:latin typeface="Microsoft GothicNeo"/>
+                <a:ea typeface="Microsoft GothicNeo"/>
+                <a:cs typeface="Microsoft GothicNeo"/>
+              </a:rPr>
+              <a:t>AUC : ROC </a:t>
+            </a:r>
+            <a:r>
+              <a:rPr lang="ko-KR" altLang="en-US" sz="1200" dirty="0">
+                <a:solidFill>
+                  <a:srgbClr val="C00000"/>
+                </a:solidFill>
+                <a:latin typeface="Microsoft GothicNeo"/>
+                <a:ea typeface="Microsoft GothicNeo"/>
+                <a:cs typeface="Microsoft GothicNeo"/>
+              </a:rPr>
+              <a:t>곡선 아래 면적 → </a:t>
+            </a:r>
+            <a:r>
+              <a:rPr lang="en-US" altLang="ko-KR" sz="1200" dirty="0">
+                <a:solidFill>
+                  <a:srgbClr val="C00000"/>
+                </a:solidFill>
+                <a:latin typeface="Microsoft GothicNeo"/>
+                <a:ea typeface="Microsoft GothicNeo"/>
+                <a:cs typeface="Microsoft GothicNeo"/>
+              </a:rPr>
+              <a:t>1.0</a:t>
+            </a:r>
+            <a:r>
+              <a:rPr lang="ko-KR" altLang="en-US" sz="1200" dirty="0">
+                <a:solidFill>
+                  <a:srgbClr val="C00000"/>
+                </a:solidFill>
+                <a:latin typeface="Microsoft GothicNeo"/>
+                <a:ea typeface="Microsoft GothicNeo"/>
+                <a:cs typeface="Microsoft GothicNeo"/>
+              </a:rPr>
+              <a:t>에 가까울수록 완벽한 분류</a:t>
+            </a:r>
+            <a:r>
+              <a:rPr lang="en-US" altLang="ko-KR" sz="1200" dirty="0">
+                <a:solidFill>
+                  <a:srgbClr val="C00000"/>
+                </a:solidFill>
+                <a:latin typeface="Microsoft GothicNeo"/>
+                <a:ea typeface="Microsoft GothicNeo"/>
+                <a:cs typeface="Microsoft GothicNeo"/>
+              </a:rPr>
+              <a:t>, 0.5</a:t>
+            </a:r>
+            <a:r>
+              <a:rPr lang="ko-KR" altLang="en-US" sz="1200" dirty="0">
+                <a:solidFill>
+                  <a:srgbClr val="C00000"/>
+                </a:solidFill>
+                <a:latin typeface="Microsoft GothicNeo"/>
+                <a:ea typeface="Microsoft GothicNeo"/>
+                <a:cs typeface="Microsoft GothicNeo"/>
+              </a:rPr>
+              <a:t>에 가까울수록 랜덤 추측</a:t>
+            </a:r>
+            <a:endParaRPr lang="en-US" altLang="ko-KR" sz="1200" dirty="0">
+              <a:solidFill>
+                <a:srgbClr val="C00000"/>
+              </a:solidFill>
+              <a:latin typeface="Microsoft GothicNeo"/>
+              <a:ea typeface="Microsoft GothicNeo"/>
+              <a:cs typeface="Microsoft GothicNeo"/>
+            </a:endParaRPr>
+          </a:p>
+          <a:p>
+            <a:pPr marL="800100" lvl="3" indent="-228600">
+              <a:lnSpc>
+                <a:spcPct val="150000"/>
+              </a:lnSpc>
+              <a:buFont typeface="Calibri"/>
+              <a:buChar char="-"/>
+            </a:pPr>
+            <a:r>
+              <a:rPr lang="ko-KR" altLang="en-US" sz="1200" dirty="0">
+                <a:latin typeface="Microsoft GothicNeo"/>
+                <a:ea typeface="Microsoft GothicNeo"/>
+                <a:cs typeface="Microsoft GothicNeo"/>
+              </a:rPr>
+              <a:t>모델 자체의 내재적 변별 능력 평가</a:t>
+            </a:r>
+            <a:r>
+              <a:rPr lang="en-US" altLang="ko-KR" sz="1200" dirty="0">
+                <a:latin typeface="Microsoft GothicNeo"/>
+                <a:ea typeface="Microsoft GothicNeo"/>
+                <a:cs typeface="Microsoft GothicNeo"/>
+              </a:rPr>
+              <a:t>, </a:t>
+            </a:r>
+            <a:r>
+              <a:rPr lang="ko-KR" altLang="en-US" sz="1200" dirty="0">
+                <a:latin typeface="Microsoft GothicNeo"/>
+                <a:ea typeface="Microsoft GothicNeo"/>
+                <a:cs typeface="Microsoft GothicNeo"/>
+              </a:rPr>
+              <a:t>비교에 유용한 지표</a:t>
+            </a:r>
+          </a:p>
+        </p:txBody>
+      </p:sp>
+      <p:sp>
+        <p:nvSpPr>
+          <p:cNvPr id="4" name="직사각형 3">
+            <a:extLst>
+              <a:ext uri="{FF2B5EF4-FFF2-40B4-BE49-F238E27FC236}">
+                <a16:creationId xmlns:a16="http://schemas.microsoft.com/office/drawing/2014/main" id="{E38A7507-D763-9764-1402-00E18AC59E4E}"/>
+              </a:ext>
+            </a:extLst>
+          </p:cNvPr>
+          <p:cNvSpPr/>
+          <p:nvPr/>
+        </p:nvSpPr>
+        <p:spPr>
+          <a:xfrm>
+            <a:off x="444500" y="1026583"/>
+            <a:ext cx="63499" cy="1291166"/>
+          </a:xfrm>
+          <a:prstGeom prst="rect">
+            <a:avLst/>
+          </a:prstGeom>
+          <a:solidFill>
+            <a:srgbClr val="C00000"/>
+          </a:solidFill>
+          <a:ln>
+            <a:noFill/>
+          </a:ln>
+        </p:spPr>
+        <p:style>
+          <a:lnRef idx="2">
+            <a:schemeClr val="accent1">
+              <a:shade val="15000"/>
+            </a:schemeClr>
+          </a:lnRef>
+          <a:fillRef idx="1">
+            <a:schemeClr val="accent1"/>
+          </a:fillRef>
+          <a:effectRef idx="0">
+            <a:schemeClr val="accent1"/>
+          </a:effectRef>
+          <a:fontRef idx="minor">
+            <a:schemeClr val="lt1"/>
+          </a:fontRef>
+        </p:style>
+        <p:txBody>
+          <a:bodyPr rtlCol="0" anchor="ctr"/>
+          <a:lstStyle/>
+          <a:p>
+            <a:pPr algn="ctr"/>
+            <a:endParaRPr lang="ko-KR" altLang="en-US"/>
+          </a:p>
+        </p:txBody>
+      </p:sp>
+      <p:pic>
+        <p:nvPicPr>
+          <p:cNvPr id="6" name="그림 5" descr="File:Santander Logo.PNG - Wikimedia Commons">
+            <a:extLst>
+              <a:ext uri="{FF2B5EF4-FFF2-40B4-BE49-F238E27FC236}">
+                <a16:creationId xmlns:a16="http://schemas.microsoft.com/office/drawing/2014/main" id="{DE803BBA-9474-B96F-A4E8-A957E3CBD6C5}"/>
+              </a:ext>
+            </a:extLst>
+          </p:cNvPr>
+          <p:cNvPicPr>
+            <a:picLocks noChangeAspect="1"/>
+          </p:cNvPicPr>
+          <p:nvPr/>
+        </p:nvPicPr>
+        <p:blipFill>
+          <a:blip r:embed="rId2"/>
+          <a:stretch>
+            <a:fillRect/>
+          </a:stretch>
+        </p:blipFill>
+        <p:spPr>
+          <a:xfrm>
+            <a:off x="2" y="5771641"/>
+            <a:ext cx="2901462" cy="1088332"/>
+          </a:xfrm>
+          <a:prstGeom prst="rect">
+            <a:avLst/>
+          </a:prstGeom>
+        </p:spPr>
+      </p:pic>
+      <p:sp>
+        <p:nvSpPr>
+          <p:cNvPr id="9" name="TextBox 8">
+            <a:extLst>
+              <a:ext uri="{FF2B5EF4-FFF2-40B4-BE49-F238E27FC236}">
+                <a16:creationId xmlns:a16="http://schemas.microsoft.com/office/drawing/2014/main" id="{43CC8161-30EE-738A-E02E-257B4688F0FC}"/>
+              </a:ext>
+            </a:extLst>
+          </p:cNvPr>
+          <p:cNvSpPr txBox="1"/>
+          <p:nvPr/>
+        </p:nvSpPr>
+        <p:spPr>
+          <a:xfrm>
+            <a:off x="1904186" y="3178826"/>
+            <a:ext cx="8383627" cy="261610"/>
+          </a:xfrm>
+          <a:prstGeom prst="rect">
+            <a:avLst/>
+          </a:prstGeom>
+          <a:noFill/>
+        </p:spPr>
+        <p:txBody>
+          <a:bodyPr rot="0" spcFirstLastPara="0" vertOverflow="overflow" horzOverflow="overflow" vert="horz" wrap="square" lIns="91440" tIns="45720" rIns="91440" bIns="45720" numCol="1" spcCol="0" rtlCol="0" fromWordArt="0" anchor="t" anchorCtr="0" forceAA="0" compatLnSpc="1">
+            <a:prstTxWarp prst="textNoShape">
+              <a:avLst/>
+            </a:prstTxWarp>
+            <a:spAutoFit/>
+          </a:bodyPr>
+          <a:lstStyle/>
+          <a:p>
+            <a:pPr algn="ctr"/>
+            <a:r>
+              <a:rPr lang="ko-KR" altLang="en-US" sz="1100" dirty="0">
+                <a:latin typeface="Microsoft GothicNeo"/>
+                <a:ea typeface="Microsoft GothicNeo"/>
+                <a:cs typeface="Microsoft GothicNeo"/>
+              </a:rPr>
+              <a:t>[ 그림 2.</a:t>
+            </a:r>
+            <a:r>
+              <a:rPr lang="en-US" altLang="ko-KR" sz="1100" dirty="0">
+                <a:latin typeface="Microsoft GothicNeo"/>
+                <a:ea typeface="Microsoft GothicNeo"/>
+                <a:cs typeface="Microsoft GothicNeo"/>
+              </a:rPr>
+              <a:t>5</a:t>
+            </a:r>
+            <a:r>
+              <a:rPr lang="ko-KR" altLang="en-US" sz="1100" dirty="0">
+                <a:latin typeface="Microsoft GothicNeo"/>
+                <a:ea typeface="Microsoft GothicNeo"/>
+                <a:cs typeface="Microsoft GothicNeo"/>
+              </a:rPr>
+              <a:t> </a:t>
+            </a:r>
+            <a:r>
+              <a:rPr lang="ko-KR" altLang="en-US" sz="1100" dirty="0" err="1">
+                <a:latin typeface="Microsoft GothicNeo"/>
+                <a:ea typeface="Microsoft GothicNeo"/>
+                <a:cs typeface="Microsoft GothicNeo"/>
+              </a:rPr>
+              <a:t>산탄데르</a:t>
+            </a:r>
+            <a:r>
+              <a:rPr lang="ko-KR" altLang="en-US" sz="1100" dirty="0">
+                <a:latin typeface="Microsoft GothicNeo"/>
+                <a:ea typeface="Microsoft GothicNeo"/>
+                <a:cs typeface="Microsoft GothicNeo"/>
+              </a:rPr>
+              <a:t> </a:t>
+            </a:r>
+            <a:r>
+              <a:rPr lang="en-US" altLang="ko-KR" sz="1100" dirty="0">
+                <a:latin typeface="Microsoft GothicNeo"/>
+                <a:ea typeface="Microsoft GothicNeo"/>
+                <a:cs typeface="Microsoft GothicNeo"/>
+              </a:rPr>
+              <a:t>ROC </a:t>
+            </a:r>
+            <a:r>
+              <a:rPr lang="ko-KR" altLang="en-US" sz="1100" dirty="0">
+                <a:latin typeface="Microsoft GothicNeo"/>
+                <a:ea typeface="Microsoft GothicNeo"/>
+                <a:cs typeface="Microsoft GothicNeo"/>
+              </a:rPr>
+              <a:t>곡선 시각화 </a:t>
+            </a:r>
+            <a:r>
+              <a:rPr lang="en-US" altLang="ko-KR" sz="1100" dirty="0">
+                <a:latin typeface="Microsoft GothicNeo"/>
+                <a:ea typeface="Microsoft GothicNeo"/>
+                <a:cs typeface="Microsoft GothicNeo"/>
+              </a:rPr>
+              <a:t>(</a:t>
+            </a:r>
+            <a:r>
+              <a:rPr lang="ko-KR" altLang="en-US" sz="1100" dirty="0">
+                <a:latin typeface="Microsoft GothicNeo"/>
+                <a:ea typeface="Microsoft GothicNeo"/>
+                <a:cs typeface="Microsoft GothicNeo"/>
+              </a:rPr>
+              <a:t>트리계열 알고리즘 사용</a:t>
+            </a:r>
+            <a:r>
+              <a:rPr lang="en-US" altLang="ko-KR" sz="1100" dirty="0">
+                <a:latin typeface="Microsoft GothicNeo"/>
+                <a:ea typeface="Microsoft GothicNeo"/>
+                <a:cs typeface="Microsoft GothicNeo"/>
+              </a:rPr>
+              <a:t>) </a:t>
+            </a:r>
+            <a:r>
+              <a:rPr lang="ko-KR" altLang="en-US" sz="1100" dirty="0">
+                <a:latin typeface="Microsoft GothicNeo"/>
+                <a:ea typeface="Microsoft GothicNeo"/>
+                <a:cs typeface="Microsoft GothicNeo"/>
+              </a:rPr>
+              <a:t>]</a:t>
+            </a:r>
+          </a:p>
+        </p:txBody>
+      </p:sp>
+      <p:pic>
+        <p:nvPicPr>
+          <p:cNvPr id="8" name="그림 7">
+            <a:extLst>
+              <a:ext uri="{FF2B5EF4-FFF2-40B4-BE49-F238E27FC236}">
+                <a16:creationId xmlns:a16="http://schemas.microsoft.com/office/drawing/2014/main" id="{9C4F8811-9BF3-5B63-4385-45B61BBFC5D3}"/>
+              </a:ext>
+            </a:extLst>
+          </p:cNvPr>
+          <p:cNvPicPr>
+            <a:picLocks noChangeAspect="1"/>
+          </p:cNvPicPr>
+          <p:nvPr/>
+        </p:nvPicPr>
+        <p:blipFill>
+          <a:blip r:embed="rId3">
+            <a:extLst>
+              <a:ext uri="{28A0092B-C50C-407E-A947-70E740481C1C}">
+                <a14:useLocalDpi xmlns:a14="http://schemas.microsoft.com/office/drawing/2010/main" val="0"/>
+              </a:ext>
+            </a:extLst>
+          </a:blip>
+          <a:srcRect/>
+          <a:stretch>
+            <a:fillRect/>
+          </a:stretch>
+        </p:blipFill>
+        <p:spPr bwMode="auto">
+          <a:xfrm>
+            <a:off x="4005105" y="3443288"/>
+            <a:ext cx="3810314" cy="3056190"/>
+          </a:xfrm>
+          <a:prstGeom prst="rect">
+            <a:avLst/>
+          </a:prstGeom>
+          <a:noFill/>
+          <a:ln>
+            <a:noFill/>
+          </a:ln>
+        </p:spPr>
+      </p:pic>
+    </p:spTree>
+    <p:extLst>
+      <p:ext uri="{BB962C8B-B14F-4D97-AF65-F5344CB8AC3E}">
+        <p14:creationId xmlns:p14="http://schemas.microsoft.com/office/powerpoint/2010/main" val="1157782618"/>
+      </p:ext>
+    </p:extLst>
+  </p:cSld>
+  <p:clrMapOvr>
+    <a:masterClrMapping/>
+  </p:clrMapOvr>
+</p:sld>
+</file>
+
+<file path=ppt/slides/slide7.xml><?xml version="1.0" encoding="utf-8"?>
+<p:sld xmlns:a="http://schemas.openxmlformats.org/drawingml/2006/main" xmlns:r="http://schemas.openxmlformats.org/officeDocument/2006/relationships" xmlns:p="http://schemas.openxmlformats.org/presentationml/2006/main">
+  <p:cSld>
+    <p:spTree>
+      <p:nvGrpSpPr>
+        <p:cNvPr id="1" name="">
+          <a:extLst>
+            <a:ext uri="{FF2B5EF4-FFF2-40B4-BE49-F238E27FC236}">
+              <a16:creationId xmlns:a16="http://schemas.microsoft.com/office/drawing/2014/main" id="{E39ADF74-63CF-1CC9-FB84-CE5C6A924231}"/>
+            </a:ext>
+          </a:extLst>
+        </p:cNvPr>
+        <p:cNvGrpSpPr/>
+        <p:nvPr/>
+      </p:nvGrpSpPr>
+      <p:grpSpPr>
+        <a:xfrm>
+          <a:off x="0" y="0"/>
+          <a:ext cx="0" cy="0"/>
+          <a:chOff x="0" y="0"/>
+          <a:chExt cx="0" cy="0"/>
+        </a:xfrm>
+      </p:grpSpPr>
+      <p:sp>
+        <p:nvSpPr>
+          <p:cNvPr id="5" name="직사각형 4">
+            <a:extLst>
+              <a:ext uri="{FF2B5EF4-FFF2-40B4-BE49-F238E27FC236}">
+                <a16:creationId xmlns:a16="http://schemas.microsoft.com/office/drawing/2014/main" id="{8F34F029-D352-A136-1D88-BFEC612C4D9F}"/>
+              </a:ext>
+            </a:extLst>
+          </p:cNvPr>
+          <p:cNvSpPr/>
+          <p:nvPr/>
+        </p:nvSpPr>
+        <p:spPr>
+          <a:xfrm>
+            <a:off x="-169334" y="0"/>
+            <a:ext cx="12848166" cy="656167"/>
+          </a:xfrm>
+          <a:prstGeom prst="rect">
+            <a:avLst/>
+          </a:prstGeom>
+          <a:solidFill>
+            <a:schemeClr val="bg1">
+              <a:lumMod val="95000"/>
+            </a:schemeClr>
+          </a:solidFill>
+          <a:ln>
+            <a:noFill/>
+          </a:ln>
+        </p:spPr>
+        <p:style>
+          <a:lnRef idx="2">
+            <a:schemeClr val="accent1">
+              <a:shade val="15000"/>
+            </a:schemeClr>
+          </a:lnRef>
+          <a:fillRef idx="1">
+            <a:schemeClr val="accent1"/>
+          </a:fillRef>
+          <a:effectRef idx="0">
+            <a:schemeClr val="accent1"/>
+          </a:effectRef>
+          <a:fontRef idx="minor">
+            <a:schemeClr val="lt1"/>
+          </a:fontRef>
+        </p:style>
+        <p:txBody>
+          <a:bodyPr rtlCol="0" anchor="ctr"/>
+          <a:lstStyle/>
+          <a:p>
+            <a:pPr algn="ctr"/>
+            <a:endParaRPr lang="ko-KR" altLang="en-US"/>
+          </a:p>
+        </p:txBody>
+      </p:sp>
+      <p:sp>
+        <p:nvSpPr>
+          <p:cNvPr id="7" name="TextBox 6">
+            <a:extLst>
+              <a:ext uri="{FF2B5EF4-FFF2-40B4-BE49-F238E27FC236}">
+                <a16:creationId xmlns:a16="http://schemas.microsoft.com/office/drawing/2014/main" id="{FBB78D01-734D-34AB-5593-E35EF7071E18}"/>
+              </a:ext>
+            </a:extLst>
+          </p:cNvPr>
+          <p:cNvSpPr txBox="1"/>
+          <p:nvPr/>
+        </p:nvSpPr>
+        <p:spPr>
+          <a:xfrm>
+            <a:off x="-2" y="179916"/>
+            <a:ext cx="7217832" cy="477054"/>
+          </a:xfrm>
+          <a:prstGeom prst="rect">
+            <a:avLst/>
+          </a:prstGeom>
+          <a:noFill/>
+          <a:ln>
+            <a:noFill/>
+          </a:ln>
+        </p:spPr>
+        <p:txBody>
+          <a:bodyPr rot="0" spcFirstLastPara="0" vertOverflow="overflow" horzOverflow="overflow" vert="horz" wrap="square" lIns="91440" tIns="45720" rIns="91440" bIns="45720" numCol="1" spcCol="0" rtlCol="0" fromWordArt="0" anchor="t" anchorCtr="0" forceAA="0" compatLnSpc="1">
+            <a:prstTxWarp prst="textNoShape">
+              <a:avLst/>
+            </a:prstTxWarp>
+            <a:spAutoFit/>
+          </a:bodyPr>
+          <a:lstStyle/>
+          <a:p>
+            <a:r>
+              <a:rPr lang="ko-KR" altLang="en-US" sz="2500" dirty="0">
+                <a:solidFill>
+                  <a:srgbClr val="747474"/>
+                </a:solidFill>
+                <a:latin typeface="Microsoft GothicNeo"/>
+                <a:ea typeface="Microsoft GothicNeo"/>
+                <a:cs typeface="Arial"/>
+              </a:rPr>
+              <a:t>02-</a:t>
+            </a:r>
+            <a:r>
+              <a:rPr lang="en-US" altLang="ko-KR" sz="2500" dirty="0">
+                <a:solidFill>
+                  <a:srgbClr val="747474"/>
+                </a:solidFill>
+                <a:latin typeface="Microsoft GothicNeo"/>
+                <a:ea typeface="Microsoft GothicNeo"/>
+                <a:cs typeface="Arial"/>
+              </a:rPr>
+              <a:t>4</a:t>
+            </a:r>
+            <a:r>
+              <a:rPr lang="ko-KR" altLang="en-US" sz="2500" dirty="0">
+                <a:solidFill>
+                  <a:srgbClr val="747474"/>
+                </a:solidFill>
+                <a:latin typeface="Microsoft GothicNeo"/>
+                <a:ea typeface="Microsoft GothicNeo"/>
+                <a:cs typeface="Arial"/>
+              </a:rPr>
+              <a:t> 데이터 설명 및 주요 피처 분석</a:t>
+            </a:r>
+          </a:p>
+        </p:txBody>
+      </p:sp>
+      <p:sp>
+        <p:nvSpPr>
+          <p:cNvPr id="2" name="TextBox 1">
+            <a:extLst>
+              <a:ext uri="{FF2B5EF4-FFF2-40B4-BE49-F238E27FC236}">
+                <a16:creationId xmlns:a16="http://schemas.microsoft.com/office/drawing/2014/main" id="{C235F028-7EB1-4402-A373-8792FB4C79BB}"/>
+              </a:ext>
+            </a:extLst>
+          </p:cNvPr>
+          <p:cNvSpPr txBox="1"/>
+          <p:nvPr/>
+        </p:nvSpPr>
+        <p:spPr>
+          <a:xfrm>
+            <a:off x="613833" y="941917"/>
+            <a:ext cx="10002506" cy="2206245"/>
+          </a:xfrm>
+          <a:prstGeom prst="rect">
+            <a:avLst/>
+          </a:prstGeom>
+          <a:noFill/>
+        </p:spPr>
+        <p:txBody>
+          <a:bodyPr rot="0" spcFirstLastPara="0" vertOverflow="overflow" horzOverflow="overflow" vert="horz" wrap="square" lIns="91440" tIns="45720" rIns="91440" bIns="45720" numCol="1" spcCol="0" rtlCol="0" fromWordArt="0" anchor="t" anchorCtr="0" forceAA="0" compatLnSpc="1">
+            <a:prstTxWarp prst="textNoShape">
+              <a:avLst/>
+            </a:prstTxWarp>
+            <a:spAutoFit/>
+          </a:bodyPr>
+          <a:lstStyle/>
+          <a:p>
+            <a:pPr marL="285750" indent="-285750">
+              <a:lnSpc>
+                <a:spcPct val="150000"/>
+              </a:lnSpc>
+              <a:buFont typeface="Wingdings"/>
+              <a:buChar char="q"/>
+            </a:pPr>
+            <a:r>
+              <a:rPr lang="ko-KR" altLang="en-US" dirty="0">
+                <a:latin typeface="Microsoft GothicNeo"/>
+                <a:ea typeface="Microsoft GothicNeo"/>
+                <a:cs typeface="Microsoft GothicNeo"/>
+              </a:rPr>
+              <a:t>데이터셋 </a:t>
+            </a:r>
+            <a:r>
+              <a:rPr lang="en-US" altLang="ko-KR" dirty="0">
+                <a:latin typeface="Microsoft GothicNeo"/>
+                <a:ea typeface="Microsoft GothicNeo"/>
+                <a:cs typeface="Microsoft GothicNeo"/>
+              </a:rPr>
+              <a:t>describe()</a:t>
+            </a:r>
+            <a:r>
+              <a:rPr lang="ko-KR" altLang="en-US" dirty="0">
+                <a:latin typeface="Microsoft GothicNeo"/>
+                <a:ea typeface="Microsoft GothicNeo"/>
+                <a:cs typeface="Microsoft GothicNeo"/>
+              </a:rPr>
+              <a:t> </a:t>
+            </a:r>
+          </a:p>
+          <a:p>
+            <a:pPr marL="400050" lvl="2" indent="228600">
+              <a:lnSpc>
+                <a:spcPct val="150000"/>
+              </a:lnSpc>
+              <a:buFont typeface="Wingdings,Sans-Serif"/>
+              <a:buChar char="§"/>
+            </a:pPr>
+            <a:r>
+              <a:rPr lang="ko-KR" altLang="en-US" sz="1300" dirty="0">
+                <a:latin typeface="Microsoft GothicNeo"/>
+                <a:ea typeface="Microsoft GothicNeo"/>
+                <a:cs typeface="Microsoft GothicNeo"/>
+              </a:rPr>
+              <a:t>각 피처들의 평균</a:t>
+            </a:r>
+            <a:r>
+              <a:rPr lang="en-US" altLang="ko-KR" sz="1300" dirty="0">
+                <a:latin typeface="Microsoft GothicNeo"/>
+                <a:ea typeface="Microsoft GothicNeo"/>
+                <a:cs typeface="Microsoft GothicNeo"/>
+              </a:rPr>
+              <a:t>, </a:t>
+            </a:r>
+            <a:r>
+              <a:rPr lang="ko-KR" altLang="en-US" sz="1300" dirty="0">
+                <a:latin typeface="Microsoft GothicNeo"/>
+                <a:ea typeface="Microsoft GothicNeo"/>
+                <a:cs typeface="Microsoft GothicNeo"/>
+              </a:rPr>
+              <a:t>표준편차</a:t>
+            </a:r>
+            <a:r>
+              <a:rPr lang="en-US" altLang="ko-KR" sz="1300" dirty="0">
+                <a:latin typeface="Microsoft GothicNeo"/>
+                <a:ea typeface="Microsoft GothicNeo"/>
+                <a:cs typeface="Microsoft GothicNeo"/>
+              </a:rPr>
+              <a:t>, </a:t>
+            </a:r>
+            <a:r>
+              <a:rPr lang="ko-KR" altLang="en-US" sz="1300" dirty="0">
+                <a:latin typeface="Microsoft GothicNeo"/>
+                <a:ea typeface="Microsoft GothicNeo"/>
+                <a:cs typeface="Microsoft GothicNeo"/>
+              </a:rPr>
+              <a:t>최소</a:t>
+            </a:r>
+            <a:r>
+              <a:rPr lang="en-US" altLang="ko-KR" sz="1300" dirty="0">
+                <a:latin typeface="Microsoft GothicNeo"/>
+                <a:ea typeface="Microsoft GothicNeo"/>
+                <a:cs typeface="Microsoft GothicNeo"/>
+              </a:rPr>
+              <a:t>/</a:t>
+            </a:r>
+            <a:r>
+              <a:rPr lang="ko-KR" altLang="en-US" sz="1300" dirty="0">
+                <a:latin typeface="Microsoft GothicNeo"/>
+                <a:ea typeface="Microsoft GothicNeo"/>
+                <a:cs typeface="Microsoft GothicNeo"/>
+              </a:rPr>
+              <a:t>최댓값 기본 통계치 출력</a:t>
+            </a:r>
+            <a:endParaRPr lang="en-US" altLang="ko-KR" sz="1300" dirty="0">
+              <a:latin typeface="Microsoft GothicNeo"/>
+              <a:ea typeface="Microsoft GothicNeo"/>
+              <a:cs typeface="Microsoft GothicNeo"/>
+            </a:endParaRPr>
+          </a:p>
+          <a:p>
+            <a:pPr marL="400050" lvl="2" indent="228600">
+              <a:lnSpc>
+                <a:spcPct val="150000"/>
+              </a:lnSpc>
+              <a:buFont typeface="Wingdings,Sans-Serif"/>
+              <a:buChar char="§"/>
+            </a:pPr>
+            <a:r>
+              <a:rPr lang="ko-KR" altLang="en-US" sz="1300" dirty="0">
+                <a:solidFill>
+                  <a:srgbClr val="C00000"/>
+                </a:solidFill>
+                <a:latin typeface="Microsoft GothicNeo"/>
+                <a:ea typeface="Microsoft GothicNeo"/>
+                <a:cs typeface="Microsoft GothicNeo"/>
+              </a:rPr>
+              <a:t>데이터 구조적 특성 및 모델링 전략 힌트 파악</a:t>
+            </a:r>
+            <a:r>
+              <a:rPr lang="ko-KR" altLang="en-US" sz="1300" b="1" dirty="0">
+                <a:solidFill>
+                  <a:srgbClr val="C00000"/>
+                </a:solidFill>
+                <a:latin typeface="Microsoft GothicNeo"/>
+                <a:ea typeface="Microsoft GothicNeo"/>
+                <a:cs typeface="Microsoft GothicNeo"/>
+              </a:rPr>
+              <a:t> </a:t>
+            </a:r>
+            <a:endParaRPr lang="en-US" altLang="ko-KR" sz="1300" b="1" dirty="0">
+              <a:solidFill>
+                <a:srgbClr val="C00000"/>
+              </a:solidFill>
+              <a:latin typeface="Microsoft GothicNeo"/>
+              <a:ea typeface="Microsoft GothicNeo"/>
+              <a:cs typeface="Microsoft GothicNeo"/>
+            </a:endParaRPr>
+          </a:p>
+          <a:p>
+            <a:pPr marL="400050" lvl="2" indent="228600">
+              <a:lnSpc>
+                <a:spcPct val="150000"/>
+              </a:lnSpc>
+              <a:buFont typeface="Wingdings,Sans-Serif"/>
+              <a:buChar char="§"/>
+            </a:pPr>
+            <a:r>
+              <a:rPr lang="ko-KR" altLang="en-US" sz="1300" dirty="0" err="1">
+                <a:latin typeface="Microsoft GothicNeo"/>
+                <a:ea typeface="Microsoft GothicNeo"/>
+                <a:cs typeface="Microsoft GothicNeo"/>
+              </a:rPr>
+              <a:t>피처명</a:t>
+            </a:r>
+            <a:r>
+              <a:rPr lang="ko-KR" altLang="en-US" sz="1300" dirty="0">
+                <a:latin typeface="Microsoft GothicNeo"/>
+                <a:ea typeface="Microsoft GothicNeo"/>
+                <a:cs typeface="Microsoft GothicNeo"/>
+              </a:rPr>
+              <a:t> 의미가 없어 직접적 해석 불가 </a:t>
+            </a:r>
+            <a:r>
+              <a:rPr lang="ko-KR" altLang="en-US" sz="1300" b="1" dirty="0">
+                <a:latin typeface="Microsoft GothicNeo"/>
+                <a:ea typeface="Microsoft GothicNeo"/>
+                <a:cs typeface="Microsoft GothicNeo"/>
+              </a:rPr>
+              <a:t>▶</a:t>
+            </a:r>
+            <a:r>
+              <a:rPr lang="ko-KR" altLang="en-US" sz="1300" b="1" dirty="0">
+                <a:solidFill>
+                  <a:srgbClr val="C00000"/>
+                </a:solidFill>
+                <a:latin typeface="Microsoft GothicNeo"/>
+                <a:ea typeface="Microsoft GothicNeo"/>
+                <a:cs typeface="Microsoft GothicNeo"/>
+              </a:rPr>
+              <a:t> </a:t>
+            </a:r>
+            <a:r>
+              <a:rPr lang="en-US" altLang="ko-KR" sz="1300" b="1" dirty="0">
+                <a:solidFill>
+                  <a:srgbClr val="C00000"/>
+                </a:solidFill>
+                <a:latin typeface="Microsoft GothicNeo"/>
+                <a:ea typeface="Microsoft GothicNeo"/>
+                <a:cs typeface="Microsoft GothicNeo"/>
+              </a:rPr>
+              <a:t>EDA(</a:t>
+            </a:r>
+            <a:r>
+              <a:rPr lang="ko-KR" altLang="en-US" sz="1300" b="1" dirty="0">
+                <a:solidFill>
+                  <a:srgbClr val="C00000"/>
+                </a:solidFill>
+                <a:latin typeface="Microsoft GothicNeo"/>
+                <a:ea typeface="Microsoft GothicNeo"/>
+                <a:cs typeface="Microsoft GothicNeo"/>
+              </a:rPr>
+              <a:t>탐색적 데이터 분석</a:t>
+            </a:r>
+            <a:r>
+              <a:rPr lang="en-US" altLang="ko-KR" sz="1300" b="1" dirty="0">
+                <a:solidFill>
+                  <a:srgbClr val="C00000"/>
+                </a:solidFill>
+                <a:latin typeface="Microsoft GothicNeo"/>
+                <a:ea typeface="Microsoft GothicNeo"/>
+                <a:cs typeface="Microsoft GothicNeo"/>
+              </a:rPr>
+              <a:t>), Feature Selection </a:t>
+            </a:r>
+            <a:r>
+              <a:rPr lang="ko-KR" altLang="en-US" sz="1300" b="1" dirty="0">
+                <a:solidFill>
+                  <a:srgbClr val="C00000"/>
+                </a:solidFill>
+                <a:latin typeface="Microsoft GothicNeo"/>
+                <a:ea typeface="Microsoft GothicNeo"/>
+                <a:cs typeface="Microsoft GothicNeo"/>
+              </a:rPr>
+              <a:t>중요</a:t>
+            </a:r>
+          </a:p>
+          <a:p>
+            <a:pPr marL="800100" lvl="3" indent="-228600">
+              <a:lnSpc>
+                <a:spcPct val="150000"/>
+              </a:lnSpc>
+              <a:buFont typeface="Calibri"/>
+              <a:buChar char="-"/>
+            </a:pPr>
+            <a:r>
+              <a:rPr lang="ko-KR" altLang="en-US" sz="1200" dirty="0">
+                <a:latin typeface="Microsoft GothicNeo"/>
+                <a:ea typeface="Microsoft GothicNeo"/>
+                <a:cs typeface="Microsoft GothicNeo"/>
+              </a:rPr>
+              <a:t>피처 분포와 스케일</a:t>
+            </a:r>
+            <a:endParaRPr lang="en-US" altLang="ko-KR" sz="1200" dirty="0">
+              <a:latin typeface="Microsoft GothicNeo"/>
+              <a:ea typeface="Microsoft GothicNeo"/>
+              <a:cs typeface="Microsoft GothicNeo"/>
+            </a:endParaRPr>
+          </a:p>
+          <a:p>
+            <a:pPr marL="800100" lvl="3" indent="-228600">
+              <a:lnSpc>
+                <a:spcPct val="150000"/>
+              </a:lnSpc>
+              <a:buFont typeface="Calibri"/>
+              <a:buChar char="-"/>
+            </a:pPr>
+            <a:r>
+              <a:rPr lang="ko-KR" altLang="en-US" sz="1200" dirty="0" err="1">
+                <a:latin typeface="Microsoft GothicNeo"/>
+                <a:ea typeface="Microsoft GothicNeo"/>
+                <a:cs typeface="Microsoft GothicNeo"/>
+              </a:rPr>
+              <a:t>결측치</a:t>
+            </a:r>
+            <a:r>
+              <a:rPr lang="ko-KR" altLang="en-US" sz="1200" dirty="0">
+                <a:latin typeface="Microsoft GothicNeo"/>
+                <a:ea typeface="Microsoft GothicNeo"/>
+                <a:cs typeface="Microsoft GothicNeo"/>
+              </a:rPr>
+              <a:t> 및 이상치 탐지 및 클래스 불균형 확인</a:t>
+            </a:r>
+            <a:endParaRPr lang="en-US" altLang="ko-KR" sz="1200" dirty="0">
+              <a:latin typeface="Microsoft GothicNeo"/>
+              <a:ea typeface="Microsoft GothicNeo"/>
+              <a:cs typeface="Microsoft GothicNeo"/>
+            </a:endParaRPr>
+          </a:p>
+          <a:p>
+            <a:pPr marL="800100" lvl="3" indent="-228600">
+              <a:lnSpc>
+                <a:spcPct val="150000"/>
+              </a:lnSpc>
+              <a:buFont typeface="Calibri"/>
+              <a:buChar char="-"/>
+            </a:pPr>
+            <a:r>
+              <a:rPr lang="ko-KR" altLang="en-US" sz="1200" dirty="0">
+                <a:latin typeface="Microsoft GothicNeo"/>
+                <a:ea typeface="Microsoft GothicNeo"/>
+                <a:cs typeface="Microsoft GothicNeo"/>
+              </a:rPr>
+              <a:t>피처 중요도 추정 및 </a:t>
+            </a:r>
+            <a:r>
+              <a:rPr lang="en-US" altLang="ko-KR" sz="1200" dirty="0">
+                <a:latin typeface="Microsoft GothicNeo"/>
+                <a:ea typeface="Microsoft GothicNeo"/>
+                <a:cs typeface="Microsoft GothicNeo"/>
+              </a:rPr>
+              <a:t>Feature Engineering </a:t>
+            </a:r>
+            <a:r>
+              <a:rPr lang="ko-KR" altLang="en-US" sz="1200" dirty="0">
+                <a:latin typeface="Microsoft GothicNeo"/>
+                <a:ea typeface="Microsoft GothicNeo"/>
+                <a:cs typeface="Microsoft GothicNeo"/>
+              </a:rPr>
+              <a:t>방향성 확인</a:t>
+            </a:r>
+          </a:p>
+        </p:txBody>
+      </p:sp>
+      <p:sp>
+        <p:nvSpPr>
+          <p:cNvPr id="4" name="직사각형 3">
+            <a:extLst>
+              <a:ext uri="{FF2B5EF4-FFF2-40B4-BE49-F238E27FC236}">
+                <a16:creationId xmlns:a16="http://schemas.microsoft.com/office/drawing/2014/main" id="{B6EA82C2-4A28-7DA2-B136-E179F60ACD31}"/>
+              </a:ext>
+            </a:extLst>
+          </p:cNvPr>
+          <p:cNvSpPr/>
+          <p:nvPr/>
+        </p:nvSpPr>
+        <p:spPr>
+          <a:xfrm>
+            <a:off x="444500" y="1026583"/>
+            <a:ext cx="63499" cy="1291166"/>
+          </a:xfrm>
+          <a:prstGeom prst="rect">
+            <a:avLst/>
+          </a:prstGeom>
+          <a:solidFill>
+            <a:srgbClr val="C00000"/>
+          </a:solidFill>
+          <a:ln>
+            <a:noFill/>
+          </a:ln>
+        </p:spPr>
+        <p:style>
+          <a:lnRef idx="2">
+            <a:schemeClr val="accent1">
+              <a:shade val="15000"/>
+            </a:schemeClr>
+          </a:lnRef>
+          <a:fillRef idx="1">
+            <a:schemeClr val="accent1"/>
+          </a:fillRef>
+          <a:effectRef idx="0">
+            <a:schemeClr val="accent1"/>
+          </a:effectRef>
+          <a:fontRef idx="minor">
+            <a:schemeClr val="lt1"/>
+          </a:fontRef>
+        </p:style>
+        <p:txBody>
+          <a:bodyPr rtlCol="0" anchor="ctr"/>
+          <a:lstStyle/>
+          <a:p>
+            <a:pPr algn="ctr"/>
+            <a:endParaRPr lang="ko-KR" altLang="en-US"/>
+          </a:p>
+        </p:txBody>
+      </p:sp>
+      <p:pic>
+        <p:nvPicPr>
+          <p:cNvPr id="6" name="그림 5" descr="File:Santander Logo.PNG - Wikimedia Commons">
+            <a:extLst>
+              <a:ext uri="{FF2B5EF4-FFF2-40B4-BE49-F238E27FC236}">
+                <a16:creationId xmlns:a16="http://schemas.microsoft.com/office/drawing/2014/main" id="{8AE0399A-81FA-07E1-9197-9AB70F8504BF}"/>
+              </a:ext>
+            </a:extLst>
+          </p:cNvPr>
+          <p:cNvPicPr>
+            <a:picLocks noChangeAspect="1"/>
+          </p:cNvPicPr>
+          <p:nvPr/>
+        </p:nvPicPr>
+        <p:blipFill>
+          <a:blip r:embed="rId2"/>
+          <a:stretch>
+            <a:fillRect/>
+          </a:stretch>
+        </p:blipFill>
+        <p:spPr>
+          <a:xfrm>
+            <a:off x="2" y="5771641"/>
+            <a:ext cx="2901462" cy="1088332"/>
+          </a:xfrm>
+          <a:prstGeom prst="rect">
+            <a:avLst/>
+          </a:prstGeom>
+        </p:spPr>
+      </p:pic>
+      <p:pic>
+        <p:nvPicPr>
+          <p:cNvPr id="3" name="그림 2">
+            <a:extLst>
+              <a:ext uri="{FF2B5EF4-FFF2-40B4-BE49-F238E27FC236}">
+                <a16:creationId xmlns:a16="http://schemas.microsoft.com/office/drawing/2014/main" id="{D32BDD05-0482-0B31-D115-E24704A8DC42}"/>
+              </a:ext>
+            </a:extLst>
+          </p:cNvPr>
+          <p:cNvPicPr>
+            <a:picLocks noChangeAspect="1"/>
+          </p:cNvPicPr>
+          <p:nvPr/>
+        </p:nvPicPr>
+        <p:blipFill>
+          <a:blip r:embed="rId3">
+            <a:extLst>
+              <a:ext uri="{28A0092B-C50C-407E-A947-70E740481C1C}">
+                <a14:useLocalDpi xmlns:a14="http://schemas.microsoft.com/office/drawing/2010/main" val="0"/>
+              </a:ext>
+            </a:extLst>
+          </a:blip>
+          <a:srcRect/>
+          <a:stretch>
+            <a:fillRect/>
+          </a:stretch>
+        </p:blipFill>
+        <p:spPr bwMode="auto">
+          <a:xfrm>
+            <a:off x="3179520" y="3593971"/>
+            <a:ext cx="3678480" cy="2523808"/>
+          </a:xfrm>
+          <a:prstGeom prst="rect">
+            <a:avLst/>
+          </a:prstGeom>
+          <a:noFill/>
+          <a:ln>
+            <a:noFill/>
+          </a:ln>
+        </p:spPr>
+      </p:pic>
+      <p:pic>
+        <p:nvPicPr>
+          <p:cNvPr id="10" name="그림 9">
+            <a:extLst>
+              <a:ext uri="{FF2B5EF4-FFF2-40B4-BE49-F238E27FC236}">
+                <a16:creationId xmlns:a16="http://schemas.microsoft.com/office/drawing/2014/main" id="{D75C3847-BA9F-9409-EA9E-E6CD3D4318C4}"/>
+              </a:ext>
+            </a:extLst>
+          </p:cNvPr>
+          <p:cNvPicPr>
+            <a:picLocks noChangeAspect="1"/>
+          </p:cNvPicPr>
+          <p:nvPr/>
+        </p:nvPicPr>
+        <p:blipFill>
+          <a:blip r:embed="rId4">
+            <a:extLst>
+              <a:ext uri="{28A0092B-C50C-407E-A947-70E740481C1C}">
+                <a14:useLocalDpi xmlns:a14="http://schemas.microsoft.com/office/drawing/2010/main" val="0"/>
+              </a:ext>
+            </a:extLst>
+          </a:blip>
+          <a:srcRect/>
+          <a:stretch>
+            <a:fillRect/>
+          </a:stretch>
+        </p:blipFill>
+        <p:spPr bwMode="auto">
+          <a:xfrm>
+            <a:off x="6858000" y="3591661"/>
+            <a:ext cx="2305050" cy="2523808"/>
+          </a:xfrm>
+          <a:prstGeom prst="rect">
+            <a:avLst/>
+          </a:prstGeom>
+          <a:noFill/>
+          <a:ln>
+            <a:noFill/>
+          </a:ln>
+        </p:spPr>
+      </p:pic>
+      <p:sp>
+        <p:nvSpPr>
+          <p:cNvPr id="11" name="TextBox 10">
+            <a:extLst>
+              <a:ext uri="{FF2B5EF4-FFF2-40B4-BE49-F238E27FC236}">
+                <a16:creationId xmlns:a16="http://schemas.microsoft.com/office/drawing/2014/main" id="{E53926D3-F67E-7F16-7DFA-9BC796E94E6D}"/>
+              </a:ext>
+            </a:extLst>
+          </p:cNvPr>
+          <p:cNvSpPr txBox="1"/>
+          <p:nvPr/>
+        </p:nvSpPr>
+        <p:spPr>
+          <a:xfrm>
+            <a:off x="2062935" y="3298195"/>
+            <a:ext cx="8383627" cy="261610"/>
+          </a:xfrm>
+          <a:prstGeom prst="rect">
+            <a:avLst/>
+          </a:prstGeom>
+          <a:noFill/>
+        </p:spPr>
+        <p:txBody>
+          <a:bodyPr rot="0" spcFirstLastPara="0" vertOverflow="overflow" horzOverflow="overflow" vert="horz" wrap="square" lIns="91440" tIns="45720" rIns="91440" bIns="45720" numCol="1" spcCol="0" rtlCol="0" fromWordArt="0" anchor="t" anchorCtr="0" forceAA="0" compatLnSpc="1">
+            <a:prstTxWarp prst="textNoShape">
+              <a:avLst/>
+            </a:prstTxWarp>
+            <a:spAutoFit/>
+          </a:bodyPr>
+          <a:lstStyle/>
+          <a:p>
+            <a:pPr algn="ctr"/>
+            <a:r>
+              <a:rPr lang="ko-KR" altLang="en-US" sz="1100" dirty="0">
+                <a:latin typeface="Microsoft GothicNeo"/>
+                <a:ea typeface="Microsoft GothicNeo"/>
+                <a:cs typeface="Microsoft GothicNeo"/>
+              </a:rPr>
+              <a:t>[ 그림 2.</a:t>
+            </a:r>
+            <a:r>
+              <a:rPr lang="en-US" altLang="ko-KR" sz="1100" dirty="0">
+                <a:latin typeface="Microsoft GothicNeo"/>
+                <a:ea typeface="Microsoft GothicNeo"/>
+                <a:cs typeface="Microsoft GothicNeo"/>
+              </a:rPr>
+              <a:t>6</a:t>
+            </a:r>
+            <a:r>
+              <a:rPr lang="ko-KR" altLang="en-US" sz="1100" dirty="0">
+                <a:latin typeface="Microsoft GothicNeo"/>
+                <a:ea typeface="Microsoft GothicNeo"/>
+                <a:cs typeface="Microsoft GothicNeo"/>
+              </a:rPr>
+              <a:t> 로드된 </a:t>
+            </a:r>
+            <a:r>
+              <a:rPr lang="ko-KR" altLang="en-US" sz="1100" dirty="0" err="1">
+                <a:latin typeface="Microsoft GothicNeo"/>
+                <a:ea typeface="Microsoft GothicNeo"/>
+                <a:cs typeface="Microsoft GothicNeo"/>
+              </a:rPr>
+              <a:t>산탄데르</a:t>
+            </a:r>
+            <a:r>
+              <a:rPr lang="ko-KR" altLang="en-US" sz="1100" dirty="0">
+                <a:latin typeface="Microsoft GothicNeo"/>
+                <a:ea typeface="Microsoft GothicNeo"/>
+                <a:cs typeface="Microsoft GothicNeo"/>
+              </a:rPr>
+              <a:t> 데이터셋 데이터프레임 </a:t>
+            </a:r>
+            <a:r>
+              <a:rPr lang="en-US" altLang="ko-KR" sz="1100" dirty="0">
+                <a:latin typeface="Microsoft GothicNeo"/>
+                <a:ea typeface="Microsoft GothicNeo"/>
+                <a:cs typeface="Microsoft GothicNeo"/>
+              </a:rPr>
+              <a:t>describe() </a:t>
+            </a:r>
+            <a:r>
+              <a:rPr lang="ko-KR" altLang="en-US" sz="1100" dirty="0">
+                <a:latin typeface="Microsoft GothicNeo"/>
+                <a:ea typeface="Microsoft GothicNeo"/>
+                <a:cs typeface="Microsoft GothicNeo"/>
+              </a:rPr>
+              <a:t>]</a:t>
+            </a:r>
+          </a:p>
+        </p:txBody>
+      </p:sp>
+    </p:spTree>
+    <p:extLst>
+      <p:ext uri="{BB962C8B-B14F-4D97-AF65-F5344CB8AC3E}">
+        <p14:creationId xmlns:p14="http://schemas.microsoft.com/office/powerpoint/2010/main" val="895072439"/>
+      </p:ext>
+    </p:extLst>
+  </p:cSld>
+  <p:clrMapOvr>
+    <a:masterClrMapping/>
+  </p:clrMapOvr>
+</p:sld>
+</file>
+
+<file path=ppt/slides/slide8.xml><?xml version="1.0" encoding="utf-8"?>
+<p:sld xmlns:a="http://schemas.openxmlformats.org/drawingml/2006/main" xmlns:r="http://schemas.openxmlformats.org/officeDocument/2006/relationships" xmlns:p="http://schemas.openxmlformats.org/presentationml/2006/main">
+  <p:cSld>
+    <p:spTree>
+      <p:nvGrpSpPr>
+        <p:cNvPr id="1" name="">
+          <a:extLst>
+            <a:ext uri="{FF2B5EF4-FFF2-40B4-BE49-F238E27FC236}">
+              <a16:creationId xmlns:a16="http://schemas.microsoft.com/office/drawing/2014/main" id="{86DEFA4D-BA72-A3BD-32DF-0DB64826A1B8}"/>
+            </a:ext>
+          </a:extLst>
+        </p:cNvPr>
+        <p:cNvGrpSpPr/>
+        <p:nvPr/>
+      </p:nvGrpSpPr>
+      <p:grpSpPr>
+        <a:xfrm>
+          <a:off x="0" y="0"/>
+          <a:ext cx="0" cy="0"/>
+          <a:chOff x="0" y="0"/>
+          <a:chExt cx="0" cy="0"/>
+        </a:xfrm>
+      </p:grpSpPr>
+      <p:sp>
+        <p:nvSpPr>
+          <p:cNvPr id="5" name="직사각형 4">
+            <a:extLst>
+              <a:ext uri="{FF2B5EF4-FFF2-40B4-BE49-F238E27FC236}">
+                <a16:creationId xmlns:a16="http://schemas.microsoft.com/office/drawing/2014/main" id="{20FF06F9-E961-6383-D88A-48490647BF38}"/>
+              </a:ext>
+            </a:extLst>
+          </p:cNvPr>
+          <p:cNvSpPr/>
+          <p:nvPr/>
+        </p:nvSpPr>
+        <p:spPr>
+          <a:xfrm>
+            <a:off x="-169334" y="0"/>
+            <a:ext cx="12848166" cy="656167"/>
+          </a:xfrm>
+          <a:prstGeom prst="rect">
+            <a:avLst/>
+          </a:prstGeom>
+          <a:solidFill>
+            <a:schemeClr val="bg1">
+              <a:lumMod val="95000"/>
+            </a:schemeClr>
+          </a:solidFill>
+          <a:ln>
+            <a:noFill/>
+          </a:ln>
+        </p:spPr>
+        <p:style>
+          <a:lnRef idx="2">
+            <a:schemeClr val="accent1">
+              <a:shade val="15000"/>
+            </a:schemeClr>
+          </a:lnRef>
+          <a:fillRef idx="1">
+            <a:schemeClr val="accent1"/>
+          </a:fillRef>
+          <a:effectRef idx="0">
+            <a:schemeClr val="accent1"/>
+          </a:effectRef>
+          <a:fontRef idx="minor">
+            <a:schemeClr val="lt1"/>
+          </a:fontRef>
+        </p:style>
+        <p:txBody>
+          <a:bodyPr rtlCol="0" anchor="ctr"/>
+          <a:lstStyle/>
+          <a:p>
+            <a:pPr algn="ctr"/>
+            <a:endParaRPr lang="ko-KR" altLang="en-US"/>
+          </a:p>
+        </p:txBody>
+      </p:sp>
+      <p:sp>
+        <p:nvSpPr>
+          <p:cNvPr id="7" name="TextBox 6">
+            <a:extLst>
+              <a:ext uri="{FF2B5EF4-FFF2-40B4-BE49-F238E27FC236}">
+                <a16:creationId xmlns:a16="http://schemas.microsoft.com/office/drawing/2014/main" id="{135C2F57-4D3C-E717-B885-8E0DB037E8F9}"/>
+              </a:ext>
+            </a:extLst>
+          </p:cNvPr>
+          <p:cNvSpPr txBox="1"/>
+          <p:nvPr/>
+        </p:nvSpPr>
+        <p:spPr>
+          <a:xfrm>
+            <a:off x="-2" y="179916"/>
+            <a:ext cx="7217832" cy="477054"/>
+          </a:xfrm>
+          <a:prstGeom prst="rect">
+            <a:avLst/>
+          </a:prstGeom>
+          <a:noFill/>
+          <a:ln>
+            <a:noFill/>
+          </a:ln>
+        </p:spPr>
+        <p:txBody>
+          <a:bodyPr rot="0" spcFirstLastPara="0" vertOverflow="overflow" horzOverflow="overflow" vert="horz" wrap="square" lIns="91440" tIns="45720" rIns="91440" bIns="45720" numCol="1" spcCol="0" rtlCol="0" fromWordArt="0" anchor="t" anchorCtr="0" forceAA="0" compatLnSpc="1">
+            <a:prstTxWarp prst="textNoShape">
+              <a:avLst/>
+            </a:prstTxWarp>
+            <a:spAutoFit/>
+          </a:bodyPr>
+          <a:lstStyle/>
+          <a:p>
+            <a:r>
+              <a:rPr lang="ko-KR" altLang="en-US" sz="2500" dirty="0">
+                <a:solidFill>
+                  <a:srgbClr val="747474"/>
+                </a:solidFill>
+                <a:latin typeface="Microsoft GothicNeo"/>
+                <a:ea typeface="Microsoft GothicNeo"/>
+                <a:cs typeface="Arial"/>
+              </a:rPr>
+              <a:t>02-</a:t>
+            </a:r>
+            <a:r>
+              <a:rPr lang="en-US" altLang="ko-KR" sz="2500" dirty="0">
+                <a:solidFill>
+                  <a:srgbClr val="747474"/>
+                </a:solidFill>
+                <a:latin typeface="Microsoft GothicNeo"/>
+                <a:ea typeface="Microsoft GothicNeo"/>
+                <a:cs typeface="Arial"/>
+              </a:rPr>
+              <a:t>4</a:t>
+            </a:r>
+            <a:r>
+              <a:rPr lang="ko-KR" altLang="en-US" sz="2500" dirty="0">
+                <a:solidFill>
+                  <a:srgbClr val="747474"/>
+                </a:solidFill>
+                <a:latin typeface="Microsoft GothicNeo"/>
+                <a:ea typeface="Microsoft GothicNeo"/>
+                <a:cs typeface="Arial"/>
+              </a:rPr>
+              <a:t> 데이터 설명 및 주요 피처 분석</a:t>
+            </a:r>
+          </a:p>
+        </p:txBody>
+      </p:sp>
+      <p:sp>
+        <p:nvSpPr>
+          <p:cNvPr id="2" name="TextBox 1">
+            <a:extLst>
+              <a:ext uri="{FF2B5EF4-FFF2-40B4-BE49-F238E27FC236}">
+                <a16:creationId xmlns:a16="http://schemas.microsoft.com/office/drawing/2014/main" id="{11B8FDB7-5001-8E22-C062-E24A02DC9754}"/>
+              </a:ext>
+            </a:extLst>
+          </p:cNvPr>
+          <p:cNvSpPr txBox="1"/>
+          <p:nvPr/>
+        </p:nvSpPr>
+        <p:spPr>
+          <a:xfrm>
+            <a:off x="613833" y="941917"/>
+            <a:ext cx="10002506" cy="1606081"/>
+          </a:xfrm>
+          <a:prstGeom prst="rect">
+            <a:avLst/>
+          </a:prstGeom>
+          <a:noFill/>
+        </p:spPr>
+        <p:txBody>
+          <a:bodyPr rot="0" spcFirstLastPara="0" vertOverflow="overflow" horzOverflow="overflow" vert="horz" wrap="square" lIns="91440" tIns="45720" rIns="91440" bIns="45720" numCol="1" spcCol="0" rtlCol="0" fromWordArt="0" anchor="t" anchorCtr="0" forceAA="0" compatLnSpc="1">
+            <a:prstTxWarp prst="textNoShape">
+              <a:avLst/>
+            </a:prstTxWarp>
+            <a:spAutoFit/>
+          </a:bodyPr>
+          <a:lstStyle/>
+          <a:p>
+            <a:pPr marL="285750" indent="-285750">
+              <a:lnSpc>
+                <a:spcPct val="150000"/>
+              </a:lnSpc>
+              <a:buFont typeface="Wingdings"/>
+              <a:buChar char="q"/>
+            </a:pPr>
+            <a:r>
+              <a:rPr lang="ko-KR" altLang="en-US" dirty="0">
+                <a:latin typeface="Microsoft GothicNeo"/>
+                <a:ea typeface="Microsoft GothicNeo"/>
+                <a:cs typeface="Microsoft GothicNeo"/>
+              </a:rPr>
+              <a:t>주요 피처 분석 </a:t>
+            </a:r>
+          </a:p>
+          <a:p>
+            <a:pPr marL="400050" lvl="2" indent="228600">
+              <a:lnSpc>
+                <a:spcPct val="150000"/>
+              </a:lnSpc>
+              <a:buFont typeface="Wingdings,Sans-Serif"/>
+              <a:buChar char="§"/>
+            </a:pPr>
+            <a:r>
+              <a:rPr lang="ko-KR" altLang="en-US" sz="1300" dirty="0" err="1">
+                <a:latin typeface="Microsoft GothicNeo"/>
+                <a:ea typeface="Microsoft GothicNeo"/>
+                <a:cs typeface="Microsoft GothicNeo"/>
+              </a:rPr>
+              <a:t>익명화된</a:t>
+            </a:r>
+            <a:r>
+              <a:rPr lang="ko-KR" altLang="en-US" sz="1300" dirty="0">
+                <a:latin typeface="Microsoft GothicNeo"/>
+                <a:ea typeface="Microsoft GothicNeo"/>
+                <a:cs typeface="Microsoft GothicNeo"/>
+              </a:rPr>
+              <a:t> 피처 중 </a:t>
+            </a:r>
+            <a:r>
+              <a:rPr lang="ko-KR" altLang="en-US" sz="1300" dirty="0">
+                <a:solidFill>
+                  <a:srgbClr val="C00000"/>
+                </a:solidFill>
+                <a:latin typeface="Microsoft GothicNeo"/>
+                <a:ea typeface="Microsoft GothicNeo"/>
+                <a:cs typeface="Microsoft GothicNeo"/>
+              </a:rPr>
+              <a:t>고객불만족을 가장 잘 설명하는 피처를 찾아내는 과정</a:t>
+            </a:r>
+            <a:endParaRPr lang="en-US" altLang="ko-KR" sz="1300" dirty="0">
+              <a:solidFill>
+                <a:srgbClr val="C00000"/>
+              </a:solidFill>
+              <a:latin typeface="Microsoft GothicNeo"/>
+              <a:ea typeface="Microsoft GothicNeo"/>
+              <a:cs typeface="Microsoft GothicNeo"/>
+            </a:endParaRPr>
+          </a:p>
+          <a:p>
+            <a:pPr marL="400050" lvl="2" indent="228600">
+              <a:lnSpc>
+                <a:spcPct val="150000"/>
+              </a:lnSpc>
+              <a:buFont typeface="Wingdings,Sans-Serif"/>
+              <a:buChar char="§"/>
+            </a:pPr>
+            <a:r>
+              <a:rPr lang="ko-KR" altLang="en-US" sz="1200" dirty="0">
+                <a:latin typeface="Microsoft GothicNeo"/>
+                <a:ea typeface="Microsoft GothicNeo"/>
+                <a:cs typeface="Microsoft GothicNeo"/>
+              </a:rPr>
+              <a:t>해당 과정을 통해 모델 성능을 높이고</a:t>
+            </a:r>
+            <a:r>
+              <a:rPr lang="en-US" altLang="ko-KR" sz="1200" dirty="0">
+                <a:latin typeface="Microsoft GothicNeo"/>
+                <a:ea typeface="Microsoft GothicNeo"/>
+                <a:cs typeface="Microsoft GothicNeo"/>
+              </a:rPr>
+              <a:t>, </a:t>
+            </a:r>
+            <a:r>
+              <a:rPr lang="ko-KR" altLang="en-US" sz="1200" dirty="0">
+                <a:latin typeface="Microsoft GothicNeo"/>
+                <a:ea typeface="Microsoft GothicNeo"/>
+                <a:cs typeface="Microsoft GothicNeo"/>
+              </a:rPr>
+              <a:t>고객 이탈을 예방</a:t>
+            </a:r>
+            <a:endParaRPr lang="en-US" altLang="ko-KR" sz="1200" dirty="0">
+              <a:latin typeface="Microsoft GothicNeo"/>
+              <a:ea typeface="Microsoft GothicNeo"/>
+              <a:cs typeface="Microsoft GothicNeo"/>
+            </a:endParaRPr>
+          </a:p>
+          <a:p>
+            <a:pPr marL="800100" lvl="3" indent="-228600">
+              <a:lnSpc>
+                <a:spcPct val="150000"/>
+              </a:lnSpc>
+              <a:buFont typeface="Calibri"/>
+              <a:buChar char="-"/>
+            </a:pPr>
+            <a:r>
+              <a:rPr lang="ko-KR" altLang="en-US" sz="1200" dirty="0">
+                <a:latin typeface="Microsoft GothicNeo"/>
+                <a:ea typeface="Microsoft GothicNeo"/>
+                <a:cs typeface="Microsoft GothicNeo"/>
+              </a:rPr>
+              <a:t>불균형 클래스 문제를 통해 </a:t>
+            </a:r>
+            <a:r>
+              <a:rPr lang="en-US" altLang="ko-KR" sz="1200" dirty="0">
+                <a:solidFill>
+                  <a:srgbClr val="C00000"/>
+                </a:solidFill>
+                <a:latin typeface="Microsoft GothicNeo"/>
+                <a:ea typeface="Microsoft GothicNeo"/>
+                <a:cs typeface="Microsoft GothicNeo"/>
+              </a:rPr>
+              <a:t>Accuracy </a:t>
+            </a:r>
+            <a:r>
+              <a:rPr lang="ko-KR" altLang="en-US" sz="1200" dirty="0">
+                <a:solidFill>
+                  <a:srgbClr val="C00000"/>
+                </a:solidFill>
+                <a:latin typeface="Microsoft GothicNeo"/>
+                <a:ea typeface="Microsoft GothicNeo"/>
+                <a:cs typeface="Microsoft GothicNeo"/>
+              </a:rPr>
+              <a:t>보다 </a:t>
+            </a:r>
+            <a:r>
+              <a:rPr lang="en-US" altLang="ko-KR" sz="1200" dirty="0">
+                <a:solidFill>
+                  <a:srgbClr val="C00000"/>
+                </a:solidFill>
+                <a:latin typeface="Microsoft GothicNeo"/>
+                <a:ea typeface="Microsoft GothicNeo"/>
+                <a:cs typeface="Microsoft GothicNeo"/>
+              </a:rPr>
+              <a:t>ROC-AUC </a:t>
+            </a:r>
+            <a:r>
+              <a:rPr lang="ko-KR" altLang="en-US" sz="1200" dirty="0">
+                <a:solidFill>
+                  <a:srgbClr val="C00000"/>
+                </a:solidFill>
+                <a:latin typeface="Microsoft GothicNeo"/>
+                <a:ea typeface="Microsoft GothicNeo"/>
+                <a:cs typeface="Microsoft GothicNeo"/>
+              </a:rPr>
+              <a:t>지표가 더 적합</a:t>
+            </a:r>
+            <a:endParaRPr lang="en-US" altLang="ko-KR" sz="1200" dirty="0">
+              <a:solidFill>
+                <a:srgbClr val="C00000"/>
+              </a:solidFill>
+              <a:latin typeface="Microsoft GothicNeo"/>
+              <a:ea typeface="Microsoft GothicNeo"/>
+              <a:cs typeface="Microsoft GothicNeo"/>
+            </a:endParaRPr>
+          </a:p>
+          <a:p>
+            <a:pPr marL="800100" lvl="3" indent="-228600">
+              <a:lnSpc>
+                <a:spcPct val="150000"/>
+              </a:lnSpc>
+              <a:buFont typeface="Calibri"/>
+              <a:buChar char="-"/>
+            </a:pPr>
+            <a:r>
+              <a:rPr lang="ko-KR" altLang="en-US" sz="1200" dirty="0">
+                <a:latin typeface="Microsoft GothicNeo"/>
+                <a:ea typeface="Microsoft GothicNeo"/>
+                <a:cs typeface="Microsoft GothicNeo"/>
+              </a:rPr>
+              <a:t>피처중요도를 계산</a:t>
+            </a:r>
+            <a:r>
+              <a:rPr lang="en-US" altLang="ko-KR" sz="1200" dirty="0">
+                <a:latin typeface="Microsoft GothicNeo"/>
+                <a:ea typeface="Microsoft GothicNeo"/>
+                <a:cs typeface="Microsoft GothicNeo"/>
+              </a:rPr>
+              <a:t> </a:t>
+            </a:r>
+            <a:r>
+              <a:rPr lang="ko-KR" altLang="en-US" sz="1200" dirty="0">
+                <a:latin typeface="Microsoft GothicNeo"/>
+                <a:ea typeface="Microsoft GothicNeo"/>
+                <a:cs typeface="Microsoft GothicNeo"/>
+              </a:rPr>
+              <a:t>및 상관관계를 계산하여 시각화 → 주요 피처들의 히스토그램 </a:t>
+            </a:r>
+            <a:r>
+              <a:rPr lang="en-US" altLang="ko-KR" sz="1200" dirty="0">
+                <a:latin typeface="Microsoft GothicNeo"/>
+                <a:ea typeface="Microsoft GothicNeo"/>
+                <a:cs typeface="Microsoft GothicNeo"/>
+              </a:rPr>
+              <a:t>/ Heatmap</a:t>
+            </a:r>
+            <a:endParaRPr lang="ko-KR" altLang="en-US" sz="1200" dirty="0">
+              <a:latin typeface="Microsoft GothicNeo"/>
+              <a:ea typeface="Microsoft GothicNeo"/>
+              <a:cs typeface="Microsoft GothicNeo"/>
+            </a:endParaRPr>
+          </a:p>
+        </p:txBody>
+      </p:sp>
+      <p:sp>
+        <p:nvSpPr>
+          <p:cNvPr id="4" name="직사각형 3">
+            <a:extLst>
+              <a:ext uri="{FF2B5EF4-FFF2-40B4-BE49-F238E27FC236}">
+                <a16:creationId xmlns:a16="http://schemas.microsoft.com/office/drawing/2014/main" id="{C080EB27-2051-AE72-8154-D878A9EE3676}"/>
+              </a:ext>
+            </a:extLst>
+          </p:cNvPr>
+          <p:cNvSpPr/>
+          <p:nvPr/>
+        </p:nvSpPr>
+        <p:spPr>
+          <a:xfrm>
+            <a:off x="444500" y="1026583"/>
+            <a:ext cx="63499" cy="1291166"/>
+          </a:xfrm>
+          <a:prstGeom prst="rect">
+            <a:avLst/>
+          </a:prstGeom>
+          <a:solidFill>
+            <a:srgbClr val="C00000"/>
+          </a:solidFill>
+          <a:ln>
+            <a:noFill/>
+          </a:ln>
+        </p:spPr>
+        <p:style>
+          <a:lnRef idx="2">
+            <a:schemeClr val="accent1">
+              <a:shade val="15000"/>
+            </a:schemeClr>
+          </a:lnRef>
+          <a:fillRef idx="1">
+            <a:schemeClr val="accent1"/>
+          </a:fillRef>
+          <a:effectRef idx="0">
+            <a:schemeClr val="accent1"/>
+          </a:effectRef>
+          <a:fontRef idx="minor">
+            <a:schemeClr val="lt1"/>
+          </a:fontRef>
+        </p:style>
+        <p:txBody>
+          <a:bodyPr rtlCol="0" anchor="ctr"/>
+          <a:lstStyle/>
+          <a:p>
+            <a:pPr algn="ctr"/>
+            <a:endParaRPr lang="ko-KR" altLang="en-US"/>
+          </a:p>
+        </p:txBody>
+      </p:sp>
+      <p:pic>
+        <p:nvPicPr>
+          <p:cNvPr id="6" name="그림 5" descr="File:Santander Logo.PNG - Wikimedia Commons">
+            <a:extLst>
+              <a:ext uri="{FF2B5EF4-FFF2-40B4-BE49-F238E27FC236}">
+                <a16:creationId xmlns:a16="http://schemas.microsoft.com/office/drawing/2014/main" id="{20B2D0BD-D63A-2507-FA26-F66EFA12B08A}"/>
+              </a:ext>
+            </a:extLst>
+          </p:cNvPr>
+          <p:cNvPicPr>
+            <a:picLocks noChangeAspect="1"/>
+          </p:cNvPicPr>
+          <p:nvPr/>
+        </p:nvPicPr>
+        <p:blipFill>
+          <a:blip r:embed="rId2"/>
+          <a:stretch>
+            <a:fillRect/>
+          </a:stretch>
+        </p:blipFill>
+        <p:spPr>
+          <a:xfrm>
+            <a:off x="2" y="5771641"/>
+            <a:ext cx="2901462" cy="1088332"/>
+          </a:xfrm>
+          <a:prstGeom prst="rect">
+            <a:avLst/>
+          </a:prstGeom>
+        </p:spPr>
+      </p:pic>
+      <p:pic>
+        <p:nvPicPr>
+          <p:cNvPr id="8" name="그림 7">
+            <a:extLst>
+              <a:ext uri="{FF2B5EF4-FFF2-40B4-BE49-F238E27FC236}">
+                <a16:creationId xmlns:a16="http://schemas.microsoft.com/office/drawing/2014/main" id="{9B60E3F1-BD9F-4C8C-67FC-A9E7CB85997F}"/>
+              </a:ext>
+            </a:extLst>
+          </p:cNvPr>
+          <p:cNvPicPr>
+            <a:picLocks noChangeAspect="1"/>
+          </p:cNvPicPr>
+          <p:nvPr/>
+        </p:nvPicPr>
+        <p:blipFill>
+          <a:blip r:embed="rId3">
+            <a:extLst>
+              <a:ext uri="{28A0092B-C50C-407E-A947-70E740481C1C}">
+                <a14:useLocalDpi xmlns:a14="http://schemas.microsoft.com/office/drawing/2010/main" val="0"/>
+              </a:ext>
+            </a:extLst>
+          </a:blip>
+          <a:srcRect/>
+          <a:stretch>
+            <a:fillRect/>
+          </a:stretch>
+        </p:blipFill>
+        <p:spPr bwMode="auto">
+          <a:xfrm>
+            <a:off x="476249" y="3801615"/>
+            <a:ext cx="5734050" cy="2200275"/>
+          </a:xfrm>
+          <a:prstGeom prst="rect">
+            <a:avLst/>
+          </a:prstGeom>
+          <a:noFill/>
+          <a:ln>
+            <a:noFill/>
+          </a:ln>
+        </p:spPr>
+      </p:pic>
+      <p:pic>
+        <p:nvPicPr>
+          <p:cNvPr id="9" name="그림 8">
+            <a:extLst>
+              <a:ext uri="{FF2B5EF4-FFF2-40B4-BE49-F238E27FC236}">
+                <a16:creationId xmlns:a16="http://schemas.microsoft.com/office/drawing/2014/main" id="{DD1BA830-9F25-1B60-FE95-E58A169EC0A2}"/>
+              </a:ext>
+            </a:extLst>
+          </p:cNvPr>
+          <p:cNvPicPr>
+            <a:picLocks noChangeAspect="1"/>
+          </p:cNvPicPr>
+          <p:nvPr/>
+        </p:nvPicPr>
+        <p:blipFill>
+          <a:blip r:embed="rId4" cstate="print">
+            <a:extLst>
+              <a:ext uri="{28A0092B-C50C-407E-A947-70E740481C1C}">
+                <a14:useLocalDpi xmlns:a14="http://schemas.microsoft.com/office/drawing/2010/main" val="0"/>
+              </a:ext>
+            </a:extLst>
+          </a:blip>
+          <a:srcRect/>
+          <a:stretch>
+            <a:fillRect/>
+          </a:stretch>
+        </p:blipFill>
+        <p:spPr bwMode="auto">
+          <a:xfrm>
+            <a:off x="7296276" y="2547998"/>
+            <a:ext cx="3897845" cy="3584625"/>
+          </a:xfrm>
+          <a:prstGeom prst="rect">
+            <a:avLst/>
+          </a:prstGeom>
+          <a:noFill/>
+          <a:ln>
+            <a:noFill/>
+          </a:ln>
+        </p:spPr>
+      </p:pic>
+      <p:sp>
+        <p:nvSpPr>
+          <p:cNvPr id="15" name="TextBox 14">
+            <a:extLst>
+              <a:ext uri="{FF2B5EF4-FFF2-40B4-BE49-F238E27FC236}">
+                <a16:creationId xmlns:a16="http://schemas.microsoft.com/office/drawing/2014/main" id="{CC24960B-2760-B965-B26B-5104341A156F}"/>
+              </a:ext>
+            </a:extLst>
+          </p:cNvPr>
+          <p:cNvSpPr txBox="1"/>
+          <p:nvPr/>
+        </p:nvSpPr>
+        <p:spPr>
+          <a:xfrm>
+            <a:off x="397799" y="3429000"/>
+            <a:ext cx="6422230" cy="261610"/>
+          </a:xfrm>
+          <a:prstGeom prst="rect">
+            <a:avLst/>
+          </a:prstGeom>
+          <a:noFill/>
+        </p:spPr>
+        <p:txBody>
+          <a:bodyPr wrap="square">
+            <a:spAutoFit/>
+          </a:bodyPr>
+          <a:lstStyle/>
+          <a:p>
+            <a:pPr algn="ctr"/>
+            <a:r>
+              <a:rPr lang="en-US" altLang="ko-KR" sz="1100" dirty="0">
+                <a:latin typeface="Microsoft GothicNeo" panose="020B0500000101010101" pitchFamily="50" charset="-127"/>
+                <a:ea typeface="Microsoft GothicNeo" panose="020B0500000101010101" pitchFamily="50" charset="-127"/>
+                <a:cs typeface="Microsoft GothicNeo" panose="020B0500000101010101" pitchFamily="50" charset="-127"/>
+              </a:rPr>
+              <a:t>[ </a:t>
+            </a:r>
+            <a:r>
+              <a:rPr lang="ko-KR" altLang="en-US" sz="1100" dirty="0">
+                <a:latin typeface="Microsoft GothicNeo" panose="020B0500000101010101" pitchFamily="50" charset="-127"/>
+                <a:ea typeface="Microsoft GothicNeo" panose="020B0500000101010101" pitchFamily="50" charset="-127"/>
+                <a:cs typeface="Microsoft GothicNeo" panose="020B0500000101010101" pitchFamily="50" charset="-127"/>
+              </a:rPr>
+              <a:t>그림 </a:t>
+            </a:r>
+            <a:r>
+              <a:rPr lang="en-US" altLang="ko-KR" sz="1100" dirty="0">
+                <a:latin typeface="Microsoft GothicNeo" panose="020B0500000101010101" pitchFamily="50" charset="-127"/>
+                <a:ea typeface="Microsoft GothicNeo" panose="020B0500000101010101" pitchFamily="50" charset="-127"/>
+                <a:cs typeface="Microsoft GothicNeo" panose="020B0500000101010101" pitchFamily="50" charset="-127"/>
+              </a:rPr>
+              <a:t>2.7 ‘var38(</a:t>
+            </a:r>
+            <a:r>
+              <a:rPr lang="ko-KR" altLang="en-US" sz="1100" dirty="0">
+                <a:latin typeface="Microsoft GothicNeo" panose="020B0500000101010101" pitchFamily="50" charset="-127"/>
+                <a:ea typeface="Microsoft GothicNeo" panose="020B0500000101010101" pitchFamily="50" charset="-127"/>
+                <a:cs typeface="Microsoft GothicNeo" panose="020B0500000101010101" pitchFamily="50" charset="-127"/>
+              </a:rPr>
+              <a:t>자산 규모 추정</a:t>
+            </a:r>
+            <a:r>
+              <a:rPr lang="en-US" altLang="ko-KR" sz="1100" dirty="0">
+                <a:latin typeface="Microsoft GothicNeo" panose="020B0500000101010101" pitchFamily="50" charset="-127"/>
+                <a:ea typeface="Microsoft GothicNeo" panose="020B0500000101010101" pitchFamily="50" charset="-127"/>
+                <a:cs typeface="Microsoft GothicNeo" panose="020B0500000101010101" pitchFamily="50" charset="-127"/>
+              </a:rPr>
+              <a:t>)’ </a:t>
+            </a:r>
+            <a:r>
+              <a:rPr lang="ko-KR" altLang="en-US" sz="1100" dirty="0">
+                <a:latin typeface="Microsoft GothicNeo" panose="020B0500000101010101" pitchFamily="50" charset="-127"/>
+                <a:ea typeface="Microsoft GothicNeo" panose="020B0500000101010101" pitchFamily="50" charset="-127"/>
+                <a:cs typeface="Microsoft GothicNeo" panose="020B0500000101010101" pitchFamily="50" charset="-127"/>
+              </a:rPr>
+              <a:t>히스토그램</a:t>
+            </a:r>
+            <a:r>
+              <a:rPr lang="en-US" altLang="ko-KR" sz="1100" dirty="0">
+                <a:latin typeface="Microsoft GothicNeo" panose="020B0500000101010101" pitchFamily="50" charset="-127"/>
+                <a:ea typeface="Microsoft GothicNeo" panose="020B0500000101010101" pitchFamily="50" charset="-127"/>
+                <a:cs typeface="Microsoft GothicNeo" panose="020B0500000101010101" pitchFamily="50" charset="-127"/>
+              </a:rPr>
+              <a:t>, </a:t>
+            </a:r>
+            <a:r>
+              <a:rPr lang="ko-KR" altLang="en-US" sz="1100" dirty="0">
+                <a:latin typeface="Microsoft GothicNeo" panose="020B0500000101010101" pitchFamily="50" charset="-127"/>
+                <a:ea typeface="Microsoft GothicNeo" panose="020B0500000101010101" pitchFamily="50" charset="-127"/>
+                <a:cs typeface="Microsoft GothicNeo" panose="020B0500000101010101" pitchFamily="50" charset="-127"/>
+              </a:rPr>
+              <a:t>로그 변환 전후 비교 </a:t>
+            </a:r>
+            <a:r>
+              <a:rPr lang="en-US" altLang="ko-KR" sz="1100" dirty="0">
+                <a:latin typeface="Microsoft GothicNeo" panose="020B0500000101010101" pitchFamily="50" charset="-127"/>
+                <a:ea typeface="Microsoft GothicNeo" panose="020B0500000101010101" pitchFamily="50" charset="-127"/>
+                <a:cs typeface="Microsoft GothicNeo" panose="020B0500000101010101" pitchFamily="50" charset="-127"/>
+              </a:rPr>
+              <a:t>]</a:t>
+            </a:r>
+            <a:endParaRPr lang="ko-KR" altLang="en-US" sz="1100" dirty="0">
+              <a:latin typeface="Microsoft GothicNeo" panose="020B0500000101010101" pitchFamily="50" charset="-127"/>
+              <a:ea typeface="Microsoft GothicNeo" panose="020B0500000101010101" pitchFamily="50" charset="-127"/>
+              <a:cs typeface="Microsoft GothicNeo" panose="020B0500000101010101" pitchFamily="50" charset="-127"/>
+            </a:endParaRPr>
+          </a:p>
+        </p:txBody>
+      </p:sp>
+      <p:sp>
+        <p:nvSpPr>
+          <p:cNvPr id="16" name="TextBox 15">
+            <a:extLst>
+              <a:ext uri="{FF2B5EF4-FFF2-40B4-BE49-F238E27FC236}">
+                <a16:creationId xmlns:a16="http://schemas.microsoft.com/office/drawing/2014/main" id="{2113616D-342F-1035-A85C-FC19BA27CDAE}"/>
+              </a:ext>
+            </a:extLst>
+          </p:cNvPr>
+          <p:cNvSpPr txBox="1"/>
+          <p:nvPr/>
+        </p:nvSpPr>
+        <p:spPr>
+          <a:xfrm>
+            <a:off x="6034083" y="6185002"/>
+            <a:ext cx="6422230" cy="261610"/>
+          </a:xfrm>
+          <a:prstGeom prst="rect">
+            <a:avLst/>
+          </a:prstGeom>
+          <a:noFill/>
+        </p:spPr>
+        <p:txBody>
+          <a:bodyPr wrap="square">
+            <a:spAutoFit/>
+          </a:bodyPr>
+          <a:lstStyle/>
+          <a:p>
+            <a:pPr algn="ctr"/>
+            <a:r>
+              <a:rPr lang="en-US" altLang="ko-KR" sz="1100" dirty="0">
+                <a:latin typeface="Microsoft GothicNeo" panose="020B0500000101010101" pitchFamily="50" charset="-127"/>
+                <a:ea typeface="Microsoft GothicNeo" panose="020B0500000101010101" pitchFamily="50" charset="-127"/>
+                <a:cs typeface="Microsoft GothicNeo" panose="020B0500000101010101" pitchFamily="50" charset="-127"/>
+              </a:rPr>
+              <a:t>[ </a:t>
+            </a:r>
+            <a:r>
+              <a:rPr lang="ko-KR" altLang="en-US" sz="1100" dirty="0">
+                <a:latin typeface="Microsoft GothicNeo" panose="020B0500000101010101" pitchFamily="50" charset="-127"/>
+                <a:ea typeface="Microsoft GothicNeo" panose="020B0500000101010101" pitchFamily="50" charset="-127"/>
+                <a:cs typeface="Microsoft GothicNeo" panose="020B0500000101010101" pitchFamily="50" charset="-127"/>
+              </a:rPr>
+              <a:t>그림 </a:t>
+            </a:r>
+            <a:r>
+              <a:rPr lang="en-US" altLang="ko-KR" sz="1100" dirty="0">
+                <a:latin typeface="Microsoft GothicNeo" panose="020B0500000101010101" pitchFamily="50" charset="-127"/>
+                <a:ea typeface="Microsoft GothicNeo" panose="020B0500000101010101" pitchFamily="50" charset="-127"/>
+                <a:cs typeface="Microsoft GothicNeo" panose="020B0500000101010101" pitchFamily="50" charset="-127"/>
+              </a:rPr>
+              <a:t>2.8 </a:t>
+            </a:r>
+            <a:r>
+              <a:rPr lang="ko-KR" altLang="en-US" sz="1100" dirty="0">
+                <a:latin typeface="Microsoft GothicNeo" panose="020B0500000101010101" pitchFamily="50" charset="-127"/>
+                <a:ea typeface="Microsoft GothicNeo" panose="020B0500000101010101" pitchFamily="50" charset="-127"/>
+                <a:cs typeface="Microsoft GothicNeo" panose="020B0500000101010101" pitchFamily="50" charset="-127"/>
+              </a:rPr>
+              <a:t>중요도가 큰 상위 </a:t>
+            </a:r>
+            <a:r>
+              <a:rPr lang="en-US" altLang="ko-KR" sz="1100" dirty="0">
+                <a:latin typeface="Microsoft GothicNeo" panose="020B0500000101010101" pitchFamily="50" charset="-127"/>
+                <a:ea typeface="Microsoft GothicNeo" panose="020B0500000101010101" pitchFamily="50" charset="-127"/>
+                <a:cs typeface="Microsoft GothicNeo" panose="020B0500000101010101" pitchFamily="50" charset="-127"/>
+              </a:rPr>
+              <a:t>20</a:t>
+            </a:r>
+            <a:r>
+              <a:rPr lang="ko-KR" altLang="en-US" sz="1100" dirty="0">
+                <a:latin typeface="Microsoft GothicNeo" panose="020B0500000101010101" pitchFamily="50" charset="-127"/>
+                <a:ea typeface="Microsoft GothicNeo" panose="020B0500000101010101" pitchFamily="50" charset="-127"/>
+                <a:cs typeface="Microsoft GothicNeo" panose="020B0500000101010101" pitchFamily="50" charset="-127"/>
+              </a:rPr>
+              <a:t>개 피처들의 상관관계 </a:t>
+            </a:r>
+            <a:r>
+              <a:rPr lang="en-US" altLang="ko-KR" sz="1100" dirty="0">
+                <a:latin typeface="Microsoft GothicNeo" panose="020B0500000101010101" pitchFamily="50" charset="-127"/>
+                <a:ea typeface="Microsoft GothicNeo" panose="020B0500000101010101" pitchFamily="50" charset="-127"/>
+                <a:cs typeface="Microsoft GothicNeo" panose="020B0500000101010101" pitchFamily="50" charset="-127"/>
+              </a:rPr>
+              <a:t>Heatmap </a:t>
+            </a:r>
+            <a:r>
+              <a:rPr lang="ko-KR" altLang="en-US" sz="1100" dirty="0">
+                <a:latin typeface="Microsoft GothicNeo" panose="020B0500000101010101" pitchFamily="50" charset="-127"/>
+                <a:ea typeface="Microsoft GothicNeo" panose="020B0500000101010101" pitchFamily="50" charset="-127"/>
+                <a:cs typeface="Microsoft GothicNeo" panose="020B0500000101010101" pitchFamily="50" charset="-127"/>
+              </a:rPr>
+              <a:t>시각화 </a:t>
+            </a:r>
+            <a:r>
+              <a:rPr lang="en-US" altLang="ko-KR" sz="1100" dirty="0">
+                <a:latin typeface="Microsoft GothicNeo" panose="020B0500000101010101" pitchFamily="50" charset="-127"/>
+                <a:ea typeface="Microsoft GothicNeo" panose="020B0500000101010101" pitchFamily="50" charset="-127"/>
+                <a:cs typeface="Microsoft GothicNeo" panose="020B0500000101010101" pitchFamily="50" charset="-127"/>
+              </a:rPr>
+              <a:t>]</a:t>
+            </a:r>
+            <a:endParaRPr lang="ko-KR" altLang="en-US" sz="1100" dirty="0">
+              <a:latin typeface="Microsoft GothicNeo" panose="020B0500000101010101" pitchFamily="50" charset="-127"/>
+              <a:ea typeface="Microsoft GothicNeo" panose="020B0500000101010101" pitchFamily="50" charset="-127"/>
+              <a:cs typeface="Microsoft GothicNeo" panose="020B0500000101010101" pitchFamily="50" charset="-127"/>
+            </a:endParaRPr>
+          </a:p>
+        </p:txBody>
+      </p:sp>
+    </p:spTree>
+    <p:extLst>
+      <p:ext uri="{BB962C8B-B14F-4D97-AF65-F5344CB8AC3E}">
+        <p14:creationId xmlns:p14="http://schemas.microsoft.com/office/powerpoint/2010/main" val="59079990"/>
+      </p:ext>
+    </p:extLst>
+  </p:cSld>
+  <p:clrMapOvr>
+    <a:masterClrMapping/>
+  </p:clrMapOvr>
+</p:sld>
+</file>
+
+<file path=ppt/slides/slide9.xml><?xml version="1.0" encoding="utf-8"?>
+<p:sld xmlns:a="http://schemas.openxmlformats.org/drawingml/2006/main" xmlns:r="http://schemas.openxmlformats.org/officeDocument/2006/relationships" xmlns:p="http://schemas.openxmlformats.org/presentationml/2006/main">
+  <p:cSld>
+    <p:spTree>
+      <p:nvGrpSpPr>
+        <p:cNvPr id="1" name="">
+          <a:extLst>
+            <a:ext uri="{FF2B5EF4-FFF2-40B4-BE49-F238E27FC236}">
+              <a16:creationId xmlns:a16="http://schemas.microsoft.com/office/drawing/2014/main" id="{F2D6B1F3-7FDB-F66A-09C6-2FF7B4589C0D}"/>
+            </a:ext>
+          </a:extLst>
+        </p:cNvPr>
+        <p:cNvGrpSpPr/>
+        <p:nvPr/>
+      </p:nvGrpSpPr>
+      <p:grpSpPr>
+        <a:xfrm>
+          <a:off x="0" y="0"/>
+          <a:ext cx="0" cy="0"/>
+          <a:chOff x="0" y="0"/>
+          <a:chExt cx="0" cy="0"/>
+        </a:xfrm>
+      </p:grpSpPr>
+      <p:sp>
+        <p:nvSpPr>
+          <p:cNvPr id="5" name="직사각형 4">
+            <a:extLst>
+              <a:ext uri="{FF2B5EF4-FFF2-40B4-BE49-F238E27FC236}">
+                <a16:creationId xmlns:a16="http://schemas.microsoft.com/office/drawing/2014/main" id="{C5F054DB-2E64-CA07-641F-F8B38C8ECF5D}"/>
+              </a:ext>
+            </a:extLst>
+          </p:cNvPr>
+          <p:cNvSpPr/>
+          <p:nvPr/>
+        </p:nvSpPr>
+        <p:spPr>
+          <a:xfrm>
+            <a:off x="-169334" y="0"/>
+            <a:ext cx="12848166" cy="656167"/>
+          </a:xfrm>
+          <a:prstGeom prst="rect">
+            <a:avLst/>
+          </a:prstGeom>
+          <a:solidFill>
+            <a:schemeClr val="bg1">
+              <a:lumMod val="95000"/>
+            </a:schemeClr>
+          </a:solidFill>
+          <a:ln>
+            <a:noFill/>
+          </a:ln>
+        </p:spPr>
+        <p:style>
+          <a:lnRef idx="2">
+            <a:schemeClr val="accent1">
+              <a:shade val="15000"/>
+            </a:schemeClr>
+          </a:lnRef>
+          <a:fillRef idx="1">
+            <a:schemeClr val="accent1"/>
+          </a:fillRef>
+          <a:effectRef idx="0">
+            <a:schemeClr val="accent1"/>
+          </a:effectRef>
+          <a:fontRef idx="minor">
+            <a:schemeClr val="lt1"/>
+          </a:fontRef>
+        </p:style>
+        <p:txBody>
+          <a:bodyPr rtlCol="0" anchor="ctr"/>
+          <a:lstStyle/>
+          <a:p>
+            <a:pPr algn="ctr"/>
+            <a:endParaRPr lang="ko-KR" altLang="en-US"/>
+          </a:p>
+        </p:txBody>
+      </p:sp>
+      <p:sp>
+        <p:nvSpPr>
+          <p:cNvPr id="7" name="TextBox 6">
+            <a:extLst>
+              <a:ext uri="{FF2B5EF4-FFF2-40B4-BE49-F238E27FC236}">
+                <a16:creationId xmlns:a16="http://schemas.microsoft.com/office/drawing/2014/main" id="{5B67D94F-F4FA-F999-FFC5-C97C8DF26B45}"/>
+              </a:ext>
+            </a:extLst>
+          </p:cNvPr>
+          <p:cNvSpPr txBox="1"/>
+          <p:nvPr/>
+        </p:nvSpPr>
+        <p:spPr>
+          <a:xfrm>
+            <a:off x="-2" y="179916"/>
+            <a:ext cx="7217832" cy="477054"/>
+          </a:xfrm>
+          <a:prstGeom prst="rect">
+            <a:avLst/>
+          </a:prstGeom>
+          <a:noFill/>
+          <a:ln>
+            <a:noFill/>
+          </a:ln>
+        </p:spPr>
+        <p:txBody>
+          <a:bodyPr rot="0" spcFirstLastPara="0" vertOverflow="overflow" horzOverflow="overflow" vert="horz" wrap="square" lIns="91440" tIns="45720" rIns="91440" bIns="45720" numCol="1" spcCol="0" rtlCol="0" fromWordArt="0" anchor="t" anchorCtr="0" forceAA="0" compatLnSpc="1">
+            <a:prstTxWarp prst="textNoShape">
+              <a:avLst/>
+            </a:prstTxWarp>
+            <a:spAutoFit/>
+          </a:bodyPr>
+          <a:lstStyle/>
+          <a:p>
+            <a:r>
+              <a:rPr lang="ko-KR" altLang="en-US" sz="2500" dirty="0">
+                <a:solidFill>
+                  <a:srgbClr val="747474"/>
+                </a:solidFill>
+                <a:latin typeface="Microsoft GothicNeo"/>
+                <a:ea typeface="Microsoft GothicNeo"/>
+                <a:cs typeface="Arial"/>
+              </a:rPr>
+              <a:t>02-</a:t>
+            </a:r>
+            <a:r>
+              <a:rPr lang="en-US" altLang="ko-KR" sz="2500" dirty="0">
+                <a:solidFill>
+                  <a:srgbClr val="747474"/>
+                </a:solidFill>
+                <a:latin typeface="Microsoft GothicNeo"/>
+                <a:ea typeface="Microsoft GothicNeo"/>
+                <a:cs typeface="Arial"/>
+              </a:rPr>
+              <a:t>4</a:t>
+            </a:r>
+            <a:r>
+              <a:rPr lang="ko-KR" altLang="en-US" sz="2500" dirty="0">
+                <a:solidFill>
+                  <a:srgbClr val="747474"/>
+                </a:solidFill>
+                <a:latin typeface="Microsoft GothicNeo"/>
+                <a:ea typeface="Microsoft GothicNeo"/>
+                <a:cs typeface="Arial"/>
+              </a:rPr>
+              <a:t> 데이터 설명 및 주요 피처 분석</a:t>
+            </a:r>
+          </a:p>
+        </p:txBody>
+      </p:sp>
+      <p:sp>
+        <p:nvSpPr>
+          <p:cNvPr id="2" name="TextBox 1">
+            <a:extLst>
+              <a:ext uri="{FF2B5EF4-FFF2-40B4-BE49-F238E27FC236}">
+                <a16:creationId xmlns:a16="http://schemas.microsoft.com/office/drawing/2014/main" id="{D631F592-D378-3A13-8A9B-192387619C89}"/>
+              </a:ext>
+            </a:extLst>
+          </p:cNvPr>
+          <p:cNvSpPr txBox="1"/>
+          <p:nvPr/>
+        </p:nvSpPr>
+        <p:spPr>
+          <a:xfrm>
+            <a:off x="613833" y="941917"/>
+            <a:ext cx="10002506" cy="2506327"/>
+          </a:xfrm>
+          <a:prstGeom prst="rect">
+            <a:avLst/>
+          </a:prstGeom>
+          <a:noFill/>
+        </p:spPr>
+        <p:txBody>
+          <a:bodyPr rot="0" spcFirstLastPara="0" vertOverflow="overflow" horzOverflow="overflow" vert="horz" wrap="square" lIns="91440" tIns="45720" rIns="91440" bIns="45720" numCol="1" spcCol="0" rtlCol="0" fromWordArt="0" anchor="t" anchorCtr="0" forceAA="0" compatLnSpc="1">
+            <a:prstTxWarp prst="textNoShape">
+              <a:avLst/>
+            </a:prstTxWarp>
+            <a:spAutoFit/>
+          </a:bodyPr>
+          <a:lstStyle/>
+          <a:p>
+            <a:pPr marL="285750" indent="-285750">
+              <a:lnSpc>
+                <a:spcPct val="150000"/>
+              </a:lnSpc>
+              <a:buFont typeface="Wingdings"/>
+              <a:buChar char="q"/>
+            </a:pPr>
+            <a:r>
+              <a:rPr lang="ko-KR" altLang="en-US" dirty="0">
+                <a:latin typeface="Microsoft GothicNeo"/>
+                <a:ea typeface="Microsoft GothicNeo"/>
+                <a:cs typeface="Microsoft GothicNeo"/>
+              </a:rPr>
+              <a:t>주요 피처 분석을 통한 시사점 </a:t>
+            </a:r>
+          </a:p>
+          <a:p>
+            <a:pPr marL="400050" lvl="2" indent="228600">
+              <a:lnSpc>
+                <a:spcPct val="150000"/>
+              </a:lnSpc>
+              <a:buFont typeface="Wingdings,Sans-Serif"/>
+              <a:buChar char="§"/>
+            </a:pPr>
+            <a:r>
+              <a:rPr lang="ko-KR" altLang="en-US" sz="1300" dirty="0" err="1">
+                <a:latin typeface="Microsoft GothicNeo"/>
+                <a:ea typeface="Microsoft GothicNeo"/>
+                <a:cs typeface="Microsoft GothicNeo"/>
+              </a:rPr>
+              <a:t>익명화된</a:t>
+            </a:r>
+            <a:r>
+              <a:rPr lang="ko-KR" altLang="en-US" sz="1300" dirty="0">
+                <a:latin typeface="Microsoft GothicNeo"/>
+                <a:ea typeface="Microsoft GothicNeo"/>
+                <a:cs typeface="Microsoft GothicNeo"/>
+              </a:rPr>
+              <a:t> 피처 중 일부는 불만족 고객을 강하게 구분하는 경향을 보였음</a:t>
+            </a:r>
+            <a:endParaRPr lang="en-US" altLang="ko-KR" sz="1300" dirty="0">
+              <a:latin typeface="Microsoft GothicNeo"/>
+              <a:ea typeface="Microsoft GothicNeo"/>
+              <a:cs typeface="Microsoft GothicNeo"/>
+            </a:endParaRPr>
+          </a:p>
+          <a:p>
+            <a:pPr marL="400050" lvl="2" indent="228600">
+              <a:lnSpc>
+                <a:spcPct val="150000"/>
+              </a:lnSpc>
+              <a:buFont typeface="Wingdings,Sans-Serif"/>
+              <a:buChar char="§"/>
+            </a:pPr>
+            <a:r>
+              <a:rPr lang="en-US" altLang="ko-KR" sz="1300" dirty="0">
+                <a:latin typeface="Microsoft GothicNeo"/>
+                <a:ea typeface="Microsoft GothicNeo"/>
+                <a:cs typeface="Microsoft GothicNeo"/>
+              </a:rPr>
+              <a:t>PCA </a:t>
+            </a:r>
+            <a:r>
+              <a:rPr lang="ko-KR" altLang="en-US" sz="1300" dirty="0">
+                <a:latin typeface="Microsoft GothicNeo"/>
+                <a:ea typeface="Microsoft GothicNeo"/>
+                <a:cs typeface="Microsoft GothicNeo"/>
+              </a:rPr>
+              <a:t>분석을 통해 피처 간 상관관계를 줄이고</a:t>
+            </a:r>
+            <a:r>
+              <a:rPr lang="en-US" altLang="ko-KR" sz="1300" dirty="0">
+                <a:latin typeface="Microsoft GothicNeo"/>
+                <a:ea typeface="Microsoft GothicNeo"/>
+                <a:cs typeface="Microsoft GothicNeo"/>
+              </a:rPr>
+              <a:t>, </a:t>
+            </a:r>
+            <a:r>
+              <a:rPr lang="ko-KR" altLang="en-US" sz="1300" dirty="0">
+                <a:latin typeface="Microsoft GothicNeo"/>
+                <a:ea typeface="Microsoft GothicNeo"/>
+                <a:cs typeface="Microsoft GothicNeo"/>
+              </a:rPr>
+              <a:t>불만족 고객을 설명하는 주요 축 도출 가능</a:t>
+            </a:r>
+            <a:endParaRPr lang="en-US" altLang="ko-KR" sz="1300" dirty="0">
+              <a:latin typeface="Microsoft GothicNeo"/>
+              <a:ea typeface="Microsoft GothicNeo"/>
+              <a:cs typeface="Microsoft GothicNeo"/>
+            </a:endParaRPr>
+          </a:p>
+          <a:p>
+            <a:pPr marL="400050" lvl="2" indent="228600">
+              <a:lnSpc>
+                <a:spcPct val="150000"/>
+              </a:lnSpc>
+              <a:buFont typeface="Wingdings,Sans-Serif"/>
+              <a:buChar char="§"/>
+            </a:pPr>
+            <a:r>
+              <a:rPr lang="en-US" altLang="ko-KR" sz="1300" dirty="0">
+                <a:latin typeface="Microsoft GothicNeo"/>
+                <a:ea typeface="Microsoft GothicNeo"/>
+                <a:cs typeface="Microsoft GothicNeo"/>
+              </a:rPr>
+              <a:t>SMOTE</a:t>
+            </a:r>
+            <a:r>
+              <a:rPr lang="ko-KR" altLang="en-US" sz="1300" dirty="0">
+                <a:latin typeface="Microsoft GothicNeo"/>
+                <a:ea typeface="Microsoft GothicNeo"/>
+                <a:cs typeface="Microsoft GothicNeo"/>
+              </a:rPr>
+              <a:t> 기법을 활용하여 학습 데이터 균형을 맞추되</a:t>
+            </a:r>
+            <a:r>
+              <a:rPr lang="en-US" altLang="ko-KR" sz="1300" dirty="0">
+                <a:latin typeface="Microsoft GothicNeo"/>
+                <a:ea typeface="Microsoft GothicNeo"/>
+                <a:cs typeface="Microsoft GothicNeo"/>
+              </a:rPr>
+              <a:t>, </a:t>
+            </a:r>
+            <a:r>
+              <a:rPr lang="ko-KR" altLang="en-US" sz="1300" dirty="0">
+                <a:latin typeface="Microsoft GothicNeo"/>
+                <a:ea typeface="Microsoft GothicNeo"/>
+                <a:cs typeface="Microsoft GothicNeo"/>
+              </a:rPr>
+              <a:t>어떤 피처가 잘 작동하는지 확인 필요</a:t>
+            </a:r>
+            <a:endParaRPr lang="en-US" altLang="ko-KR" sz="1300" dirty="0">
+              <a:latin typeface="Microsoft GothicNeo"/>
+              <a:ea typeface="Microsoft GothicNeo"/>
+              <a:cs typeface="Microsoft GothicNeo"/>
+            </a:endParaRPr>
+          </a:p>
+          <a:p>
+            <a:pPr marL="400050" lvl="2" indent="228600">
+              <a:lnSpc>
+                <a:spcPct val="150000"/>
+              </a:lnSpc>
+              <a:buFont typeface="Wingdings,Sans-Serif"/>
+              <a:buChar char="§"/>
+            </a:pPr>
+            <a:r>
+              <a:rPr lang="ko-KR" altLang="en-US" sz="1300" dirty="0" err="1">
+                <a:latin typeface="Microsoft GothicNeo"/>
+                <a:ea typeface="Microsoft GothicNeo"/>
+                <a:cs typeface="Microsoft GothicNeo"/>
+              </a:rPr>
+              <a:t>산탄데르</a:t>
+            </a:r>
+            <a:r>
+              <a:rPr lang="ko-KR" altLang="en-US" sz="1300" dirty="0">
+                <a:latin typeface="Microsoft GothicNeo"/>
+                <a:ea typeface="Microsoft GothicNeo"/>
+                <a:cs typeface="Microsoft GothicNeo"/>
+              </a:rPr>
+              <a:t> 은행의 실무적 인사이트 </a:t>
+            </a:r>
+            <a:r>
+              <a:rPr lang="en-US" altLang="ko-KR" sz="1300" dirty="0">
+                <a:latin typeface="Microsoft GothicNeo"/>
+                <a:ea typeface="Microsoft GothicNeo"/>
+                <a:cs typeface="Microsoft GothicNeo"/>
+              </a:rPr>
+              <a:t>:</a:t>
+            </a:r>
+          </a:p>
+          <a:p>
+            <a:pPr marL="800100" lvl="3" indent="-228600">
+              <a:lnSpc>
+                <a:spcPct val="150000"/>
+              </a:lnSpc>
+              <a:buFont typeface="Calibri"/>
+              <a:buChar char="-"/>
+            </a:pPr>
+            <a:r>
+              <a:rPr lang="ko-KR" altLang="en-US" sz="1200" dirty="0">
+                <a:latin typeface="Microsoft GothicNeo"/>
+                <a:ea typeface="Microsoft GothicNeo"/>
+                <a:cs typeface="Microsoft GothicNeo"/>
+              </a:rPr>
+              <a:t>주요 피처를 중심으로 불만족 고객 조기 탐지</a:t>
+            </a:r>
+            <a:endParaRPr lang="en-US" altLang="ko-KR" sz="1200" dirty="0">
+              <a:latin typeface="Microsoft GothicNeo"/>
+              <a:ea typeface="Microsoft GothicNeo"/>
+              <a:cs typeface="Microsoft GothicNeo"/>
+            </a:endParaRPr>
+          </a:p>
+          <a:p>
+            <a:pPr marL="800100" lvl="3" indent="-228600">
+              <a:lnSpc>
+                <a:spcPct val="150000"/>
+              </a:lnSpc>
+              <a:buFont typeface="Calibri"/>
+              <a:buChar char="-"/>
+            </a:pPr>
+            <a:r>
+              <a:rPr lang="ko-KR" altLang="en-US" sz="1200" dirty="0">
+                <a:latin typeface="Microsoft GothicNeo"/>
+                <a:ea typeface="Microsoft GothicNeo"/>
+                <a:cs typeface="Microsoft GothicNeo"/>
+              </a:rPr>
+              <a:t>모델이 강조하는 피처들을 실제 서비스 개선지표로 활용</a:t>
+            </a:r>
+            <a:endParaRPr lang="en-US" altLang="ko-KR" sz="1200" dirty="0">
+              <a:latin typeface="Microsoft GothicNeo"/>
+              <a:ea typeface="Microsoft GothicNeo"/>
+              <a:cs typeface="Microsoft GothicNeo"/>
+            </a:endParaRPr>
+          </a:p>
+          <a:p>
+            <a:pPr marL="800100" lvl="3" indent="-228600">
+              <a:lnSpc>
+                <a:spcPct val="150000"/>
+              </a:lnSpc>
+              <a:buFont typeface="Calibri"/>
+              <a:buChar char="-"/>
+            </a:pPr>
+            <a:r>
+              <a:rPr lang="en-US" altLang="ko-KR" sz="1200" dirty="0">
+                <a:latin typeface="Microsoft GothicNeo"/>
+                <a:ea typeface="Microsoft GothicNeo"/>
+                <a:cs typeface="Microsoft GothicNeo"/>
+              </a:rPr>
+              <a:t>‘</a:t>
+            </a:r>
+            <a:r>
+              <a:rPr lang="ko-KR" altLang="en-US" sz="1200" dirty="0">
+                <a:latin typeface="Microsoft GothicNeo"/>
+                <a:ea typeface="Microsoft GothicNeo"/>
+                <a:cs typeface="Microsoft GothicNeo"/>
+              </a:rPr>
+              <a:t>단순히 모델이 불만족 고객이라고 예측했다</a:t>
+            </a:r>
+            <a:r>
+              <a:rPr lang="en-US" altLang="ko-KR" sz="1200" dirty="0">
+                <a:latin typeface="Microsoft GothicNeo"/>
+                <a:ea typeface="Microsoft GothicNeo"/>
+                <a:cs typeface="Microsoft GothicNeo"/>
+              </a:rPr>
+              <a:t>’</a:t>
+            </a:r>
+            <a:r>
+              <a:rPr lang="ko-KR" altLang="en-US" sz="1200" dirty="0">
+                <a:latin typeface="Microsoft GothicNeo"/>
+                <a:ea typeface="Microsoft GothicNeo"/>
+                <a:cs typeface="Microsoft GothicNeo"/>
+              </a:rPr>
+              <a:t>가 아니라</a:t>
+            </a:r>
+            <a:r>
+              <a:rPr lang="en-US" altLang="ko-KR" sz="1200" dirty="0">
+                <a:latin typeface="Microsoft GothicNeo"/>
+                <a:ea typeface="Microsoft GothicNeo"/>
+                <a:cs typeface="Microsoft GothicNeo"/>
+              </a:rPr>
+              <a:t>,</a:t>
+            </a:r>
+            <a:r>
+              <a:rPr lang="ko-KR" altLang="en-US" sz="1200" dirty="0">
+                <a:latin typeface="Microsoft GothicNeo"/>
+                <a:ea typeface="Microsoft GothicNeo"/>
+                <a:cs typeface="Microsoft GothicNeo"/>
+              </a:rPr>
+              <a:t> 어떤 요인 때문에 불만족 가능성이 </a:t>
+            </a:r>
+            <a:r>
+              <a:rPr lang="ko-KR" altLang="en-US" sz="1200" dirty="0" err="1">
+                <a:latin typeface="Microsoft GothicNeo"/>
+                <a:ea typeface="Microsoft GothicNeo"/>
+                <a:cs typeface="Microsoft GothicNeo"/>
+              </a:rPr>
+              <a:t>높은지</a:t>
+            </a:r>
+            <a:r>
+              <a:rPr lang="ko-KR" altLang="en-US" sz="1200" dirty="0">
+                <a:latin typeface="Microsoft GothicNeo"/>
+                <a:ea typeface="Microsoft GothicNeo"/>
+                <a:cs typeface="Microsoft GothicNeo"/>
+              </a:rPr>
+              <a:t> 설명이 되어야 함</a:t>
+            </a:r>
+          </a:p>
+        </p:txBody>
+      </p:sp>
+      <p:sp>
+        <p:nvSpPr>
+          <p:cNvPr id="4" name="직사각형 3">
+            <a:extLst>
+              <a:ext uri="{FF2B5EF4-FFF2-40B4-BE49-F238E27FC236}">
+                <a16:creationId xmlns:a16="http://schemas.microsoft.com/office/drawing/2014/main" id="{EA0EE109-6E83-1216-F2C0-FECAA7FD5BFE}"/>
+              </a:ext>
+            </a:extLst>
+          </p:cNvPr>
+          <p:cNvSpPr/>
+          <p:nvPr/>
+        </p:nvSpPr>
+        <p:spPr>
+          <a:xfrm>
+            <a:off x="444500" y="1026583"/>
+            <a:ext cx="63499" cy="1291166"/>
+          </a:xfrm>
+          <a:prstGeom prst="rect">
+            <a:avLst/>
+          </a:prstGeom>
+          <a:solidFill>
+            <a:srgbClr val="C00000"/>
+          </a:solidFill>
+          <a:ln>
+            <a:noFill/>
+          </a:ln>
+        </p:spPr>
+        <p:style>
+          <a:lnRef idx="2">
+            <a:schemeClr val="accent1">
+              <a:shade val="15000"/>
+            </a:schemeClr>
+          </a:lnRef>
+          <a:fillRef idx="1">
+            <a:schemeClr val="accent1"/>
+          </a:fillRef>
+          <a:effectRef idx="0">
+            <a:schemeClr val="accent1"/>
+          </a:effectRef>
+          <a:fontRef idx="minor">
+            <a:schemeClr val="lt1"/>
+          </a:fontRef>
+        </p:style>
+        <p:txBody>
+          <a:bodyPr rtlCol="0" anchor="ctr"/>
+          <a:lstStyle/>
+          <a:p>
+            <a:pPr algn="ctr"/>
+            <a:endParaRPr lang="ko-KR" altLang="en-US"/>
+          </a:p>
+        </p:txBody>
+      </p:sp>
+      <p:pic>
+        <p:nvPicPr>
+          <p:cNvPr id="6" name="그림 5" descr="File:Santander Logo.PNG - Wikimedia Commons">
+            <a:extLst>
+              <a:ext uri="{FF2B5EF4-FFF2-40B4-BE49-F238E27FC236}">
+                <a16:creationId xmlns:a16="http://schemas.microsoft.com/office/drawing/2014/main" id="{4C516A5A-D44C-F4A2-C65C-7879755F0C14}"/>
+              </a:ext>
+            </a:extLst>
+          </p:cNvPr>
+          <p:cNvPicPr>
+            <a:picLocks noChangeAspect="1"/>
+          </p:cNvPicPr>
+          <p:nvPr/>
+        </p:nvPicPr>
+        <p:blipFill>
+          <a:blip r:embed="rId2"/>
+          <a:stretch>
+            <a:fillRect/>
+          </a:stretch>
+        </p:blipFill>
+        <p:spPr>
+          <a:xfrm>
+            <a:off x="2" y="5771641"/>
+            <a:ext cx="2901462" cy="1088332"/>
+          </a:xfrm>
+          <a:prstGeom prst="rect">
+            <a:avLst/>
+          </a:prstGeom>
+        </p:spPr>
+      </p:pic>
+      <p:pic>
+        <p:nvPicPr>
+          <p:cNvPr id="2052" name="Picture 4" descr="Santander Customer Satisfaction">
+            <a:extLst>
+              <a:ext uri="{FF2B5EF4-FFF2-40B4-BE49-F238E27FC236}">
+                <a16:creationId xmlns:a16="http://schemas.microsoft.com/office/drawing/2014/main" id="{7AE59B84-069F-2FA8-1C28-BCDD32D968CD}"/>
+              </a:ext>
+            </a:extLst>
+          </p:cNvPr>
+          <p:cNvPicPr>
+            <a:picLocks noChangeAspect="1" noChangeArrowheads="1"/>
+          </p:cNvPicPr>
+          <p:nvPr/>
+        </p:nvPicPr>
+        <p:blipFill>
+          <a:blip r:embed="rId3">
+            <a:extLst>
+              <a:ext uri="{28A0092B-C50C-407E-A947-70E740481C1C}">
+                <a14:useLocalDpi xmlns:a14="http://schemas.microsoft.com/office/drawing/2010/main" val="0"/>
+              </a:ext>
+            </a:extLst>
+          </a:blip>
+          <a:srcRect/>
+          <a:stretch>
+            <a:fillRect/>
+          </a:stretch>
+        </p:blipFill>
+        <p:spPr bwMode="auto">
+          <a:xfrm>
+            <a:off x="4261610" y="4042639"/>
+            <a:ext cx="3621352" cy="1088332"/>
+          </a:xfrm>
+          <a:prstGeom prst="rect">
+            <a:avLst/>
+          </a:prstGeom>
+          <a:noFill/>
+          <a:extLst>
+            <a:ext uri="{909E8E84-426E-40DD-AFC4-6F175D3DCCD1}">
+              <a14:hiddenFill xmlns:a14="http://schemas.microsoft.com/office/drawing/2010/main">
+                <a:solidFill>
+                  <a:srgbClr val="FFFFFF"/>
+                </a:solidFill>
+              </a14:hiddenFill>
+            </a:ext>
+          </a:extLst>
+        </p:spPr>
+      </p:pic>
+      <p:sp>
+        <p:nvSpPr>
+          <p:cNvPr id="3" name="화살표: 오각형 2">
+            <a:extLst>
+              <a:ext uri="{FF2B5EF4-FFF2-40B4-BE49-F238E27FC236}">
+                <a16:creationId xmlns:a16="http://schemas.microsoft.com/office/drawing/2014/main" id="{AE22E3FF-6E49-EC4B-C996-A0B581D6735B}"/>
+              </a:ext>
+            </a:extLst>
+          </p:cNvPr>
+          <p:cNvSpPr/>
+          <p:nvPr/>
+        </p:nvSpPr>
+        <p:spPr>
+          <a:xfrm>
+            <a:off x="1282771" y="3908461"/>
+            <a:ext cx="2829464" cy="1449238"/>
+          </a:xfrm>
+          <a:prstGeom prst="homePlate">
+            <a:avLst>
+              <a:gd name="adj" fmla="val 23710"/>
+            </a:avLst>
+          </a:prstGeom>
+          <a:solidFill>
+            <a:srgbClr val="C00000"/>
+          </a:solidFill>
+          <a:ln>
+            <a:noFill/>
+          </a:ln>
+        </p:spPr>
+        <p:style>
+          <a:lnRef idx="2">
+            <a:schemeClr val="accent1">
+              <a:shade val="15000"/>
+            </a:schemeClr>
+          </a:lnRef>
+          <a:fillRef idx="1">
+            <a:schemeClr val="accent1"/>
+          </a:fillRef>
+          <a:effectRef idx="0">
+            <a:schemeClr val="accent1"/>
+          </a:effectRef>
+          <a:fontRef idx="minor">
+            <a:schemeClr val="lt1"/>
+          </a:fontRef>
+        </p:style>
+        <p:txBody>
+          <a:bodyPr rtlCol="0" anchor="ctr"/>
+          <a:lstStyle/>
+          <a:p>
+            <a:pPr algn="ctr"/>
+            <a:endParaRPr lang="ko-KR" altLang="en-US" dirty="0"/>
+          </a:p>
+        </p:txBody>
+      </p:sp>
+      <p:sp>
+        <p:nvSpPr>
+          <p:cNvPr id="10" name="화살표: 오각형 9">
+            <a:extLst>
+              <a:ext uri="{FF2B5EF4-FFF2-40B4-BE49-F238E27FC236}">
+                <a16:creationId xmlns:a16="http://schemas.microsoft.com/office/drawing/2014/main" id="{E8F47056-9D03-9274-FB14-623279A1B72A}"/>
+              </a:ext>
+            </a:extLst>
+          </p:cNvPr>
+          <p:cNvSpPr/>
+          <p:nvPr/>
+        </p:nvSpPr>
+        <p:spPr>
+          <a:xfrm rot="10800000">
+            <a:off x="8032337" y="3862186"/>
+            <a:ext cx="2829464" cy="1449238"/>
+          </a:xfrm>
+          <a:prstGeom prst="homePlate">
+            <a:avLst>
+              <a:gd name="adj" fmla="val 37381"/>
+            </a:avLst>
+          </a:prstGeom>
+          <a:solidFill>
+            <a:srgbClr val="C00000"/>
+          </a:solidFill>
+          <a:ln>
+            <a:noFill/>
+          </a:ln>
+        </p:spPr>
+        <p:style>
+          <a:lnRef idx="2">
+            <a:schemeClr val="accent1">
+              <a:shade val="15000"/>
+            </a:schemeClr>
+          </a:lnRef>
+          <a:fillRef idx="1">
+            <a:schemeClr val="accent1"/>
+          </a:fillRef>
+          <a:effectRef idx="0">
+            <a:schemeClr val="accent1"/>
+          </a:effectRef>
+          <a:fontRef idx="minor">
+            <a:schemeClr val="lt1"/>
+          </a:fontRef>
+        </p:style>
+        <p:txBody>
+          <a:bodyPr rtlCol="0" anchor="ctr"/>
+          <a:lstStyle/>
+          <a:p>
+            <a:pPr algn="ctr"/>
+            <a:endParaRPr lang="ko-KR" altLang="en-US"/>
+          </a:p>
+        </p:txBody>
+      </p:sp>
+      <p:sp>
+        <p:nvSpPr>
+          <p:cNvPr id="11" name="TextBox 10">
+            <a:extLst>
+              <a:ext uri="{FF2B5EF4-FFF2-40B4-BE49-F238E27FC236}">
+                <a16:creationId xmlns:a16="http://schemas.microsoft.com/office/drawing/2014/main" id="{38604F51-872E-A260-6AF5-E713486E5576}"/>
+              </a:ext>
+            </a:extLst>
+          </p:cNvPr>
+          <p:cNvSpPr txBox="1"/>
+          <p:nvPr/>
+        </p:nvSpPr>
+        <p:spPr>
+          <a:xfrm>
+            <a:off x="1615085" y="4131446"/>
+            <a:ext cx="3489960" cy="956993"/>
+          </a:xfrm>
+          <a:prstGeom prst="rect">
+            <a:avLst/>
+          </a:prstGeom>
+          <a:noFill/>
+        </p:spPr>
+        <p:txBody>
+          <a:bodyPr wrap="square" rtlCol="0">
+            <a:spAutoFit/>
+          </a:bodyPr>
+          <a:lstStyle/>
+          <a:p>
+            <a:pPr marL="342900" indent="-342900">
+              <a:lnSpc>
+                <a:spcPct val="150000"/>
+              </a:lnSpc>
+              <a:buAutoNum type="arabicPeriod"/>
+            </a:pPr>
+            <a:r>
+              <a:rPr lang="ko-KR" altLang="en-US" sz="1300" dirty="0">
+                <a:solidFill>
+                  <a:schemeClr val="bg1"/>
+                </a:solidFill>
+                <a:latin typeface="Microsoft GothicNeo" panose="020B0500000101010101" pitchFamily="50" charset="-127"/>
+                <a:ea typeface="Microsoft GothicNeo" panose="020B0500000101010101" pitchFamily="50" charset="-127"/>
+                <a:cs typeface="Microsoft GothicNeo" panose="020B0500000101010101" pitchFamily="50" charset="-127"/>
+              </a:rPr>
+              <a:t>고객 이탈 예방</a:t>
+            </a:r>
+            <a:endParaRPr lang="en-US" altLang="ko-KR" sz="1300" dirty="0">
+              <a:solidFill>
+                <a:schemeClr val="bg1"/>
+              </a:solidFill>
+              <a:latin typeface="Microsoft GothicNeo" panose="020B0500000101010101" pitchFamily="50" charset="-127"/>
+              <a:ea typeface="Microsoft GothicNeo" panose="020B0500000101010101" pitchFamily="50" charset="-127"/>
+              <a:cs typeface="Microsoft GothicNeo" panose="020B0500000101010101" pitchFamily="50" charset="-127"/>
+            </a:endParaRPr>
+          </a:p>
+          <a:p>
+            <a:pPr marL="342900" indent="-342900">
+              <a:lnSpc>
+                <a:spcPct val="150000"/>
+              </a:lnSpc>
+              <a:buAutoNum type="arabicPeriod"/>
+            </a:pPr>
+            <a:r>
+              <a:rPr lang="ko-KR" altLang="en-US" sz="1300" dirty="0">
+                <a:solidFill>
+                  <a:schemeClr val="bg1"/>
+                </a:solidFill>
+                <a:latin typeface="Microsoft GothicNeo" panose="020B0500000101010101" pitchFamily="50" charset="-127"/>
+                <a:ea typeface="Microsoft GothicNeo" panose="020B0500000101010101" pitchFamily="50" charset="-127"/>
+                <a:cs typeface="Microsoft GothicNeo" panose="020B0500000101010101" pitchFamily="50" charset="-127"/>
+              </a:rPr>
+              <a:t>서비스 개선 포인트</a:t>
+            </a:r>
+            <a:endParaRPr lang="en-US" altLang="ko-KR" sz="1300" dirty="0">
+              <a:solidFill>
+                <a:schemeClr val="bg1"/>
+              </a:solidFill>
+              <a:latin typeface="Microsoft GothicNeo" panose="020B0500000101010101" pitchFamily="50" charset="-127"/>
+              <a:ea typeface="Microsoft GothicNeo" panose="020B0500000101010101" pitchFamily="50" charset="-127"/>
+              <a:cs typeface="Microsoft GothicNeo" panose="020B0500000101010101" pitchFamily="50" charset="-127"/>
+            </a:endParaRPr>
+          </a:p>
+          <a:p>
+            <a:pPr marL="342900" indent="-342900">
+              <a:lnSpc>
+                <a:spcPct val="150000"/>
+              </a:lnSpc>
+              <a:buAutoNum type="arabicPeriod"/>
+            </a:pPr>
+            <a:r>
+              <a:rPr lang="ko-KR" altLang="en-US" sz="1300" dirty="0">
+                <a:solidFill>
+                  <a:schemeClr val="bg1"/>
+                </a:solidFill>
+                <a:latin typeface="Microsoft GothicNeo" panose="020B0500000101010101" pitchFamily="50" charset="-127"/>
+                <a:ea typeface="Microsoft GothicNeo" panose="020B0500000101010101" pitchFamily="50" charset="-127"/>
+                <a:cs typeface="Microsoft GothicNeo" panose="020B0500000101010101" pitchFamily="50" charset="-127"/>
+              </a:rPr>
+              <a:t>설명 가능성 확보</a:t>
+            </a:r>
+          </a:p>
+        </p:txBody>
+      </p:sp>
+      <p:sp>
+        <p:nvSpPr>
+          <p:cNvPr id="12" name="TextBox 11">
+            <a:extLst>
+              <a:ext uri="{FF2B5EF4-FFF2-40B4-BE49-F238E27FC236}">
+                <a16:creationId xmlns:a16="http://schemas.microsoft.com/office/drawing/2014/main" id="{20665A75-D052-F995-609A-4F536588C94F}"/>
+              </a:ext>
+            </a:extLst>
+          </p:cNvPr>
+          <p:cNvSpPr txBox="1"/>
+          <p:nvPr/>
+        </p:nvSpPr>
+        <p:spPr>
+          <a:xfrm>
+            <a:off x="8702040" y="4108308"/>
+            <a:ext cx="3489960" cy="956993"/>
+          </a:xfrm>
+          <a:prstGeom prst="rect">
+            <a:avLst/>
+          </a:prstGeom>
+          <a:noFill/>
+        </p:spPr>
+        <p:txBody>
+          <a:bodyPr wrap="square" rtlCol="0">
+            <a:spAutoFit/>
+          </a:bodyPr>
+          <a:lstStyle/>
+          <a:p>
+            <a:pPr marL="285750" indent="-285750">
+              <a:lnSpc>
+                <a:spcPct val="150000"/>
+              </a:lnSpc>
+              <a:buFont typeface="Wingdings" panose="05000000000000000000" pitchFamily="2" charset="2"/>
+              <a:buChar char="ü"/>
+            </a:pPr>
+            <a:r>
+              <a:rPr lang="ko-KR" altLang="en-US" sz="1300" dirty="0">
+                <a:solidFill>
+                  <a:schemeClr val="bg1"/>
+                </a:solidFill>
+                <a:latin typeface="Microsoft GothicNeo" panose="020B0500000101010101" pitchFamily="50" charset="-127"/>
+                <a:ea typeface="Microsoft GothicNeo" panose="020B0500000101010101" pitchFamily="50" charset="-127"/>
+                <a:cs typeface="Microsoft GothicNeo" panose="020B0500000101010101" pitchFamily="50" charset="-127"/>
+              </a:rPr>
+              <a:t>맞춤형 대응 전략 수립</a:t>
+            </a:r>
+            <a:endParaRPr lang="en-US" altLang="ko-KR" sz="1300" dirty="0">
+              <a:solidFill>
+                <a:schemeClr val="bg1"/>
+              </a:solidFill>
+              <a:latin typeface="Microsoft GothicNeo" panose="020B0500000101010101" pitchFamily="50" charset="-127"/>
+              <a:ea typeface="Microsoft GothicNeo" panose="020B0500000101010101" pitchFamily="50" charset="-127"/>
+              <a:cs typeface="Microsoft GothicNeo" panose="020B0500000101010101" pitchFamily="50" charset="-127"/>
+            </a:endParaRPr>
+          </a:p>
+          <a:p>
+            <a:pPr marL="285750" indent="-285750">
+              <a:lnSpc>
+                <a:spcPct val="150000"/>
+              </a:lnSpc>
+              <a:buFont typeface="Wingdings" panose="05000000000000000000" pitchFamily="2" charset="2"/>
+              <a:buChar char="ü"/>
+            </a:pPr>
+            <a:r>
+              <a:rPr lang="ko-KR" altLang="en-US" sz="1300" dirty="0">
+                <a:solidFill>
+                  <a:schemeClr val="bg1"/>
+                </a:solidFill>
+                <a:latin typeface="Microsoft GothicNeo" panose="020B0500000101010101" pitchFamily="50" charset="-127"/>
+                <a:ea typeface="Microsoft GothicNeo" panose="020B0500000101010101" pitchFamily="50" charset="-127"/>
+                <a:cs typeface="Microsoft GothicNeo" panose="020B0500000101010101" pitchFamily="50" charset="-127"/>
+              </a:rPr>
+              <a:t>서비스 개선지표 활용</a:t>
+            </a:r>
+            <a:endParaRPr lang="en-US" altLang="ko-KR" sz="1300" dirty="0">
+              <a:solidFill>
+                <a:schemeClr val="bg1"/>
+              </a:solidFill>
+              <a:latin typeface="Microsoft GothicNeo" panose="020B0500000101010101" pitchFamily="50" charset="-127"/>
+              <a:ea typeface="Microsoft GothicNeo" panose="020B0500000101010101" pitchFamily="50" charset="-127"/>
+              <a:cs typeface="Microsoft GothicNeo" panose="020B0500000101010101" pitchFamily="50" charset="-127"/>
+            </a:endParaRPr>
+          </a:p>
+          <a:p>
+            <a:pPr marL="285750" indent="-285750">
+              <a:lnSpc>
+                <a:spcPct val="150000"/>
+              </a:lnSpc>
+              <a:buFont typeface="Wingdings" panose="05000000000000000000" pitchFamily="2" charset="2"/>
+              <a:buChar char="ü"/>
+            </a:pPr>
+            <a:r>
+              <a:rPr lang="ko-KR" altLang="en-US" sz="1300" dirty="0">
+                <a:solidFill>
+                  <a:schemeClr val="bg1"/>
+                </a:solidFill>
+                <a:latin typeface="Microsoft GothicNeo" panose="020B0500000101010101" pitchFamily="50" charset="-127"/>
+                <a:ea typeface="Microsoft GothicNeo" panose="020B0500000101010101" pitchFamily="50" charset="-127"/>
+                <a:cs typeface="Microsoft GothicNeo" panose="020B0500000101010101" pitchFamily="50" charset="-127"/>
+              </a:rPr>
+              <a:t>불만족 가능성 요인 설명 </a:t>
+            </a:r>
+          </a:p>
+        </p:txBody>
+      </p:sp>
+    </p:spTree>
+    <p:extLst>
+      <p:ext uri="{BB962C8B-B14F-4D97-AF65-F5344CB8AC3E}">
+        <p14:creationId xmlns:p14="http://schemas.microsoft.com/office/powerpoint/2010/main" val="1215456191"/>
       </p:ext>
     </p:extLst>
   </p:cSld>
